--- a/LOH/KDD/LOH Material Valuation.pptx
+++ b/LOH/KDD/LOH Material Valuation.pptx
@@ -5,18 +5,23 @@
     <p:sldMasterId id="2147483678" r:id="rId4"/>
   </p:sldMasterIdLst>
   <p:notesMasterIdLst>
-    <p:notesMasterId r:id="rId6"/>
+    <p:notesMasterId r:id="rId11"/>
   </p:notesMasterIdLst>
   <p:handoutMasterIdLst>
-    <p:handoutMasterId r:id="rId7"/>
+    <p:handoutMasterId r:id="rId12"/>
   </p:handoutMasterIdLst>
   <p:sldIdLst>
-    <p:sldId id="4925" r:id="rId5"/>
+    <p:sldId id="4926" r:id="rId5"/>
+    <p:sldId id="308" r:id="rId6"/>
+    <p:sldId id="305" r:id="rId7"/>
+    <p:sldId id="306" r:id="rId8"/>
+    <p:sldId id="309" r:id="rId9"/>
+    <p:sldId id="4925" r:id="rId10"/>
   </p:sldIdLst>
   <p:sldSz cx="12192000" cy="6858000"/>
   <p:notesSz cx="7099300" cy="10234613"/>
   <p:custDataLst>
-    <p:tags r:id="rId8"/>
+    <p:tags r:id="rId13"/>
   </p:custDataLst>
   <p:defaultTextStyle>
     <a:defPPr>
@@ -300,7 +305,7 @@
           <a:p>
             <a:fld id="{18273A9F-F4CA-4D45-8EF0-529742FEA3B8}" type="datetimeFigureOut">
               <a:rPr lang="en-GB"/>
-              <a:t>15/10/2026</a:t>
+              <a:t>18/10/2026</a:t>
             </a:fld>
             <a:endParaRPr lang="en-GB"/>
           </a:p>
@@ -366,7 +371,7 @@
           <a:p>
             <a:fld id="{2B16465A-0984-44B7-B81D-0B02927AFA2E}" type="slidenum">
               <a:rPr lang="en-GB"/>
-              <a:t>‹#›</a:t>
+              <a:t>‹Nr.›</a:t>
             </a:fld>
             <a:endParaRPr lang="en-GB"/>
           </a:p>
@@ -705,7 +710,7 @@
               <a:pPr>
                 <a:defRPr/>
               </a:pPr>
-              <a:t>‹#›</a:t>
+              <a:t>‹Nr.›</a:t>
             </a:fld>
             <a:endParaRPr lang="de-DE"/>
           </a:p>
@@ -860,6 +865,244 @@
 </p:notesMaster>
 </file>
 
+<file path=ppt/notesSlides/notesSlide1.xml><?xml version="1.0" encoding="utf-8"?>
+<p:notes xmlns:a="http://schemas.openxmlformats.org/drawingml/2006/main" xmlns:r="http://schemas.openxmlformats.org/officeDocument/2006/relationships" xmlns:p="http://schemas.openxmlformats.org/presentationml/2006/main">
+  <p:cSld>
+    <p:spTree>
+      <p:nvGrpSpPr>
+        <p:cNvPr id="1" name=""/>
+        <p:cNvGrpSpPr/>
+        <p:nvPr/>
+      </p:nvGrpSpPr>
+      <p:grpSpPr>
+        <a:xfrm>
+          <a:off x="0" y="0"/>
+          <a:ext cx="0" cy="0"/>
+          <a:chOff x="0" y="0"/>
+          <a:chExt cx="0" cy="0"/>
+        </a:xfrm>
+      </p:grpSpPr>
+      <p:sp>
+        <p:nvSpPr>
+          <p:cNvPr id="2" name="Folienbildplatzhalter 1"/>
+          <p:cNvSpPr>
+            <a:spLocks noGrp="1" noRot="1" noChangeAspect="1"/>
+          </p:cNvSpPr>
+          <p:nvPr>
+            <p:ph type="sldImg"/>
+          </p:nvPr>
+        </p:nvSpPr>
+        <p:spPr/>
+      </p:sp>
+      <p:sp>
+        <p:nvSpPr>
+          <p:cNvPr id="3" name="Notizenplatzhalter 2"/>
+          <p:cNvSpPr>
+            <a:spLocks noGrp="1"/>
+          </p:cNvSpPr>
+          <p:nvPr>
+            <p:ph type="body" idx="1"/>
+          </p:nvPr>
+        </p:nvSpPr>
+        <p:spPr/>
+        <p:txBody>
+          <a:bodyPr>
+            <a:normAutofit/>
+          </a:bodyPr>
+          <a:lstStyle/>
+          <a:p>
+            <a:r>
+              <a:rPr lang="de-DE" dirty="0"/>
+              <a:t>Unser neues Key Visual:</a:t>
+            </a:r>
+            <a:r>
+              <a:rPr lang="de-DE" baseline="0" dirty="0"/>
+              <a:t> Verbindung mit einer Vision, die uns in den nächsten Jahren begleiten wird.</a:t>
+            </a:r>
+          </a:p>
+          <a:p>
+            <a:endParaRPr lang="de-DE" baseline="0" dirty="0"/>
+          </a:p>
+          <a:p>
+            <a:pPr marL="0" marR="0" indent="0" algn="l" defTabSz="914400" rtl="0" eaLnBrk="1" fontAlgn="auto" latinLnBrk="0" hangingPunct="1">
+              <a:lnSpc>
+                <a:spcPct val="100000"/>
+              </a:lnSpc>
+              <a:spcBef>
+                <a:spcPts val="0"/>
+              </a:spcBef>
+              <a:spcAft>
+                <a:spcPts val="0"/>
+              </a:spcAft>
+              <a:buClrTx/>
+              <a:buSzTx/>
+              <a:buFontTx/>
+              <a:buNone/>
+              <a:tabLst/>
+              <a:defRPr/>
+            </a:pPr>
+            <a:r>
+              <a:rPr lang="de-DE" i="1" baseline="0" dirty="0"/>
+              <a:t>Idee: Wir könnten den Textilrahmen „Key Visual“ (steht hinter meinem Platz) mitbringen und ein rotes Tuch darüber legen, Enthüllung nach dem Film </a:t>
+            </a:r>
+            <a:endParaRPr lang="de-DE" i="1" dirty="0"/>
+          </a:p>
+          <a:p>
+            <a:endParaRPr lang="de-DE" dirty="0"/>
+          </a:p>
+        </p:txBody>
+      </p:sp>
+      <p:sp>
+        <p:nvSpPr>
+          <p:cNvPr id="4" name="Foliennummernplatzhalter 3"/>
+          <p:cNvSpPr>
+            <a:spLocks noGrp="1"/>
+          </p:cNvSpPr>
+          <p:nvPr>
+            <p:ph type="sldNum" sz="quarter" idx="10"/>
+          </p:nvPr>
+        </p:nvSpPr>
+        <p:spPr/>
+        <p:txBody>
+          <a:bodyPr/>
+          <a:lstStyle/>
+          <a:p>
+            <a:fld id="{62928EF5-A62C-4775-BE32-0B4BBC139877}" type="slidenum">
+              <a:rPr lang="de-DE" smtClean="0"/>
+              <a:pPr/>
+              <a:t>3</a:t>
+            </a:fld>
+            <a:endParaRPr lang="de-DE"/>
+          </a:p>
+        </p:txBody>
+      </p:sp>
+    </p:spTree>
+  </p:cSld>
+  <p:clrMapOvr>
+    <a:masterClrMapping/>
+  </p:clrMapOvr>
+</p:notes>
+</file>
+
+<file path=ppt/notesSlides/notesSlide2.xml><?xml version="1.0" encoding="utf-8"?>
+<p:notes xmlns:a="http://schemas.openxmlformats.org/drawingml/2006/main" xmlns:r="http://schemas.openxmlformats.org/officeDocument/2006/relationships" xmlns:p="http://schemas.openxmlformats.org/presentationml/2006/main">
+  <p:cSld>
+    <p:spTree>
+      <p:nvGrpSpPr>
+        <p:cNvPr id="1" name=""/>
+        <p:cNvGrpSpPr/>
+        <p:nvPr/>
+      </p:nvGrpSpPr>
+      <p:grpSpPr>
+        <a:xfrm>
+          <a:off x="0" y="0"/>
+          <a:ext cx="0" cy="0"/>
+          <a:chOff x="0" y="0"/>
+          <a:chExt cx="0" cy="0"/>
+        </a:xfrm>
+      </p:grpSpPr>
+      <p:sp>
+        <p:nvSpPr>
+          <p:cNvPr id="2" name="Folienbildplatzhalter 1"/>
+          <p:cNvSpPr>
+            <a:spLocks noGrp="1" noRot="1" noChangeAspect="1"/>
+          </p:cNvSpPr>
+          <p:nvPr>
+            <p:ph type="sldImg"/>
+          </p:nvPr>
+        </p:nvSpPr>
+        <p:spPr/>
+      </p:sp>
+      <p:sp>
+        <p:nvSpPr>
+          <p:cNvPr id="3" name="Notizenplatzhalter 2"/>
+          <p:cNvSpPr>
+            <a:spLocks noGrp="1"/>
+          </p:cNvSpPr>
+          <p:nvPr>
+            <p:ph type="body" idx="1"/>
+          </p:nvPr>
+        </p:nvSpPr>
+        <p:spPr/>
+        <p:txBody>
+          <a:bodyPr>
+            <a:normAutofit/>
+          </a:bodyPr>
+          <a:lstStyle/>
+          <a:p>
+            <a:r>
+              <a:rPr lang="de-DE" dirty="0"/>
+              <a:t>Unser neues Key Visual:</a:t>
+            </a:r>
+            <a:r>
+              <a:rPr lang="de-DE" baseline="0" dirty="0"/>
+              <a:t> Verbindung mit einer Vision, die uns in den nächsten Jahren begleiten wird.</a:t>
+            </a:r>
+          </a:p>
+          <a:p>
+            <a:endParaRPr lang="de-DE" baseline="0" dirty="0"/>
+          </a:p>
+          <a:p>
+            <a:pPr marL="0" marR="0" indent="0" algn="l" defTabSz="914400" rtl="0" eaLnBrk="1" fontAlgn="auto" latinLnBrk="0" hangingPunct="1">
+              <a:lnSpc>
+                <a:spcPct val="100000"/>
+              </a:lnSpc>
+              <a:spcBef>
+                <a:spcPts val="0"/>
+              </a:spcBef>
+              <a:spcAft>
+                <a:spcPts val="0"/>
+              </a:spcAft>
+              <a:buClrTx/>
+              <a:buSzTx/>
+              <a:buFontTx/>
+              <a:buNone/>
+              <a:tabLst/>
+              <a:defRPr/>
+            </a:pPr>
+            <a:r>
+              <a:rPr lang="de-DE" i="1" baseline="0" dirty="0"/>
+              <a:t>Idee: Wir könnten den Textilrahmen „Key Visual“ (steht hinter meinem Platz) mitbringen und ein rotes Tuch darüber legen, Enthüllung nach dem Film </a:t>
+            </a:r>
+            <a:endParaRPr lang="de-DE" i="1" dirty="0"/>
+          </a:p>
+          <a:p>
+            <a:endParaRPr lang="de-DE" dirty="0"/>
+          </a:p>
+        </p:txBody>
+      </p:sp>
+      <p:sp>
+        <p:nvSpPr>
+          <p:cNvPr id="4" name="Foliennummernplatzhalter 3"/>
+          <p:cNvSpPr>
+            <a:spLocks noGrp="1"/>
+          </p:cNvSpPr>
+          <p:nvPr>
+            <p:ph type="sldNum" sz="quarter" idx="10"/>
+          </p:nvPr>
+        </p:nvSpPr>
+        <p:spPr/>
+        <p:txBody>
+          <a:bodyPr/>
+          <a:lstStyle/>
+          <a:p>
+            <a:fld id="{62928EF5-A62C-4775-BE32-0B4BBC139877}" type="slidenum">
+              <a:rPr lang="de-DE" smtClean="0"/>
+              <a:pPr/>
+              <a:t>4</a:t>
+            </a:fld>
+            <a:endParaRPr lang="de-DE"/>
+          </a:p>
+        </p:txBody>
+      </p:sp>
+    </p:spTree>
+  </p:cSld>
+  <p:clrMapOvr>
+    <a:masterClrMapping/>
+  </p:clrMapOvr>
+</p:notes>
+</file>
+
 <file path=ppt/slideLayouts/slideLayout1.xml><?xml version="1.0" encoding="utf-8"?>
 <p:sldLayout xmlns:a="http://schemas.openxmlformats.org/drawingml/2006/main" xmlns:r="http://schemas.openxmlformats.org/officeDocument/2006/relationships" xmlns:p="http://schemas.openxmlformats.org/presentationml/2006/main" preserve="1">
   <p:cSld name="Titelfolie">
@@ -1075,7 +1318,7 @@
               <a:pPr>
                 <a:defRPr/>
               </a:pPr>
-              <a:t>‹#›</a:t>
+              <a:t>‹Nr.›</a:t>
             </a:fld>
             <a:endParaRPr lang="de-DE"/>
           </a:p>
@@ -1373,6 +1616,247 @@
 </p:sldLayout>
 </file>
 
+<file path=ppt/slideLayouts/slideLayout10.xml><?xml version="1.0" encoding="utf-8"?>
+<p:sldLayout xmlns:a="http://schemas.openxmlformats.org/drawingml/2006/main" xmlns:r="http://schemas.openxmlformats.org/officeDocument/2006/relationships" xmlns:p="http://schemas.openxmlformats.org/presentationml/2006/main" userDrawn="1">
+  <p:cSld name="Titel und Inhalt">
+    <p:spTree>
+      <p:nvGrpSpPr>
+        <p:cNvPr id="1" name=""/>
+        <p:cNvGrpSpPr/>
+        <p:nvPr/>
+      </p:nvGrpSpPr>
+      <p:grpSpPr>
+        <a:xfrm>
+          <a:off x="0" y="0"/>
+          <a:ext cx="0" cy="0"/>
+          <a:chOff x="0" y="0"/>
+          <a:chExt cx="0" cy="0"/>
+        </a:xfrm>
+      </p:grpSpPr>
+      <p:sp>
+        <p:nvSpPr>
+          <p:cNvPr id="2" name="Titel 1"/>
+          <p:cNvSpPr>
+            <a:spLocks noGrp="1"/>
+          </p:cNvSpPr>
+          <p:nvPr>
+            <p:ph type="title"/>
+          </p:nvPr>
+        </p:nvSpPr>
+        <p:spPr>
+          <a:xfrm>
+            <a:off x="495300" y="444501"/>
+            <a:ext cx="8934451" cy="860360"/>
+          </a:xfrm>
+        </p:spPr>
+        <p:txBody>
+          <a:bodyPr/>
+          <a:lstStyle/>
+          <a:p>
+            <a:r>
+              <a:rPr lang="de-DE"/>
+              <a:t>Titelmasterformat durch Klicken bearbeiten</a:t>
+            </a:r>
+            <a:endParaRPr lang="de-DE" dirty="0"/>
+          </a:p>
+        </p:txBody>
+      </p:sp>
+      <p:sp>
+        <p:nvSpPr>
+          <p:cNvPr id="7" name="Textplatzhalter 6"/>
+          <p:cNvSpPr>
+            <a:spLocks noGrp="1"/>
+          </p:cNvSpPr>
+          <p:nvPr>
+            <p:ph type="body" sz="quarter" idx="12"/>
+          </p:nvPr>
+        </p:nvSpPr>
+        <p:spPr>
+          <a:xfrm>
+            <a:off x="490848" y="1684867"/>
+            <a:ext cx="11257808" cy="4624453"/>
+          </a:xfrm>
+        </p:spPr>
+        <p:txBody>
+          <a:bodyPr/>
+          <a:lstStyle>
+            <a:lvl2pPr marL="243411" indent="-243411">
+              <a:defRPr/>
+            </a:lvl2pPr>
+          </a:lstStyle>
+          <a:p>
+            <a:pPr lvl="0"/>
+            <a:r>
+              <a:rPr lang="de-DE"/>
+              <a:t>Textmasterformate durch Klicken bearbeiten</a:t>
+            </a:r>
+          </a:p>
+          <a:p>
+            <a:pPr lvl="1"/>
+            <a:r>
+              <a:rPr lang="de-DE"/>
+              <a:t>Zweite Ebene</a:t>
+            </a:r>
+          </a:p>
+          <a:p>
+            <a:pPr lvl="2"/>
+            <a:r>
+              <a:rPr lang="de-DE"/>
+              <a:t>Dritte Ebene</a:t>
+            </a:r>
+          </a:p>
+          <a:p>
+            <a:pPr lvl="3"/>
+            <a:r>
+              <a:rPr lang="de-DE"/>
+              <a:t>Vierte Ebene</a:t>
+            </a:r>
+          </a:p>
+          <a:p>
+            <a:pPr lvl="4"/>
+            <a:r>
+              <a:rPr lang="de-DE"/>
+              <a:t>Fünfte Ebene</a:t>
+            </a:r>
+            <a:endParaRPr lang="de-DE" dirty="0"/>
+          </a:p>
+        </p:txBody>
+      </p:sp>
+      <p:sp>
+        <p:nvSpPr>
+          <p:cNvPr id="8" name="Datumsplatzhalter 9"/>
+          <p:cNvSpPr>
+            <a:spLocks noGrp="1"/>
+          </p:cNvSpPr>
+          <p:nvPr>
+            <p:ph type="dt" sz="half" idx="2"/>
+          </p:nvPr>
+        </p:nvSpPr>
+        <p:spPr>
+          <a:xfrm>
+            <a:off x="1120363" y="6381580"/>
+            <a:ext cx="8448939" cy="217417"/>
+          </a:xfrm>
+          <a:prstGeom prst="rect">
+            <a:avLst/>
+          </a:prstGeom>
+        </p:spPr>
+        <p:txBody>
+          <a:bodyPr vert="horz" lIns="0" tIns="0" rIns="0" bIns="0" rtlCol="0" anchor="ctr"/>
+          <a:lstStyle>
+            <a:lvl1pPr algn="l">
+              <a:defRPr lang="de-DE" sz="933" kern="1200" smtClean="0">
+                <a:solidFill>
+                  <a:schemeClr val="accent2"/>
+                </a:solidFill>
+                <a:latin typeface="+mn-lt"/>
+                <a:ea typeface="+mn-ea"/>
+                <a:cs typeface="+mn-cs"/>
+              </a:defRPr>
+            </a:lvl1pPr>
+          </a:lstStyle>
+          <a:p>
+            <a:fld id="{058B40CA-D5A0-43D7-9954-3C8CCE2C62CB}" type="datetime1">
+              <a:rPr lang="de-DE" smtClean="0"/>
+              <a:pPr/>
+              <a:t>2026-10-18</a:t>
+            </a:fld>
+            <a:endParaRPr lang="de-DE" dirty="0"/>
+          </a:p>
+        </p:txBody>
+      </p:sp>
+      <p:sp>
+        <p:nvSpPr>
+          <p:cNvPr id="9" name="Foliennummernplatzhalter 22"/>
+          <p:cNvSpPr>
+            <a:spLocks noGrp="1"/>
+          </p:cNvSpPr>
+          <p:nvPr>
+            <p:ph type="sldNum" sz="quarter" idx="4"/>
+          </p:nvPr>
+        </p:nvSpPr>
+        <p:spPr>
+          <a:xfrm>
+            <a:off x="496918" y="6381580"/>
+            <a:ext cx="623445" cy="215979"/>
+          </a:xfrm>
+          <a:prstGeom prst="rect">
+            <a:avLst/>
+          </a:prstGeom>
+        </p:spPr>
+        <p:txBody>
+          <a:bodyPr vert="horz" lIns="0" tIns="0" rIns="0" bIns="0" anchor="ctr"/>
+          <a:lstStyle>
+            <a:lvl1pPr algn="l" eaLnBrk="1" latinLnBrk="0" hangingPunct="1">
+              <a:defRPr kumimoji="0" sz="933" b="1">
+                <a:solidFill>
+                  <a:schemeClr val="accent2"/>
+                </a:solidFill>
+              </a:defRPr>
+            </a:lvl1pPr>
+          </a:lstStyle>
+          <a:p>
+            <a:fld id="{173FEA60-B56A-DE49-B4F9-939AB62E9280}" type="slidenum">
+              <a:rPr lang="de-DE" smtClean="0"/>
+              <a:pPr/>
+              <a:t>‹Nr.›</a:t>
+            </a:fld>
+            <a:endParaRPr lang="de-DE" dirty="0"/>
+          </a:p>
+        </p:txBody>
+      </p:sp>
+      <p:sp>
+        <p:nvSpPr>
+          <p:cNvPr id="12" name="Fußzeilenplatzhalter 4"/>
+          <p:cNvSpPr>
+            <a:spLocks noGrp="1"/>
+          </p:cNvSpPr>
+          <p:nvPr>
+            <p:ph type="ftr" sz="quarter" idx="3"/>
+          </p:nvPr>
+        </p:nvSpPr>
+        <p:spPr>
+          <a:xfrm>
+            <a:off x="495909" y="6614732"/>
+            <a:ext cx="9073393" cy="166777"/>
+          </a:xfrm>
+          <a:prstGeom prst="rect">
+            <a:avLst/>
+          </a:prstGeom>
+        </p:spPr>
+        <p:txBody>
+          <a:bodyPr lIns="0" anchor="b" anchorCtr="0"/>
+          <a:lstStyle>
+            <a:lvl1pPr>
+              <a:defRPr sz="933">
+                <a:solidFill>
+                  <a:schemeClr val="accent2"/>
+                </a:solidFill>
+              </a:defRPr>
+            </a:lvl1pPr>
+          </a:lstStyle>
+          <a:p>
+            <a:r>
+              <a:rPr lang="en-US" sz="800" dirty="0"/>
+              <a:t>Internal: All rights reserved. Distribution within DRÄXLMAIER Group, customer and partners.</a:t>
+            </a:r>
+            <a:endParaRPr lang="de-DE" dirty="0"/>
+          </a:p>
+        </p:txBody>
+      </p:sp>
+    </p:spTree>
+    <p:extLst>
+      <p:ext uri="{BB962C8B-B14F-4D97-AF65-F5344CB8AC3E}">
+        <p14:creationId xmlns:p14="http://schemas.microsoft.com/office/powerpoint/2010/main" val="2398857384"/>
+      </p:ext>
+    </p:extLst>
+  </p:cSld>
+  <p:clrMapOvr>
+    <a:masterClrMapping/>
+  </p:clrMapOvr>
+</p:sldLayout>
+</file>
+
 <file path=ppt/slideLayouts/slideLayout2.xml><?xml version="1.0" encoding="utf-8"?>
 <p:sldLayout xmlns:a="http://schemas.openxmlformats.org/drawingml/2006/main" xmlns:r="http://schemas.openxmlformats.org/officeDocument/2006/relationships" xmlns:p="http://schemas.openxmlformats.org/presentationml/2006/main" preserve="1">
   <p:cSld name="Powerline, Titel, Inhalt">
@@ -1818,7 +2302,7 @@
               <a:pPr>
                 <a:defRPr/>
               </a:pPr>
-              <a:t>‹#›</a:t>
+              <a:t>‹Nr.›</a:t>
             </a:fld>
             <a:endParaRPr lang="en-GB"/>
           </a:p>
@@ -2739,7 +3223,7 @@
               <a:pPr>
                 <a:defRPr/>
               </a:pPr>
-              <a:t>‹#›</a:t>
+              <a:t>‹Nr.›</a:t>
             </a:fld>
             <a:endParaRPr lang="en-GB"/>
           </a:p>
@@ -3678,7 +4162,7 @@
               <a:pPr>
                 <a:defRPr/>
               </a:pPr>
-              <a:t>‹#›</a:t>
+              <a:t>‹Nr.›</a:t>
             </a:fld>
             <a:endParaRPr lang="de-DE"/>
           </a:p>
@@ -4515,7 +4999,7 @@
               <a:pPr>
                 <a:defRPr/>
               </a:pPr>
-              <a:t>‹#›</a:t>
+              <a:t>‹Nr.›</a:t>
             </a:fld>
             <a:endParaRPr lang="en-GB"/>
           </a:p>
@@ -5559,7 +6043,7 @@
               <a:pPr>
                 <a:defRPr/>
               </a:pPr>
-              <a:t>‹#›</a:t>
+              <a:t>‹Nr.›</a:t>
             </a:fld>
             <a:endParaRPr lang="de-DE"/>
           </a:p>
@@ -6603,7 +7087,7 @@
               <a:pPr>
                 <a:defRPr/>
               </a:pPr>
-              <a:t>‹#›</a:t>
+              <a:t>‹Nr.›</a:t>
             </a:fld>
             <a:endParaRPr lang="en-GB"/>
           </a:p>
@@ -7135,7 +7619,7 @@
               <a:pPr>
                 <a:defRPr/>
               </a:pPr>
-              <a:t>‹#›</a:t>
+              <a:t>‹Nr.›</a:t>
             </a:fld>
             <a:endParaRPr lang="en-GB"/>
           </a:p>
@@ -7362,6 +7846,269 @@
 </p:sldLayout>
 </file>
 
+<file path=ppt/slideLayouts/slideLayout9.xml><?xml version="1.0" encoding="utf-8"?>
+<p:sldLayout xmlns:a="http://schemas.openxmlformats.org/drawingml/2006/main" xmlns:r="http://schemas.openxmlformats.org/officeDocument/2006/relationships" xmlns:p="http://schemas.openxmlformats.org/presentationml/2006/main" userDrawn="1">
+  <p:cSld name="Titel und Inhalt - Zahl">
+    <p:spTree>
+      <p:nvGrpSpPr>
+        <p:cNvPr id="1" name=""/>
+        <p:cNvGrpSpPr/>
+        <p:nvPr/>
+      </p:nvGrpSpPr>
+      <p:grpSpPr>
+        <a:xfrm>
+          <a:off x="0" y="0"/>
+          <a:ext cx="0" cy="0"/>
+          <a:chOff x="0" y="0"/>
+          <a:chExt cx="0" cy="0"/>
+        </a:xfrm>
+      </p:grpSpPr>
+      <p:sp>
+        <p:nvSpPr>
+          <p:cNvPr id="13" name="Inhaltsplatzhalter 12"/>
+          <p:cNvSpPr>
+            <a:spLocks noGrp="1"/>
+          </p:cNvSpPr>
+          <p:nvPr>
+            <p:ph sz="quarter" idx="13"/>
+          </p:nvPr>
+        </p:nvSpPr>
+        <p:spPr>
+          <a:xfrm>
+            <a:off x="490847" y="1684868"/>
+            <a:ext cx="11257808" cy="4624889"/>
+          </a:xfrm>
+          <a:prstGeom prst="rect">
+            <a:avLst/>
+          </a:prstGeom>
+        </p:spPr>
+        <p:txBody>
+          <a:bodyPr/>
+          <a:lstStyle>
+            <a:lvl2pPr marL="355591" indent="-355591">
+              <a:buFont typeface="+mj-lt"/>
+              <a:buAutoNum type="arabicPeriod"/>
+              <a:tabLst>
+                <a:tab pos="353475" algn="l"/>
+              </a:tabLst>
+              <a:defRPr/>
+            </a:lvl2pPr>
+            <a:lvl3pPr marL="599002" indent="-361942">
+              <a:buFont typeface="+mj-lt"/>
+              <a:buAutoNum type="arabicPeriod"/>
+              <a:defRPr/>
+            </a:lvl3pPr>
+            <a:lvl4pPr marL="833946" indent="-355591">
+              <a:buFont typeface="+mj-lt"/>
+              <a:buAutoNum type="arabicPeriod"/>
+              <a:defRPr/>
+            </a:lvl4pPr>
+            <a:lvl5pPr marL="1077357" indent="-357708">
+              <a:buFont typeface="+mj-lt"/>
+              <a:buAutoNum type="arabicPeriod"/>
+              <a:defRPr/>
+            </a:lvl5pPr>
+          </a:lstStyle>
+          <a:p>
+            <a:pPr lvl="0"/>
+            <a:r>
+              <a:rPr lang="de-DE"/>
+              <a:t>Textmasterformate durch Klicken bearbeiten</a:t>
+            </a:r>
+          </a:p>
+          <a:p>
+            <a:pPr lvl="1"/>
+            <a:r>
+              <a:rPr lang="de-DE"/>
+              <a:t>Zweite Ebene</a:t>
+            </a:r>
+          </a:p>
+          <a:p>
+            <a:pPr lvl="2"/>
+            <a:r>
+              <a:rPr lang="de-DE"/>
+              <a:t>Dritte Ebene</a:t>
+            </a:r>
+          </a:p>
+          <a:p>
+            <a:pPr lvl="3"/>
+            <a:r>
+              <a:rPr lang="de-DE"/>
+              <a:t>Vierte Ebene</a:t>
+            </a:r>
+          </a:p>
+          <a:p>
+            <a:pPr lvl="4"/>
+            <a:r>
+              <a:rPr lang="de-DE"/>
+              <a:t>Fünfte Ebene</a:t>
+            </a:r>
+            <a:endParaRPr lang="de-DE" dirty="0"/>
+          </a:p>
+        </p:txBody>
+      </p:sp>
+      <p:sp>
+        <p:nvSpPr>
+          <p:cNvPr id="8" name="Datumsplatzhalter 9"/>
+          <p:cNvSpPr>
+            <a:spLocks noGrp="1"/>
+          </p:cNvSpPr>
+          <p:nvPr>
+            <p:ph type="dt" sz="half" idx="2"/>
+          </p:nvPr>
+        </p:nvSpPr>
+        <p:spPr>
+          <a:xfrm>
+            <a:off x="1120363" y="6381580"/>
+            <a:ext cx="8448939" cy="217417"/>
+          </a:xfrm>
+          <a:prstGeom prst="rect">
+            <a:avLst/>
+          </a:prstGeom>
+        </p:spPr>
+        <p:txBody>
+          <a:bodyPr vert="horz" lIns="0" tIns="0" rIns="0" bIns="0" rtlCol="0" anchor="ctr"/>
+          <a:lstStyle>
+            <a:lvl1pPr algn="l">
+              <a:defRPr lang="de-DE" sz="933" kern="1200" smtClean="0">
+                <a:solidFill>
+                  <a:schemeClr val="accent2"/>
+                </a:solidFill>
+                <a:latin typeface="+mn-lt"/>
+                <a:ea typeface="+mn-ea"/>
+                <a:cs typeface="+mn-cs"/>
+              </a:defRPr>
+            </a:lvl1pPr>
+          </a:lstStyle>
+          <a:p>
+            <a:fld id="{A2F13F7F-856E-49FB-95F8-AB54219508A6}" type="datetime1">
+              <a:rPr lang="de-DE" smtClean="0"/>
+              <a:pPr/>
+              <a:t>2026-10-18</a:t>
+            </a:fld>
+            <a:endParaRPr lang="de-DE" dirty="0"/>
+          </a:p>
+        </p:txBody>
+      </p:sp>
+      <p:sp>
+        <p:nvSpPr>
+          <p:cNvPr id="9" name="Foliennummernplatzhalter 22"/>
+          <p:cNvSpPr>
+            <a:spLocks noGrp="1"/>
+          </p:cNvSpPr>
+          <p:nvPr>
+            <p:ph type="sldNum" sz="quarter" idx="4"/>
+          </p:nvPr>
+        </p:nvSpPr>
+        <p:spPr>
+          <a:xfrm>
+            <a:off x="496918" y="6381580"/>
+            <a:ext cx="623445" cy="215979"/>
+          </a:xfrm>
+          <a:prstGeom prst="rect">
+            <a:avLst/>
+          </a:prstGeom>
+        </p:spPr>
+        <p:txBody>
+          <a:bodyPr vert="horz" lIns="0" tIns="0" rIns="0" bIns="0" anchor="ctr"/>
+          <a:lstStyle>
+            <a:lvl1pPr algn="l" eaLnBrk="1" latinLnBrk="0" hangingPunct="1">
+              <a:defRPr kumimoji="0" sz="933" b="1">
+                <a:solidFill>
+                  <a:schemeClr val="accent2"/>
+                </a:solidFill>
+              </a:defRPr>
+            </a:lvl1pPr>
+          </a:lstStyle>
+          <a:p>
+            <a:fld id="{173FEA60-B56A-DE49-B4F9-939AB62E9280}" type="slidenum">
+              <a:rPr lang="de-DE" smtClean="0"/>
+              <a:pPr/>
+              <a:t>‹Nr.›</a:t>
+            </a:fld>
+            <a:endParaRPr lang="de-DE" dirty="0"/>
+          </a:p>
+        </p:txBody>
+      </p:sp>
+      <p:sp>
+        <p:nvSpPr>
+          <p:cNvPr id="10" name="Titel 1"/>
+          <p:cNvSpPr>
+            <a:spLocks noGrp="1"/>
+          </p:cNvSpPr>
+          <p:nvPr>
+            <p:ph type="title"/>
+          </p:nvPr>
+        </p:nvSpPr>
+        <p:spPr>
+          <a:xfrm>
+            <a:off x="495300" y="444501"/>
+            <a:ext cx="8934451" cy="860360"/>
+          </a:xfrm>
+        </p:spPr>
+        <p:txBody>
+          <a:bodyPr/>
+          <a:lstStyle/>
+          <a:p>
+            <a:r>
+              <a:rPr lang="de-DE"/>
+              <a:t>Titelmasterformat durch Klicken bearbeiten</a:t>
+            </a:r>
+          </a:p>
+        </p:txBody>
+      </p:sp>
+      <p:sp>
+        <p:nvSpPr>
+          <p:cNvPr id="7" name="Fußzeilenplatzhalter 4"/>
+          <p:cNvSpPr>
+            <a:spLocks noGrp="1"/>
+          </p:cNvSpPr>
+          <p:nvPr>
+            <p:ph type="ftr" sz="quarter" idx="3"/>
+          </p:nvPr>
+        </p:nvSpPr>
+        <p:spPr>
+          <a:xfrm>
+            <a:off x="495909" y="6614732"/>
+            <a:ext cx="9073393" cy="166777"/>
+          </a:xfrm>
+          <a:prstGeom prst="rect">
+            <a:avLst/>
+          </a:prstGeom>
+        </p:spPr>
+        <p:txBody>
+          <a:bodyPr lIns="0" anchor="b" anchorCtr="0"/>
+          <a:lstStyle>
+            <a:lvl1pPr>
+              <a:defRPr sz="933">
+                <a:solidFill>
+                  <a:schemeClr val="accent2"/>
+                </a:solidFill>
+              </a:defRPr>
+            </a:lvl1pPr>
+          </a:lstStyle>
+          <a:p>
+            <a:r>
+              <a:rPr lang="en-US" sz="800" dirty="0"/>
+              <a:t>Internal: All rights reserved. Distribution within DRÄXLMAIER Group, customer and partners.</a:t>
+            </a:r>
+            <a:endParaRPr lang="de-DE" dirty="0"/>
+          </a:p>
+        </p:txBody>
+      </p:sp>
+    </p:spTree>
+    <p:extLst>
+      <p:ext uri="{BB962C8B-B14F-4D97-AF65-F5344CB8AC3E}">
+        <p14:creationId xmlns:p14="http://schemas.microsoft.com/office/powerpoint/2010/main" val="1818677053"/>
+      </p:ext>
+    </p:extLst>
+  </p:cSld>
+  <p:clrMapOvr>
+    <a:masterClrMapping/>
+  </p:clrMapOvr>
+</p:sldLayout>
+</file>
+
 <file path=ppt/slideMasters/slideMaster1.xml><?xml version="1.0" encoding="utf-8"?>
 <p:sldMaster xmlns:a="http://schemas.openxmlformats.org/drawingml/2006/main" xmlns:r="http://schemas.openxmlformats.org/officeDocument/2006/relationships" xmlns:p="http://schemas.openxmlformats.org/presentationml/2006/main">
   <p:cSld>
@@ -7393,7 +8140,7 @@
           <p:cNvSpPr/>
           <p:nvPr>
             <p:custDataLst>
-              <p:tags r:id="rId10"/>
+              <p:tags r:id="rId12"/>
             </p:custDataLst>
           </p:nvPr>
         </p:nvSpPr>
@@ -7572,7 +8319,7 @@
               <a:pPr>
                 <a:defRPr/>
               </a:pPr>
-              <a:t>‹#›</a:t>
+              <a:t>‹Nr.›</a:t>
             </a:fld>
             <a:endParaRPr lang="en-GB"/>
           </a:p>
@@ -7692,6 +8439,8 @@
     <p:sldLayoutId id="2147483684" r:id="rId6"/>
     <p:sldLayoutId id="2147483685" r:id="rId7"/>
     <p:sldLayoutId id="2147483686" r:id="rId8"/>
+    <p:sldLayoutId id="2147483687" r:id="rId9"/>
+    <p:sldLayoutId id="2147483688" r:id="rId10"/>
   </p:sldLayoutIdLst>
   <p:hf hdr="0" dt="0"/>
   <p:txStyles>
@@ -8119,6 +8868,5908 @@
 </file>
 
 <file path=ppt/slides/slide1.xml><?xml version="1.0" encoding="utf-8"?>
+<p:sld xmlns:a="http://schemas.openxmlformats.org/drawingml/2006/main" xmlns:r="http://schemas.openxmlformats.org/officeDocument/2006/relationships" xmlns:p="http://schemas.openxmlformats.org/presentationml/2006/main">
+  <p:cSld>
+    <p:spTree>
+      <p:nvGrpSpPr>
+        <p:cNvPr id="1" name=""/>
+        <p:cNvGrpSpPr/>
+        <p:nvPr/>
+      </p:nvGrpSpPr>
+      <p:grpSpPr>
+        <a:xfrm>
+          <a:off x="0" y="0"/>
+          <a:ext cx="0" cy="0"/>
+          <a:chOff x="0" y="0"/>
+          <a:chExt cx="0" cy="0"/>
+        </a:xfrm>
+      </p:grpSpPr>
+      <p:sp>
+        <p:nvSpPr>
+          <p:cNvPr id="6" name="Titel 5">
+            <a:extLst>
+              <a:ext uri="{FF2B5EF4-FFF2-40B4-BE49-F238E27FC236}">
+                <a16:creationId xmlns:a16="http://schemas.microsoft.com/office/drawing/2014/main" id="{1E1C7F8E-4599-520E-9B83-474B6771212B}"/>
+              </a:ext>
+            </a:extLst>
+          </p:cNvPr>
+          <p:cNvSpPr>
+            <a:spLocks noGrp="1"/>
+          </p:cNvSpPr>
+          <p:nvPr>
+            <p:ph type="title"/>
+          </p:nvPr>
+        </p:nvSpPr>
+        <p:spPr/>
+        <p:txBody>
+          <a:bodyPr/>
+          <a:lstStyle/>
+          <a:p>
+            <a:r>
+              <a:rPr lang="de-DE" dirty="0"/>
+              <a:t>KDD</a:t>
+            </a:r>
+          </a:p>
+        </p:txBody>
+      </p:sp>
+      <p:sp>
+        <p:nvSpPr>
+          <p:cNvPr id="7" name="Textplatzhalter 6">
+            <a:extLst>
+              <a:ext uri="{FF2B5EF4-FFF2-40B4-BE49-F238E27FC236}">
+                <a16:creationId xmlns:a16="http://schemas.microsoft.com/office/drawing/2014/main" id="{BE0BF5BE-1580-3AE6-8A20-DBFD9D5F6D7F}"/>
+              </a:ext>
+            </a:extLst>
+          </p:cNvPr>
+          <p:cNvSpPr>
+            <a:spLocks noGrp="1"/>
+          </p:cNvSpPr>
+          <p:nvPr>
+            <p:ph type="body" sz="quarter" idx="11"/>
+          </p:nvPr>
+        </p:nvSpPr>
+        <p:spPr/>
+        <p:txBody>
+          <a:bodyPr/>
+          <a:lstStyle/>
+          <a:p>
+            <a:endParaRPr lang="de-DE"/>
+          </a:p>
+        </p:txBody>
+      </p:sp>
+      <p:sp>
+        <p:nvSpPr>
+          <p:cNvPr id="3" name="Fußzeilenplatzhalter 5">
+            <a:extLst>
+              <a:ext uri="{FF2B5EF4-FFF2-40B4-BE49-F238E27FC236}">
+                <a16:creationId xmlns:a16="http://schemas.microsoft.com/office/drawing/2014/main" id="{EBAD7470-CF1B-8162-A00D-908336F37C04}"/>
+              </a:ext>
+            </a:extLst>
+          </p:cNvPr>
+          <p:cNvSpPr txBox="1">
+            <a:spLocks/>
+          </p:cNvSpPr>
+          <p:nvPr/>
+        </p:nvSpPr>
+        <p:spPr>
+          <a:xfrm>
+            <a:off x="0" y="6527297"/>
+            <a:ext cx="12192000" cy="230832"/>
+          </a:xfrm>
+          <a:prstGeom prst="rect">
+            <a:avLst/>
+          </a:prstGeom>
+          <a:ln/>
+        </p:spPr>
+        <p:txBody>
+          <a:bodyPr anchor="ctr"/>
+          <a:lstStyle>
+            <a:defPPr>
+              <a:defRPr lang="de-DE"/>
+            </a:defPPr>
+            <a:lvl1pPr algn="l" rtl="0" fontAlgn="base">
+              <a:spcBef>
+                <a:spcPct val="0"/>
+              </a:spcBef>
+              <a:spcAft>
+                <a:spcPct val="0"/>
+              </a:spcAft>
+              <a:defRPr sz="900" kern="1200">
+                <a:solidFill>
+                  <a:schemeClr val="tx1"/>
+                </a:solidFill>
+                <a:latin typeface="Arial" pitchFamily="34" charset="0"/>
+                <a:ea typeface="MS PGothic" pitchFamily="34" charset="-128"/>
+                <a:cs typeface="+mn-cs"/>
+              </a:defRPr>
+            </a:lvl1pPr>
+            <a:lvl2pPr marL="457200" algn="l" rtl="0" fontAlgn="base">
+              <a:spcBef>
+                <a:spcPct val="0"/>
+              </a:spcBef>
+              <a:spcAft>
+                <a:spcPct val="0"/>
+              </a:spcAft>
+              <a:defRPr sz="2400" kern="1200">
+                <a:solidFill>
+                  <a:schemeClr val="tx1"/>
+                </a:solidFill>
+                <a:latin typeface="Arial" pitchFamily="34" charset="0"/>
+                <a:ea typeface="MS PGothic" pitchFamily="34" charset="-128"/>
+                <a:cs typeface="+mn-cs"/>
+              </a:defRPr>
+            </a:lvl2pPr>
+            <a:lvl3pPr marL="914400" algn="l" rtl="0" fontAlgn="base">
+              <a:spcBef>
+                <a:spcPct val="0"/>
+              </a:spcBef>
+              <a:spcAft>
+                <a:spcPct val="0"/>
+              </a:spcAft>
+              <a:defRPr sz="2400" kern="1200">
+                <a:solidFill>
+                  <a:schemeClr val="tx1"/>
+                </a:solidFill>
+                <a:latin typeface="Arial" pitchFamily="34" charset="0"/>
+                <a:ea typeface="MS PGothic" pitchFamily="34" charset="-128"/>
+                <a:cs typeface="+mn-cs"/>
+              </a:defRPr>
+            </a:lvl3pPr>
+            <a:lvl4pPr marL="1371600" algn="l" rtl="0" fontAlgn="base">
+              <a:spcBef>
+                <a:spcPct val="0"/>
+              </a:spcBef>
+              <a:spcAft>
+                <a:spcPct val="0"/>
+              </a:spcAft>
+              <a:defRPr sz="2400" kern="1200">
+                <a:solidFill>
+                  <a:schemeClr val="tx1"/>
+                </a:solidFill>
+                <a:latin typeface="Arial" pitchFamily="34" charset="0"/>
+                <a:ea typeface="MS PGothic" pitchFamily="34" charset="-128"/>
+                <a:cs typeface="+mn-cs"/>
+              </a:defRPr>
+            </a:lvl4pPr>
+            <a:lvl5pPr marL="1828800" algn="l" rtl="0" fontAlgn="base">
+              <a:spcBef>
+                <a:spcPct val="0"/>
+              </a:spcBef>
+              <a:spcAft>
+                <a:spcPct val="0"/>
+              </a:spcAft>
+              <a:defRPr sz="2400" kern="1200">
+                <a:solidFill>
+                  <a:schemeClr val="tx1"/>
+                </a:solidFill>
+                <a:latin typeface="Arial" pitchFamily="34" charset="0"/>
+                <a:ea typeface="MS PGothic" pitchFamily="34" charset="-128"/>
+                <a:cs typeface="+mn-cs"/>
+              </a:defRPr>
+            </a:lvl5pPr>
+            <a:lvl6pPr marL="2286000" algn="l" defTabSz="914400" rtl="0" eaLnBrk="1" latinLnBrk="0" hangingPunct="1">
+              <a:defRPr sz="2400" kern="1200">
+                <a:solidFill>
+                  <a:schemeClr val="tx1"/>
+                </a:solidFill>
+                <a:latin typeface="Arial" pitchFamily="34" charset="0"/>
+                <a:ea typeface="MS PGothic" pitchFamily="34" charset="-128"/>
+                <a:cs typeface="+mn-cs"/>
+              </a:defRPr>
+            </a:lvl6pPr>
+            <a:lvl7pPr marL="2743200" algn="l" defTabSz="914400" rtl="0" eaLnBrk="1" latinLnBrk="0" hangingPunct="1">
+              <a:defRPr sz="2400" kern="1200">
+                <a:solidFill>
+                  <a:schemeClr val="tx1"/>
+                </a:solidFill>
+                <a:latin typeface="Arial" pitchFamily="34" charset="0"/>
+                <a:ea typeface="MS PGothic" pitchFamily="34" charset="-128"/>
+                <a:cs typeface="+mn-cs"/>
+              </a:defRPr>
+            </a:lvl7pPr>
+            <a:lvl8pPr marL="3200400" algn="l" defTabSz="914400" rtl="0" eaLnBrk="1" latinLnBrk="0" hangingPunct="1">
+              <a:defRPr sz="2400" kern="1200">
+                <a:solidFill>
+                  <a:schemeClr val="tx1"/>
+                </a:solidFill>
+                <a:latin typeface="Arial" pitchFamily="34" charset="0"/>
+                <a:ea typeface="MS PGothic" pitchFamily="34" charset="-128"/>
+                <a:cs typeface="+mn-cs"/>
+              </a:defRPr>
+            </a:lvl8pPr>
+            <a:lvl9pPr marL="3657600" algn="l" defTabSz="914400" rtl="0" eaLnBrk="1" latinLnBrk="0" hangingPunct="1">
+              <a:defRPr sz="2400" kern="1200">
+                <a:solidFill>
+                  <a:schemeClr val="tx1"/>
+                </a:solidFill>
+                <a:latin typeface="Arial" pitchFamily="34" charset="0"/>
+                <a:ea typeface="MS PGothic" pitchFamily="34" charset="-128"/>
+                <a:cs typeface="+mn-cs"/>
+              </a:defRPr>
+            </a:lvl9pPr>
+          </a:lstStyle>
+          <a:p>
+            <a:pPr algn="ctr">
+              <a:spcBef>
+                <a:spcPts val="600"/>
+              </a:spcBef>
+              <a:buSzPct val="100000"/>
+            </a:pPr>
+            <a:r>
+              <a:rPr lang="en-US" sz="800" noProof="0" dirty="0">
+                <a:solidFill>
+                  <a:srgbClr val="313131"/>
+                </a:solidFill>
+                <a:latin typeface="Arial"/>
+              </a:rPr>
+              <a:t>Armin Turken </a:t>
+            </a:r>
+            <a:r>
+              <a:rPr lang="en-US" sz="800" b="1" noProof="0" dirty="0">
+                <a:solidFill>
+                  <a:srgbClr val="313131"/>
+                </a:solidFill>
+                <a:latin typeface="Arial"/>
+              </a:rPr>
+              <a:t>| </a:t>
+            </a:r>
+            <a:r>
+              <a:rPr lang="en-US" sz="800" noProof="0" dirty="0">
+                <a:solidFill>
+                  <a:srgbClr val="313131"/>
+                </a:solidFill>
+                <a:latin typeface="Arial"/>
+              </a:rPr>
+              <a:t>Deloitte</a:t>
+            </a:r>
+            <a:r>
+              <a:rPr lang="en-US" sz="800" b="1" noProof="0" dirty="0">
+                <a:solidFill>
+                  <a:srgbClr val="313131"/>
+                </a:solidFill>
+                <a:latin typeface="Arial"/>
+              </a:rPr>
+              <a:t> | </a:t>
+            </a:r>
+            <a:r>
+              <a:rPr lang="en-US" sz="800" noProof="0" dirty="0">
+                <a:solidFill>
+                  <a:srgbClr val="313131"/>
+                </a:solidFill>
+              </a:rPr>
+              <a:t>Controlling</a:t>
+            </a:r>
+            <a:endParaRPr lang="en-US" sz="800" noProof="0" dirty="0">
+              <a:solidFill>
+                <a:srgbClr val="313131"/>
+              </a:solidFill>
+              <a:latin typeface="Arial"/>
+            </a:endParaRPr>
+          </a:p>
+        </p:txBody>
+      </p:sp>
+    </p:spTree>
+    <p:extLst>
+      <p:ext uri="{BB962C8B-B14F-4D97-AF65-F5344CB8AC3E}">
+        <p14:creationId xmlns:p14="http://schemas.microsoft.com/office/powerpoint/2010/main" val="1372550134"/>
+      </p:ext>
+    </p:extLst>
+  </p:cSld>
+  <p:clrMapOvr>
+    <a:masterClrMapping/>
+  </p:clrMapOvr>
+</p:sld>
+</file>
+
+<file path=ppt/slides/slide2.xml><?xml version="1.0" encoding="utf-8"?>
+<p:sld xmlns:a="http://schemas.openxmlformats.org/drawingml/2006/main" xmlns:r="http://schemas.openxmlformats.org/officeDocument/2006/relationships" xmlns:p="http://schemas.openxmlformats.org/presentationml/2006/main">
+  <p:cSld>
+    <p:spTree>
+      <p:nvGrpSpPr>
+        <p:cNvPr id="1" name=""/>
+        <p:cNvGrpSpPr/>
+        <p:nvPr/>
+      </p:nvGrpSpPr>
+      <p:grpSpPr>
+        <a:xfrm>
+          <a:off x="0" y="0"/>
+          <a:ext cx="0" cy="0"/>
+          <a:chOff x="0" y="0"/>
+          <a:chExt cx="0" cy="0"/>
+        </a:xfrm>
+      </p:grpSpPr>
+      <p:sp>
+        <p:nvSpPr>
+          <p:cNvPr id="5" name="Titel 4"/>
+          <p:cNvSpPr>
+            <a:spLocks noGrp="1"/>
+          </p:cNvSpPr>
+          <p:nvPr>
+            <p:ph type="title"/>
+          </p:nvPr>
+        </p:nvSpPr>
+        <p:spPr/>
+        <p:txBody>
+          <a:bodyPr/>
+          <a:lstStyle/>
+          <a:p>
+            <a:r>
+              <a:rPr lang="de-DE" dirty="0" err="1"/>
+              <a:t>Document</a:t>
+            </a:r>
+            <a:r>
+              <a:rPr lang="de-DE" dirty="0"/>
+              <a:t> </a:t>
+            </a:r>
+            <a:r>
+              <a:rPr lang="de-DE" dirty="0" err="1"/>
+              <a:t>History</a:t>
+            </a:r>
+            <a:endParaRPr lang="de-DE" dirty="0"/>
+          </a:p>
+        </p:txBody>
+      </p:sp>
+      <p:sp>
+        <p:nvSpPr>
+          <p:cNvPr id="2" name="Textplatzhalter 1">
+            <a:extLst>
+              <a:ext uri="{FF2B5EF4-FFF2-40B4-BE49-F238E27FC236}">
+                <a16:creationId xmlns:a16="http://schemas.microsoft.com/office/drawing/2014/main" id="{6BB1186B-EF01-75F8-69BE-9726C14B20FD}"/>
+              </a:ext>
+            </a:extLst>
+          </p:cNvPr>
+          <p:cNvSpPr>
+            <a:spLocks noGrp="1"/>
+          </p:cNvSpPr>
+          <p:nvPr>
+            <p:ph type="body" sz="quarter" idx="17"/>
+          </p:nvPr>
+        </p:nvSpPr>
+        <p:spPr/>
+        <p:txBody>
+          <a:bodyPr/>
+          <a:lstStyle/>
+          <a:p>
+            <a:endParaRPr lang="de-DE"/>
+          </a:p>
+        </p:txBody>
+      </p:sp>
+      <p:graphicFrame>
+        <p:nvGraphicFramePr>
+          <p:cNvPr id="7" name="Inhaltsplatzhalter 6"/>
+          <p:cNvGraphicFramePr>
+            <a:graphicFrameLocks noGrp="1"/>
+          </p:cNvGraphicFramePr>
+          <p:nvPr>
+            <p:ph sz="quarter" idx="4294967295"/>
+            <p:extLst>
+              <p:ext uri="{D42A27DB-BD31-4B8C-83A1-F6EECF244321}">
+                <p14:modId xmlns:p14="http://schemas.microsoft.com/office/powerpoint/2010/main" val="3429182597"/>
+              </p:ext>
+            </p:extLst>
+          </p:nvPr>
+        </p:nvGraphicFramePr>
+        <p:xfrm>
+          <a:off x="518400" y="1744496"/>
+          <a:ext cx="10981530" cy="2526618"/>
+        </p:xfrm>
+        <a:graphic>
+          <a:graphicData uri="http://schemas.openxmlformats.org/drawingml/2006/table">
+            <a:tbl>
+              <a:tblPr firstRow="1" bandRow="1">
+                <a:tableStyleId>{5C22544A-7EE6-4342-B048-85BDC9FD1C3A}</a:tableStyleId>
+              </a:tblPr>
+              <a:tblGrid>
+                <a:gridCol w="2355204">
+                  <a:extLst>
+                    <a:ext uri="{9D8B030D-6E8A-4147-A177-3AD203B41FA5}">
+                      <a16:colId xmlns:a16="http://schemas.microsoft.com/office/drawing/2014/main" val="20000"/>
+                    </a:ext>
+                  </a:extLst>
+                </a:gridCol>
+                <a:gridCol w="2816760">
+                  <a:extLst>
+                    <a:ext uri="{9D8B030D-6E8A-4147-A177-3AD203B41FA5}">
+                      <a16:colId xmlns:a16="http://schemas.microsoft.com/office/drawing/2014/main" val="20001"/>
+                    </a:ext>
+                  </a:extLst>
+                </a:gridCol>
+                <a:gridCol w="1297065">
+                  <a:extLst>
+                    <a:ext uri="{9D8B030D-6E8A-4147-A177-3AD203B41FA5}">
+                      <a16:colId xmlns:a16="http://schemas.microsoft.com/office/drawing/2014/main" val="20002"/>
+                    </a:ext>
+                  </a:extLst>
+                </a:gridCol>
+                <a:gridCol w="4512501">
+                  <a:extLst>
+                    <a:ext uri="{9D8B030D-6E8A-4147-A177-3AD203B41FA5}">
+                      <a16:colId xmlns:a16="http://schemas.microsoft.com/office/drawing/2014/main" val="20003"/>
+                    </a:ext>
+                  </a:extLst>
+                </a:gridCol>
+              </a:tblGrid>
+              <a:tr h="303973">
+                <a:tc>
+                  <a:txBody>
+                    <a:bodyPr/>
+                    <a:lstStyle/>
+                    <a:p>
+                      <a:pPr algn="l" fontAlgn="b"/>
+                      <a:r>
+                        <a:rPr lang="de-DE" sz="1600" b="1" i="0" u="none" strike="noStrike" dirty="0" err="1">
+                          <a:latin typeface="+mn-lt"/>
+                        </a:rPr>
+                        <a:t>Author</a:t>
+                      </a:r>
+                      <a:r>
+                        <a:rPr lang="de-DE" sz="1600" b="1" i="0" u="none" strike="noStrike" dirty="0">
+                          <a:latin typeface="+mn-lt"/>
+                        </a:rPr>
+                        <a:t>, </a:t>
+                      </a:r>
+                      <a:r>
+                        <a:rPr lang="de-DE" sz="1600" b="1" i="0" u="none" strike="noStrike" dirty="0" err="1">
+                          <a:latin typeface="+mn-lt"/>
+                        </a:rPr>
+                        <a:t>Org</a:t>
+                      </a:r>
+                      <a:r>
+                        <a:rPr lang="de-DE" sz="1600" b="1" i="0" u="none" strike="noStrike" dirty="0">
+                          <a:latin typeface="+mn-lt"/>
+                        </a:rPr>
+                        <a:t>-U.</a:t>
+                      </a:r>
+                    </a:p>
+                  </a:txBody>
+                  <a:tcPr marL="48000" marR="0" marT="0" marB="48000" anchor="b"/>
+                </a:tc>
+                <a:tc>
+                  <a:txBody>
+                    <a:bodyPr/>
+                    <a:lstStyle/>
+                    <a:p>
+                      <a:pPr algn="l" fontAlgn="b"/>
+                      <a:r>
+                        <a:rPr lang="de-DE" sz="1600" b="1" i="0" u="none" strike="noStrike" dirty="0">
+                          <a:latin typeface="+mn-lt"/>
+                        </a:rPr>
+                        <a:t>Version/ Date</a:t>
+                      </a:r>
+                    </a:p>
+                  </a:txBody>
+                  <a:tcPr marL="48000" marR="0" marT="0" marB="48000" anchor="b"/>
+                </a:tc>
+                <a:tc>
+                  <a:txBody>
+                    <a:bodyPr/>
+                    <a:lstStyle/>
+                    <a:p>
+                      <a:pPr>
+                        <a:spcAft>
+                          <a:spcPts val="0"/>
+                        </a:spcAft>
+                      </a:pPr>
+                      <a:r>
+                        <a:rPr lang="en-US" sz="1600" b="1" dirty="0">
+                          <a:latin typeface="+mn-lt"/>
+                          <a:ea typeface="Times New Roman"/>
+                          <a:cs typeface="Times New Roman"/>
+                        </a:rPr>
+                        <a:t>Status</a:t>
+                      </a:r>
+                      <a:endParaRPr lang="de-DE" sz="1600" dirty="0">
+                        <a:latin typeface="+mn-lt"/>
+                        <a:ea typeface="Times New Roman"/>
+                        <a:cs typeface="Times New Roman"/>
+                      </a:endParaRPr>
+                    </a:p>
+                  </a:txBody>
+                  <a:tcPr marL="59267" marR="59267" marT="0" marB="48000"/>
+                </a:tc>
+                <a:tc>
+                  <a:txBody>
+                    <a:bodyPr/>
+                    <a:lstStyle/>
+                    <a:p>
+                      <a:pPr>
+                        <a:spcAft>
+                          <a:spcPts val="0"/>
+                        </a:spcAft>
+                      </a:pPr>
+                      <a:r>
+                        <a:rPr lang="en-US" sz="1600" b="1" dirty="0">
+                          <a:latin typeface="+mn-lt"/>
+                          <a:ea typeface="Times New Roman"/>
+                          <a:cs typeface="Times New Roman"/>
+                        </a:rPr>
+                        <a:t>Notes on changes to the previous version</a:t>
+                      </a:r>
+                      <a:endParaRPr lang="de-DE" sz="1600" dirty="0">
+                        <a:latin typeface="+mn-lt"/>
+                        <a:ea typeface="Times New Roman"/>
+                        <a:cs typeface="Times New Roman"/>
+                      </a:endParaRPr>
+                    </a:p>
+                  </a:txBody>
+                  <a:tcPr marL="59267" marR="59267" marT="0" marB="48000" anchor="ctr"/>
+                </a:tc>
+                <a:extLst>
+                  <a:ext uri="{0D108BD9-81ED-4DB2-BD59-A6C34878D82A}">
+                    <a16:rowId xmlns:a16="http://schemas.microsoft.com/office/drawing/2014/main" val="10000"/>
+                  </a:ext>
+                </a:extLst>
+              </a:tr>
+              <a:tr h="289573">
+                <a:tc>
+                  <a:txBody>
+                    <a:bodyPr/>
+                    <a:lstStyle/>
+                    <a:p>
+                      <a:pPr algn="l" fontAlgn="b"/>
+                      <a:endParaRPr lang="de-DE" sz="1300" b="0" i="0" u="none" strike="noStrike" dirty="0">
+                        <a:latin typeface="Arial"/>
+                      </a:endParaRPr>
+                    </a:p>
+                  </a:txBody>
+                  <a:tcPr marL="48000" marR="0" marT="0" marB="0" anchor="b"/>
+                </a:tc>
+                <a:tc>
+                  <a:txBody>
+                    <a:bodyPr/>
+                    <a:lstStyle/>
+                    <a:p>
+                      <a:pPr algn="l" fontAlgn="b"/>
+                      <a:endParaRPr lang="de-DE" sz="1300" b="0" i="0" u="none" strike="noStrike" dirty="0">
+                        <a:latin typeface="Arial"/>
+                      </a:endParaRPr>
+                    </a:p>
+                  </a:txBody>
+                  <a:tcPr marL="48000" marR="0" marT="0" marB="0" anchor="b"/>
+                </a:tc>
+                <a:tc>
+                  <a:txBody>
+                    <a:bodyPr/>
+                    <a:lstStyle/>
+                    <a:p>
+                      <a:pPr algn="l" fontAlgn="b"/>
+                      <a:endParaRPr lang="de-DE" sz="1300" b="0" i="0" u="none" strike="noStrike" dirty="0">
+                        <a:latin typeface="Arial"/>
+                      </a:endParaRPr>
+                    </a:p>
+                  </a:txBody>
+                  <a:tcPr marL="48000" marR="0" marT="0" marB="0" anchor="b"/>
+                </a:tc>
+                <a:tc>
+                  <a:txBody>
+                    <a:bodyPr/>
+                    <a:lstStyle/>
+                    <a:p>
+                      <a:pPr algn="l" fontAlgn="b"/>
+                      <a:endParaRPr lang="de-DE" sz="1300" b="0" i="0" u="none" strike="noStrike" dirty="0">
+                        <a:latin typeface="Arial"/>
+                      </a:endParaRPr>
+                    </a:p>
+                  </a:txBody>
+                  <a:tcPr marL="48000" marR="0" marT="0" marB="0" anchor="b"/>
+                </a:tc>
+                <a:extLst>
+                  <a:ext uri="{0D108BD9-81ED-4DB2-BD59-A6C34878D82A}">
+                    <a16:rowId xmlns:a16="http://schemas.microsoft.com/office/drawing/2014/main" val="10001"/>
+                  </a:ext>
+                </a:extLst>
+              </a:tr>
+              <a:tr h="286491">
+                <a:tc>
+                  <a:txBody>
+                    <a:bodyPr/>
+                    <a:lstStyle/>
+                    <a:p>
+                      <a:pPr algn="l" fontAlgn="b"/>
+                      <a:endParaRPr lang="de-DE" sz="1300" b="0" i="0" u="none" strike="noStrike" dirty="0">
+                        <a:latin typeface="+mn-lt"/>
+                      </a:endParaRPr>
+                    </a:p>
+                  </a:txBody>
+                  <a:tcPr marL="48000" marR="0" marT="0" marB="0" anchor="b"/>
+                </a:tc>
+                <a:tc>
+                  <a:txBody>
+                    <a:bodyPr/>
+                    <a:lstStyle/>
+                    <a:p>
+                      <a:pPr algn="l" fontAlgn="b"/>
+                      <a:endParaRPr lang="de-DE" sz="1300" b="0" i="0" u="none" strike="noStrike" dirty="0">
+                        <a:latin typeface="Arial"/>
+                      </a:endParaRPr>
+                    </a:p>
+                  </a:txBody>
+                  <a:tcPr marL="48000" marR="0" marT="0" marB="0" anchor="b"/>
+                </a:tc>
+                <a:tc>
+                  <a:txBody>
+                    <a:bodyPr/>
+                    <a:lstStyle/>
+                    <a:p>
+                      <a:pPr algn="l" fontAlgn="b"/>
+                      <a:endParaRPr lang="de-DE" sz="1300" b="0" i="0" u="none" strike="noStrike" dirty="0">
+                        <a:latin typeface="Arial"/>
+                      </a:endParaRPr>
+                    </a:p>
+                  </a:txBody>
+                  <a:tcPr marL="48000" marR="0" marT="0" marB="0" anchor="b"/>
+                </a:tc>
+                <a:tc>
+                  <a:txBody>
+                    <a:bodyPr/>
+                    <a:lstStyle/>
+                    <a:p>
+                      <a:pPr algn="l" fontAlgn="b"/>
+                      <a:endParaRPr lang="de-DE" sz="1300" b="0" i="0" u="none" strike="noStrike" dirty="0">
+                        <a:latin typeface="Arial"/>
+                      </a:endParaRPr>
+                    </a:p>
+                  </a:txBody>
+                  <a:tcPr marL="48000" marR="0" marT="0" marB="0" anchor="b"/>
+                </a:tc>
+                <a:extLst>
+                  <a:ext uri="{0D108BD9-81ED-4DB2-BD59-A6C34878D82A}">
+                    <a16:rowId xmlns:a16="http://schemas.microsoft.com/office/drawing/2014/main" val="10002"/>
+                  </a:ext>
+                </a:extLst>
+              </a:tr>
+              <a:tr h="288032">
+                <a:tc>
+                  <a:txBody>
+                    <a:bodyPr/>
+                    <a:lstStyle/>
+                    <a:p>
+                      <a:pPr algn="l" fontAlgn="b"/>
+                      <a:endParaRPr lang="de-DE" sz="1300" b="0" i="0" u="none" strike="noStrike" dirty="0">
+                        <a:latin typeface="Arial"/>
+                      </a:endParaRPr>
+                    </a:p>
+                  </a:txBody>
+                  <a:tcPr marL="48000" marR="0" marT="0" marB="0" anchor="b"/>
+                </a:tc>
+                <a:tc>
+                  <a:txBody>
+                    <a:bodyPr/>
+                    <a:lstStyle/>
+                    <a:p>
+                      <a:pPr algn="l" fontAlgn="b"/>
+                      <a:endParaRPr lang="de-DE" sz="1300" b="0" i="0" u="none" strike="noStrike" dirty="0">
+                        <a:latin typeface="Arial"/>
+                      </a:endParaRPr>
+                    </a:p>
+                  </a:txBody>
+                  <a:tcPr marL="48000" marR="0" marT="0" marB="0" anchor="b"/>
+                </a:tc>
+                <a:tc>
+                  <a:txBody>
+                    <a:bodyPr/>
+                    <a:lstStyle/>
+                    <a:p>
+                      <a:pPr algn="l" fontAlgn="b"/>
+                      <a:endParaRPr lang="de-DE" sz="1300" b="0" i="0" u="none" strike="noStrike" dirty="0">
+                        <a:latin typeface="Arial"/>
+                      </a:endParaRPr>
+                    </a:p>
+                  </a:txBody>
+                  <a:tcPr marL="48000" marR="0" marT="0" marB="0" anchor="b"/>
+                </a:tc>
+                <a:tc>
+                  <a:txBody>
+                    <a:bodyPr/>
+                    <a:lstStyle/>
+                    <a:p>
+                      <a:pPr algn="l" fontAlgn="b"/>
+                      <a:endParaRPr lang="de-DE" sz="1300" b="0" i="0" u="none" strike="noStrike" dirty="0">
+                        <a:latin typeface="Arial"/>
+                      </a:endParaRPr>
+                    </a:p>
+                  </a:txBody>
+                  <a:tcPr marL="48000" marR="0" marT="0" marB="0" anchor="b"/>
+                </a:tc>
+                <a:extLst>
+                  <a:ext uri="{0D108BD9-81ED-4DB2-BD59-A6C34878D82A}">
+                    <a16:rowId xmlns:a16="http://schemas.microsoft.com/office/drawing/2014/main" val="10003"/>
+                  </a:ext>
+                </a:extLst>
+              </a:tr>
+              <a:tr h="288032">
+                <a:tc>
+                  <a:txBody>
+                    <a:bodyPr/>
+                    <a:lstStyle/>
+                    <a:p>
+                      <a:pPr algn="l" fontAlgn="b"/>
+                      <a:endParaRPr lang="de-DE" sz="1300" b="0" i="0" u="none" strike="noStrike" dirty="0">
+                        <a:latin typeface="Arial"/>
+                      </a:endParaRPr>
+                    </a:p>
+                  </a:txBody>
+                  <a:tcPr marL="48000" marR="0" marT="0" marB="0" anchor="b"/>
+                </a:tc>
+                <a:tc>
+                  <a:txBody>
+                    <a:bodyPr/>
+                    <a:lstStyle/>
+                    <a:p>
+                      <a:pPr algn="l" fontAlgn="b"/>
+                      <a:endParaRPr lang="de-DE" sz="1300" b="0" i="0" u="none" strike="noStrike" dirty="0">
+                        <a:latin typeface="Arial"/>
+                      </a:endParaRPr>
+                    </a:p>
+                  </a:txBody>
+                  <a:tcPr marL="48000" marR="0" marT="0" marB="0" anchor="b"/>
+                </a:tc>
+                <a:tc>
+                  <a:txBody>
+                    <a:bodyPr/>
+                    <a:lstStyle/>
+                    <a:p>
+                      <a:pPr algn="l" fontAlgn="b"/>
+                      <a:endParaRPr lang="de-DE" sz="1300" b="0" i="0" u="none" strike="noStrike" dirty="0">
+                        <a:latin typeface="Arial"/>
+                      </a:endParaRPr>
+                    </a:p>
+                  </a:txBody>
+                  <a:tcPr marL="48000" marR="0" marT="0" marB="0" anchor="b"/>
+                </a:tc>
+                <a:tc>
+                  <a:txBody>
+                    <a:bodyPr/>
+                    <a:lstStyle/>
+                    <a:p>
+                      <a:pPr algn="l" fontAlgn="b"/>
+                      <a:endParaRPr lang="de-DE" sz="1300" b="0" i="0" u="none" strike="noStrike" dirty="0">
+                        <a:latin typeface="Arial"/>
+                      </a:endParaRPr>
+                    </a:p>
+                  </a:txBody>
+                  <a:tcPr marL="48000" marR="0" marT="0" marB="0" anchor="b"/>
+                </a:tc>
+                <a:extLst>
+                  <a:ext uri="{0D108BD9-81ED-4DB2-BD59-A6C34878D82A}">
+                    <a16:rowId xmlns:a16="http://schemas.microsoft.com/office/drawing/2014/main" val="10004"/>
+                  </a:ext>
+                </a:extLst>
+              </a:tr>
+              <a:tr h="288032">
+                <a:tc>
+                  <a:txBody>
+                    <a:bodyPr/>
+                    <a:lstStyle/>
+                    <a:p>
+                      <a:pPr algn="l" fontAlgn="b"/>
+                      <a:endParaRPr lang="de-DE" sz="1300" b="0" i="0" u="none" strike="noStrike" dirty="0">
+                        <a:latin typeface="Arial"/>
+                      </a:endParaRPr>
+                    </a:p>
+                  </a:txBody>
+                  <a:tcPr marL="48000" marR="0" marT="0" marB="0" anchor="b"/>
+                </a:tc>
+                <a:tc>
+                  <a:txBody>
+                    <a:bodyPr/>
+                    <a:lstStyle/>
+                    <a:p>
+                      <a:pPr algn="l" fontAlgn="b"/>
+                      <a:endParaRPr lang="de-DE" sz="1300" b="0" i="0" u="none" strike="noStrike" dirty="0">
+                        <a:latin typeface="Arial"/>
+                      </a:endParaRPr>
+                    </a:p>
+                  </a:txBody>
+                  <a:tcPr marL="48000" marR="0" marT="0" marB="0" anchor="b"/>
+                </a:tc>
+                <a:tc>
+                  <a:txBody>
+                    <a:bodyPr/>
+                    <a:lstStyle/>
+                    <a:p>
+                      <a:pPr algn="l" fontAlgn="b"/>
+                      <a:endParaRPr lang="de-DE" sz="1300" b="0" i="0" u="none" strike="noStrike" dirty="0">
+                        <a:latin typeface="Arial"/>
+                      </a:endParaRPr>
+                    </a:p>
+                  </a:txBody>
+                  <a:tcPr marL="48000" marR="0" marT="0" marB="0" anchor="b"/>
+                </a:tc>
+                <a:tc>
+                  <a:txBody>
+                    <a:bodyPr/>
+                    <a:lstStyle/>
+                    <a:p>
+                      <a:pPr algn="l" fontAlgn="b"/>
+                      <a:endParaRPr lang="de-DE" sz="1300" b="0" i="0" u="none" strike="noStrike" dirty="0">
+                        <a:latin typeface="Arial"/>
+                      </a:endParaRPr>
+                    </a:p>
+                  </a:txBody>
+                  <a:tcPr marL="48000" marR="0" marT="0" marB="0" anchor="b"/>
+                </a:tc>
+                <a:extLst>
+                  <a:ext uri="{0D108BD9-81ED-4DB2-BD59-A6C34878D82A}">
+                    <a16:rowId xmlns:a16="http://schemas.microsoft.com/office/drawing/2014/main" val="10005"/>
+                  </a:ext>
+                </a:extLst>
+              </a:tr>
+              <a:tr h="288032">
+                <a:tc>
+                  <a:txBody>
+                    <a:bodyPr/>
+                    <a:lstStyle/>
+                    <a:p>
+                      <a:pPr algn="l" fontAlgn="b"/>
+                      <a:endParaRPr lang="de-DE" sz="1300" b="0" i="0" u="none" strike="noStrike" dirty="0">
+                        <a:latin typeface="Arial"/>
+                      </a:endParaRPr>
+                    </a:p>
+                  </a:txBody>
+                  <a:tcPr marL="48000" marR="0" marT="0" marB="0" anchor="b"/>
+                </a:tc>
+                <a:tc>
+                  <a:txBody>
+                    <a:bodyPr/>
+                    <a:lstStyle/>
+                    <a:p>
+                      <a:pPr algn="l" fontAlgn="b"/>
+                      <a:endParaRPr lang="de-DE" sz="1300" b="0" i="0" u="none" strike="noStrike" dirty="0">
+                        <a:latin typeface="Arial"/>
+                      </a:endParaRPr>
+                    </a:p>
+                  </a:txBody>
+                  <a:tcPr marL="48000" marR="0" marT="0" marB="0" anchor="b"/>
+                </a:tc>
+                <a:tc>
+                  <a:txBody>
+                    <a:bodyPr/>
+                    <a:lstStyle/>
+                    <a:p>
+                      <a:pPr algn="l" fontAlgn="b"/>
+                      <a:endParaRPr lang="de-DE" sz="1300" b="0" i="0" u="none" strike="noStrike" dirty="0">
+                        <a:latin typeface="Arial"/>
+                      </a:endParaRPr>
+                    </a:p>
+                  </a:txBody>
+                  <a:tcPr marL="48000" marR="0" marT="0" marB="0" anchor="b"/>
+                </a:tc>
+                <a:tc>
+                  <a:txBody>
+                    <a:bodyPr/>
+                    <a:lstStyle/>
+                    <a:p>
+                      <a:pPr algn="l" fontAlgn="b"/>
+                      <a:endParaRPr lang="de-DE" sz="1300" b="0" i="0" u="none" strike="noStrike" dirty="0">
+                        <a:latin typeface="Arial"/>
+                      </a:endParaRPr>
+                    </a:p>
+                  </a:txBody>
+                  <a:tcPr marL="48000" marR="0" marT="0" marB="0" anchor="b"/>
+                </a:tc>
+                <a:extLst>
+                  <a:ext uri="{0D108BD9-81ED-4DB2-BD59-A6C34878D82A}">
+                    <a16:rowId xmlns:a16="http://schemas.microsoft.com/office/drawing/2014/main" val="10006"/>
+                  </a:ext>
+                </a:extLst>
+              </a:tr>
+              <a:tr h="494453">
+                <a:tc>
+                  <a:txBody>
+                    <a:bodyPr/>
+                    <a:lstStyle/>
+                    <a:p>
+                      <a:pPr algn="l" fontAlgn="b"/>
+                      <a:endParaRPr lang="de-DE" sz="1300" b="0" i="0" u="none" strike="noStrike" dirty="0">
+                        <a:latin typeface="Arial"/>
+                      </a:endParaRPr>
+                    </a:p>
+                  </a:txBody>
+                  <a:tcPr marL="48000" marR="0" marT="0" marB="0" anchor="b"/>
+                </a:tc>
+                <a:tc>
+                  <a:txBody>
+                    <a:bodyPr/>
+                    <a:lstStyle/>
+                    <a:p>
+                      <a:pPr algn="l" fontAlgn="b"/>
+                      <a:endParaRPr lang="de-DE" sz="1300" b="0" i="0" u="none" strike="noStrike" dirty="0">
+                        <a:latin typeface="Arial"/>
+                      </a:endParaRPr>
+                    </a:p>
+                  </a:txBody>
+                  <a:tcPr marL="48000" marR="0" marT="0" marB="0" anchor="b"/>
+                </a:tc>
+                <a:tc>
+                  <a:txBody>
+                    <a:bodyPr/>
+                    <a:lstStyle/>
+                    <a:p>
+                      <a:pPr algn="l" fontAlgn="b"/>
+                      <a:endParaRPr lang="de-DE" sz="1300" b="0" i="0" u="none" strike="noStrike" dirty="0">
+                        <a:latin typeface="Arial"/>
+                      </a:endParaRPr>
+                    </a:p>
+                  </a:txBody>
+                  <a:tcPr marL="48000" marR="0" marT="0" marB="0" anchor="b"/>
+                </a:tc>
+                <a:tc>
+                  <a:txBody>
+                    <a:bodyPr/>
+                    <a:lstStyle/>
+                    <a:p>
+                      <a:pPr algn="l" fontAlgn="b"/>
+                      <a:endParaRPr lang="de-DE" sz="1300" b="0" i="0" u="none" strike="noStrike" dirty="0">
+                        <a:latin typeface="Arial"/>
+                      </a:endParaRPr>
+                    </a:p>
+                  </a:txBody>
+                  <a:tcPr marL="48000" marR="0" marT="0" marB="0" anchor="b"/>
+                </a:tc>
+                <a:extLst>
+                  <a:ext uri="{0D108BD9-81ED-4DB2-BD59-A6C34878D82A}">
+                    <a16:rowId xmlns:a16="http://schemas.microsoft.com/office/drawing/2014/main" val="10007"/>
+                  </a:ext>
+                </a:extLst>
+              </a:tr>
+            </a:tbl>
+          </a:graphicData>
+        </a:graphic>
+      </p:graphicFrame>
+      <p:sp>
+        <p:nvSpPr>
+          <p:cNvPr id="4" name="Fußzeilenplatzhalter 5">
+            <a:extLst>
+              <a:ext uri="{FF2B5EF4-FFF2-40B4-BE49-F238E27FC236}">
+                <a16:creationId xmlns:a16="http://schemas.microsoft.com/office/drawing/2014/main" id="{65499A02-B83E-332B-786C-290049018D20}"/>
+              </a:ext>
+            </a:extLst>
+          </p:cNvPr>
+          <p:cNvSpPr txBox="1">
+            <a:spLocks/>
+          </p:cNvSpPr>
+          <p:nvPr/>
+        </p:nvSpPr>
+        <p:spPr>
+          <a:xfrm>
+            <a:off x="0" y="6527297"/>
+            <a:ext cx="12192000" cy="230832"/>
+          </a:xfrm>
+          <a:prstGeom prst="rect">
+            <a:avLst/>
+          </a:prstGeom>
+          <a:ln/>
+        </p:spPr>
+        <p:txBody>
+          <a:bodyPr anchor="ctr"/>
+          <a:lstStyle>
+            <a:defPPr>
+              <a:defRPr lang="de-DE"/>
+            </a:defPPr>
+            <a:lvl1pPr algn="l" rtl="0" fontAlgn="base">
+              <a:spcBef>
+                <a:spcPct val="0"/>
+              </a:spcBef>
+              <a:spcAft>
+                <a:spcPct val="0"/>
+              </a:spcAft>
+              <a:defRPr sz="900" kern="1200">
+                <a:solidFill>
+                  <a:schemeClr val="tx1"/>
+                </a:solidFill>
+                <a:latin typeface="Arial" pitchFamily="34" charset="0"/>
+                <a:ea typeface="MS PGothic" pitchFamily="34" charset="-128"/>
+                <a:cs typeface="+mn-cs"/>
+              </a:defRPr>
+            </a:lvl1pPr>
+            <a:lvl2pPr marL="457200" algn="l" rtl="0" fontAlgn="base">
+              <a:spcBef>
+                <a:spcPct val="0"/>
+              </a:spcBef>
+              <a:spcAft>
+                <a:spcPct val="0"/>
+              </a:spcAft>
+              <a:defRPr sz="2400" kern="1200">
+                <a:solidFill>
+                  <a:schemeClr val="tx1"/>
+                </a:solidFill>
+                <a:latin typeface="Arial" pitchFamily="34" charset="0"/>
+                <a:ea typeface="MS PGothic" pitchFamily="34" charset="-128"/>
+                <a:cs typeface="+mn-cs"/>
+              </a:defRPr>
+            </a:lvl2pPr>
+            <a:lvl3pPr marL="914400" algn="l" rtl="0" fontAlgn="base">
+              <a:spcBef>
+                <a:spcPct val="0"/>
+              </a:spcBef>
+              <a:spcAft>
+                <a:spcPct val="0"/>
+              </a:spcAft>
+              <a:defRPr sz="2400" kern="1200">
+                <a:solidFill>
+                  <a:schemeClr val="tx1"/>
+                </a:solidFill>
+                <a:latin typeface="Arial" pitchFamily="34" charset="0"/>
+                <a:ea typeface="MS PGothic" pitchFamily="34" charset="-128"/>
+                <a:cs typeface="+mn-cs"/>
+              </a:defRPr>
+            </a:lvl3pPr>
+            <a:lvl4pPr marL="1371600" algn="l" rtl="0" fontAlgn="base">
+              <a:spcBef>
+                <a:spcPct val="0"/>
+              </a:spcBef>
+              <a:spcAft>
+                <a:spcPct val="0"/>
+              </a:spcAft>
+              <a:defRPr sz="2400" kern="1200">
+                <a:solidFill>
+                  <a:schemeClr val="tx1"/>
+                </a:solidFill>
+                <a:latin typeface="Arial" pitchFamily="34" charset="0"/>
+                <a:ea typeface="MS PGothic" pitchFamily="34" charset="-128"/>
+                <a:cs typeface="+mn-cs"/>
+              </a:defRPr>
+            </a:lvl4pPr>
+            <a:lvl5pPr marL="1828800" algn="l" rtl="0" fontAlgn="base">
+              <a:spcBef>
+                <a:spcPct val="0"/>
+              </a:spcBef>
+              <a:spcAft>
+                <a:spcPct val="0"/>
+              </a:spcAft>
+              <a:defRPr sz="2400" kern="1200">
+                <a:solidFill>
+                  <a:schemeClr val="tx1"/>
+                </a:solidFill>
+                <a:latin typeface="Arial" pitchFamily="34" charset="0"/>
+                <a:ea typeface="MS PGothic" pitchFamily="34" charset="-128"/>
+                <a:cs typeface="+mn-cs"/>
+              </a:defRPr>
+            </a:lvl5pPr>
+            <a:lvl6pPr marL="2286000" algn="l" defTabSz="914400" rtl="0" eaLnBrk="1" latinLnBrk="0" hangingPunct="1">
+              <a:defRPr sz="2400" kern="1200">
+                <a:solidFill>
+                  <a:schemeClr val="tx1"/>
+                </a:solidFill>
+                <a:latin typeface="Arial" pitchFamily="34" charset="0"/>
+                <a:ea typeface="MS PGothic" pitchFamily="34" charset="-128"/>
+                <a:cs typeface="+mn-cs"/>
+              </a:defRPr>
+            </a:lvl6pPr>
+            <a:lvl7pPr marL="2743200" algn="l" defTabSz="914400" rtl="0" eaLnBrk="1" latinLnBrk="0" hangingPunct="1">
+              <a:defRPr sz="2400" kern="1200">
+                <a:solidFill>
+                  <a:schemeClr val="tx1"/>
+                </a:solidFill>
+                <a:latin typeface="Arial" pitchFamily="34" charset="0"/>
+                <a:ea typeface="MS PGothic" pitchFamily="34" charset="-128"/>
+                <a:cs typeface="+mn-cs"/>
+              </a:defRPr>
+            </a:lvl7pPr>
+            <a:lvl8pPr marL="3200400" algn="l" defTabSz="914400" rtl="0" eaLnBrk="1" latinLnBrk="0" hangingPunct="1">
+              <a:defRPr sz="2400" kern="1200">
+                <a:solidFill>
+                  <a:schemeClr val="tx1"/>
+                </a:solidFill>
+                <a:latin typeface="Arial" pitchFamily="34" charset="0"/>
+                <a:ea typeface="MS PGothic" pitchFamily="34" charset="-128"/>
+                <a:cs typeface="+mn-cs"/>
+              </a:defRPr>
+            </a:lvl8pPr>
+            <a:lvl9pPr marL="3657600" algn="l" defTabSz="914400" rtl="0" eaLnBrk="1" latinLnBrk="0" hangingPunct="1">
+              <a:defRPr sz="2400" kern="1200">
+                <a:solidFill>
+                  <a:schemeClr val="tx1"/>
+                </a:solidFill>
+                <a:latin typeface="Arial" pitchFamily="34" charset="0"/>
+                <a:ea typeface="MS PGothic" pitchFamily="34" charset="-128"/>
+                <a:cs typeface="+mn-cs"/>
+              </a:defRPr>
+            </a:lvl9pPr>
+          </a:lstStyle>
+          <a:p>
+            <a:pPr algn="ctr">
+              <a:spcBef>
+                <a:spcPts val="600"/>
+              </a:spcBef>
+              <a:buSzPct val="100000"/>
+            </a:pPr>
+            <a:r>
+              <a:rPr lang="en-US" sz="800" noProof="0" dirty="0">
+                <a:solidFill>
+                  <a:srgbClr val="313131"/>
+                </a:solidFill>
+                <a:latin typeface="Arial"/>
+              </a:rPr>
+              <a:t>Armin Turken </a:t>
+            </a:r>
+            <a:r>
+              <a:rPr lang="en-US" sz="800" b="1" noProof="0" dirty="0">
+                <a:solidFill>
+                  <a:srgbClr val="313131"/>
+                </a:solidFill>
+                <a:latin typeface="Arial"/>
+              </a:rPr>
+              <a:t>| </a:t>
+            </a:r>
+            <a:r>
+              <a:rPr lang="en-US" sz="800" noProof="0" dirty="0">
+                <a:solidFill>
+                  <a:srgbClr val="313131"/>
+                </a:solidFill>
+                <a:latin typeface="Arial"/>
+              </a:rPr>
+              <a:t>Deloitte</a:t>
+            </a:r>
+            <a:r>
+              <a:rPr lang="en-US" sz="800" b="1" noProof="0" dirty="0">
+                <a:solidFill>
+                  <a:srgbClr val="313131"/>
+                </a:solidFill>
+                <a:latin typeface="Arial"/>
+              </a:rPr>
+              <a:t> | </a:t>
+            </a:r>
+            <a:r>
+              <a:rPr lang="en-US" sz="800" noProof="0" dirty="0">
+                <a:solidFill>
+                  <a:srgbClr val="313131"/>
+                </a:solidFill>
+              </a:rPr>
+              <a:t>Controlling</a:t>
+            </a:r>
+            <a:endParaRPr lang="en-US" sz="800" noProof="0" dirty="0">
+              <a:solidFill>
+                <a:srgbClr val="313131"/>
+              </a:solidFill>
+              <a:latin typeface="Arial"/>
+            </a:endParaRPr>
+          </a:p>
+        </p:txBody>
+      </p:sp>
+    </p:spTree>
+  </p:cSld>
+  <p:clrMapOvr>
+    <a:masterClrMapping/>
+  </p:clrMapOvr>
+</p:sld>
+</file>
+
+<file path=ppt/slides/slide3.xml><?xml version="1.0" encoding="utf-8"?>
+<p:sld xmlns:a="http://schemas.openxmlformats.org/drawingml/2006/main" xmlns:r="http://schemas.openxmlformats.org/officeDocument/2006/relationships" xmlns:p="http://schemas.openxmlformats.org/presentationml/2006/main">
+  <p:cSld>
+    <p:spTree>
+      <p:nvGrpSpPr>
+        <p:cNvPr id="1" name=""/>
+        <p:cNvGrpSpPr/>
+        <p:nvPr/>
+      </p:nvGrpSpPr>
+      <p:grpSpPr>
+        <a:xfrm>
+          <a:off x="0" y="0"/>
+          <a:ext cx="0" cy="0"/>
+          <a:chOff x="0" y="0"/>
+          <a:chExt cx="0" cy="0"/>
+        </a:xfrm>
+      </p:grpSpPr>
+      <p:graphicFrame>
+        <p:nvGraphicFramePr>
+          <p:cNvPr id="17" name="Objekt 16" hidden="1"/>
+          <p:cNvGraphicFramePr>
+            <a:graphicFrameLocks noChangeAspect="1"/>
+          </p:cNvGraphicFramePr>
+          <p:nvPr>
+            <p:custDataLst>
+              <p:tags r:id="rId1"/>
+            </p:custDataLst>
+          </p:nvPr>
+        </p:nvGraphicFramePr>
+        <p:xfrm>
+          <a:off x="2118" y="2118"/>
+          <a:ext cx="2116" cy="2116"/>
+        </p:xfrm>
+        <a:graphic>
+          <a:graphicData uri="http://schemas.openxmlformats.org/presentationml/2006/ole">
+            <mc:AlternateContent xmlns:mc="http://schemas.openxmlformats.org/markup-compatibility/2006">
+              <mc:Choice xmlns:v="urn:schemas-microsoft-com:vml" Requires="v">
+                <p:oleObj name="think-cell Folie" r:id="rId12" imgW="216" imgH="216" progId="">
+                  <p:embed/>
+                </p:oleObj>
+              </mc:Choice>
+              <mc:Fallback>
+                <p:oleObj name="think-cell Folie" r:id="rId12" imgW="216" imgH="216" progId="">
+                  <p:embed/>
+                  <p:pic>
+                    <p:nvPicPr>
+                      <p:cNvPr id="17" name="Objekt 16" hidden="1"/>
+                      <p:cNvPicPr>
+                        <a:picLocks noChangeAspect="1" noChangeArrowheads="1"/>
+                      </p:cNvPicPr>
+                      <p:nvPr/>
+                    </p:nvPicPr>
+                    <p:blipFill>
+                      <a:blip r:embed="rId13">
+                        <a:extLst>
+                          <a:ext uri="{28A0092B-C50C-407E-A947-70E740481C1C}">
+                            <a14:useLocalDpi xmlns:a14="http://schemas.microsoft.com/office/drawing/2010/main" val="0"/>
+                          </a:ext>
+                        </a:extLst>
+                      </a:blip>
+                      <a:srcRect/>
+                      <a:stretch>
+                        <a:fillRect/>
+                      </a:stretch>
+                    </p:blipFill>
+                    <p:spPr bwMode="auto">
+                      <a:xfrm>
+                        <a:off x="2118" y="2118"/>
+                        <a:ext cx="2116" cy="2116"/>
+                      </a:xfrm>
+                      <a:prstGeom prst="rect">
+                        <a:avLst/>
+                      </a:prstGeom>
+                      <a:noFill/>
+                      <a:extLst>
+                        <a:ext uri="{909E8E84-426E-40DD-AFC4-6F175D3DCCD1}">
+                          <a14:hiddenFill xmlns:a14="http://schemas.microsoft.com/office/drawing/2010/main">
+                            <a:solidFill>
+                              <a:srgbClr val="FFFFFF"/>
+                            </a:solidFill>
+                          </a14:hiddenFill>
+                        </a:ext>
+                      </a:extLst>
+                    </p:spPr>
+                  </p:pic>
+                </p:oleObj>
+              </mc:Fallback>
+            </mc:AlternateContent>
+          </a:graphicData>
+        </a:graphic>
+      </p:graphicFrame>
+      <p:sp>
+        <p:nvSpPr>
+          <p:cNvPr id="15" name="Titel 2"/>
+          <p:cNvSpPr>
+            <a:spLocks noGrp="1"/>
+          </p:cNvSpPr>
+          <p:nvPr>
+            <p:ph type="title"/>
+          </p:nvPr>
+        </p:nvSpPr>
+        <p:spPr bwMode="gray"/>
+        <p:txBody>
+          <a:bodyPr>
+            <a:noAutofit/>
+          </a:bodyPr>
+          <a:lstStyle/>
+          <a:p>
+            <a:r>
+              <a:rPr lang="en-US" dirty="0"/>
+              <a:t>Management Summary</a:t>
+            </a:r>
+          </a:p>
+        </p:txBody>
+      </p:sp>
+      <p:sp>
+        <p:nvSpPr>
+          <p:cNvPr id="2" name="Textplatzhalter 1">
+            <a:extLst>
+              <a:ext uri="{FF2B5EF4-FFF2-40B4-BE49-F238E27FC236}">
+                <a16:creationId xmlns:a16="http://schemas.microsoft.com/office/drawing/2014/main" id="{28F60BF9-07E3-5313-8090-8DEEE7FC92B7}"/>
+              </a:ext>
+            </a:extLst>
+          </p:cNvPr>
+          <p:cNvSpPr>
+            <a:spLocks noGrp="1"/>
+          </p:cNvSpPr>
+          <p:nvPr>
+            <p:ph type="body" sz="quarter" idx="17"/>
+          </p:nvPr>
+        </p:nvSpPr>
+        <p:spPr/>
+        <p:txBody>
+          <a:bodyPr/>
+          <a:lstStyle/>
+          <a:p>
+            <a:endParaRPr lang="de-DE"/>
+          </a:p>
+        </p:txBody>
+      </p:sp>
+      <p:sp>
+        <p:nvSpPr>
+          <p:cNvPr id="50" name="Rectangle 9"/>
+          <p:cNvSpPr txBox="1">
+            <a:spLocks noChangeArrowheads="1"/>
+          </p:cNvSpPr>
+          <p:nvPr>
+            <p:custDataLst>
+              <p:tags r:id="rId2"/>
+            </p:custDataLst>
+          </p:nvPr>
+        </p:nvSpPr>
+        <p:spPr>
+          <a:xfrm>
+            <a:off x="2561325" y="1124745"/>
+            <a:ext cx="9187676" cy="1358404"/>
+          </a:xfrm>
+          <a:prstGeom prst="rect">
+            <a:avLst/>
+          </a:prstGeom>
+          <a:noFill/>
+          <a:ln>
+            <a:noFill/>
+          </a:ln>
+          <a:effectLst/>
+          <a:extLst>
+            <a:ext uri="{909E8E84-426E-40DD-AFC4-6F175D3DCCD1}">
+              <a14:hiddenFill xmlns:a14="http://schemas.microsoft.com/office/drawing/2010/main">
+                <a:solidFill>
+                  <a:schemeClr val="accent1"/>
+                </a:solidFill>
+              </a14:hiddenFill>
+            </a:ext>
+            <a:ext uri="{91240B29-F687-4F45-9708-019B960494DF}">
+              <a14:hiddenLine xmlns:a14="http://schemas.microsoft.com/office/drawing/2010/main" w="0">
+                <a:solidFill>
+                  <a:schemeClr val="tx1"/>
+                </a:solidFill>
+                <a:miter lim="800000"/>
+                <a:headEnd/>
+                <a:tailEnd/>
+              </a14:hiddenLine>
+            </a:ext>
+            <a:ext uri="{AF507438-7753-43E0-B8FC-AC1667EBCBE1}">
+              <a14:hiddenEffects xmlns:a14="http://schemas.microsoft.com/office/drawing/2010/main">
+                <a:effectLst>
+                  <a:outerShdw algn="ctr" rotWithShape="0">
+                    <a:schemeClr val="bg2"/>
+                  </a:outerShdw>
+                </a:effectLst>
+              </a14:hiddenEffects>
+            </a:ext>
+          </a:extLst>
+        </p:spPr>
+        <p:txBody>
+          <a:bodyPr lIns="0" tIns="84667" rIns="0" bIns="0"/>
+          <a:lstStyle>
+            <a:defPPr>
+              <a:defRPr lang="en-US"/>
+            </a:defPPr>
+            <a:lvl1pPr marL="285750" indent="-285750" defTabSz="839788">
+              <a:spcBef>
+                <a:spcPct val="20000"/>
+              </a:spcBef>
+              <a:buClr>
+                <a:srgbClr val="5D7298"/>
+              </a:buClr>
+              <a:buSzPct val="65000"/>
+              <a:buFont typeface="Arial" pitchFamily="34" charset="0"/>
+              <a:buChar char="•"/>
+              <a:defRPr sz="1400"/>
+            </a:lvl1pPr>
+          </a:lstStyle>
+          <a:p>
+            <a:pPr marL="0" indent="0">
+              <a:buNone/>
+            </a:pPr>
+            <a:r>
+              <a:rPr lang="en-US" sz="1400" dirty="0">
+                <a:solidFill>
+                  <a:srgbClr val="000000"/>
+                </a:solidFill>
+              </a:rPr>
+              <a:t>This is what we see in our operation today:</a:t>
+            </a:r>
+          </a:p>
+          <a:p>
+            <a:pPr>
+              <a:buFont typeface="Wingdings" pitchFamily="2" charset="2"/>
+              <a:buChar char="Ø"/>
+            </a:pPr>
+            <a:r>
+              <a:rPr lang="en-US" sz="1400" dirty="0">
+                <a:solidFill>
+                  <a:srgbClr val="000000"/>
+                </a:solidFill>
+              </a:rPr>
+              <a:t>Finished goods (material type FERT) produced in Plant GER are sold intercompany to Plant FIN</a:t>
+            </a:r>
+          </a:p>
+          <a:p>
+            <a:pPr>
+              <a:buFont typeface="Wingdings" pitchFamily="2" charset="2"/>
+              <a:buChar char="Ø"/>
+            </a:pPr>
+            <a:r>
+              <a:rPr lang="en-US" sz="1400" dirty="0">
+                <a:solidFill>
+                  <a:srgbClr val="000000"/>
+                </a:solidFill>
+              </a:rPr>
+              <a:t>The same material number and material type are used in both plants, although the material is a finished good for Plant GER but a purchased trading good for Plant FIN</a:t>
+            </a:r>
+          </a:p>
+        </p:txBody>
+      </p:sp>
+      <p:sp>
+        <p:nvSpPr>
+          <p:cNvPr id="62" name="AutoShape 11"/>
+          <p:cNvSpPr>
+            <a:spLocks noChangeArrowheads="1"/>
+          </p:cNvSpPr>
+          <p:nvPr>
+            <p:custDataLst>
+              <p:tags r:id="rId3"/>
+            </p:custDataLst>
+          </p:nvPr>
+        </p:nvSpPr>
+        <p:spPr bwMode="auto">
+          <a:xfrm>
+            <a:off x="735642" y="1220755"/>
+            <a:ext cx="1519932" cy="573132"/>
+          </a:xfrm>
+          <a:prstGeom prst="homePlate">
+            <a:avLst>
+              <a:gd name="adj" fmla="val 29078"/>
+            </a:avLst>
+          </a:prstGeom>
+          <a:solidFill>
+            <a:schemeClr val="accent1"/>
+          </a:solidFill>
+          <a:ln w="9525">
+            <a:noFill/>
+            <a:miter lim="800000"/>
+            <a:headEnd/>
+            <a:tailEnd/>
+          </a:ln>
+          <a:effectLst/>
+        </p:spPr>
+        <p:txBody>
+          <a:bodyPr lIns="96000" tIns="48000" rIns="96000" bIns="48000" anchor="ctr"/>
+          <a:lstStyle/>
+          <a:p>
+            <a:pPr algn="ctr"/>
+            <a:r>
+              <a:rPr lang="en-US" sz="1467" b="1">
+                <a:solidFill>
+                  <a:schemeClr val="bg1"/>
+                </a:solidFill>
+              </a:rPr>
+              <a:t>Current</a:t>
+            </a:r>
+          </a:p>
+          <a:p>
+            <a:pPr algn="ctr"/>
+            <a:r>
+              <a:rPr lang="en-US" sz="1467" b="1">
+                <a:solidFill>
+                  <a:schemeClr val="bg1"/>
+                </a:solidFill>
+              </a:rPr>
+              <a:t>Situation</a:t>
+            </a:r>
+          </a:p>
+        </p:txBody>
+      </p:sp>
+      <p:sp>
+        <p:nvSpPr>
+          <p:cNvPr id="65" name="Rectangle 13"/>
+          <p:cNvSpPr>
+            <a:spLocks noChangeArrowheads="1"/>
+          </p:cNvSpPr>
+          <p:nvPr>
+            <p:custDataLst>
+              <p:tags r:id="rId4"/>
+            </p:custDataLst>
+          </p:nvPr>
+        </p:nvSpPr>
+        <p:spPr bwMode="auto">
+          <a:xfrm>
+            <a:off x="2564482" y="2660916"/>
+            <a:ext cx="9187676" cy="1136281"/>
+          </a:xfrm>
+          <a:prstGeom prst="rect">
+            <a:avLst/>
+          </a:prstGeom>
+          <a:noFill/>
+          <a:ln>
+            <a:noFill/>
+          </a:ln>
+          <a:effectLst/>
+          <a:extLst>
+            <a:ext uri="{909E8E84-426E-40DD-AFC4-6F175D3DCCD1}">
+              <a14:hiddenFill xmlns:a14="http://schemas.microsoft.com/office/drawing/2010/main">
+                <a:solidFill>
+                  <a:schemeClr val="accent1"/>
+                </a:solidFill>
+              </a14:hiddenFill>
+            </a:ext>
+            <a:ext uri="{91240B29-F687-4F45-9708-019B960494DF}">
+              <a14:hiddenLine xmlns:a14="http://schemas.microsoft.com/office/drawing/2010/main" w="0">
+                <a:solidFill>
+                  <a:schemeClr val="tx1"/>
+                </a:solidFill>
+                <a:miter lim="800000"/>
+                <a:headEnd/>
+                <a:tailEnd/>
+              </a14:hiddenLine>
+            </a:ext>
+            <a:ext uri="{AF507438-7753-43E0-B8FC-AC1667EBCBE1}">
+              <a14:hiddenEffects xmlns:a14="http://schemas.microsoft.com/office/drawing/2010/main">
+                <a:effectLst>
+                  <a:outerShdw algn="ctr" rotWithShape="0">
+                    <a:schemeClr val="bg2"/>
+                  </a:outerShdw>
+                </a:effectLst>
+              </a14:hiddenEffects>
+            </a:ext>
+          </a:extLst>
+        </p:spPr>
+        <p:txBody>
+          <a:bodyPr lIns="0" tIns="84667" rIns="0" bIns="0"/>
+          <a:lstStyle/>
+          <a:p>
+            <a:pPr marL="380990" indent="-380990" defTabSz="1119689">
+              <a:spcBef>
+                <a:spcPct val="20000"/>
+              </a:spcBef>
+              <a:buClr>
+                <a:srgbClr val="5D7298"/>
+              </a:buClr>
+              <a:buSzPct val="65000"/>
+            </a:pPr>
+            <a:r>
+              <a:rPr lang="en-US" sz="1400" dirty="0">
+                <a:solidFill>
+                  <a:srgbClr val="000000"/>
+                </a:solidFill>
+              </a:rPr>
+              <a:t>The following requirements and system constraints have to be considered:</a:t>
+            </a:r>
+          </a:p>
+          <a:p>
+            <a:pPr marL="380990" indent="-380990" defTabSz="1119689">
+              <a:spcBef>
+                <a:spcPct val="20000"/>
+              </a:spcBef>
+              <a:buClr>
+                <a:srgbClr val="5D7298"/>
+              </a:buClr>
+              <a:buSzPct val="65000"/>
+              <a:buFont typeface="Wingdings" pitchFamily="2" charset="2"/>
+              <a:buChar char="Ø"/>
+            </a:pPr>
+            <a:r>
+              <a:rPr lang="en-US" sz="1400" dirty="0">
+                <a:solidFill>
+                  <a:srgbClr val="000000"/>
+                </a:solidFill>
+              </a:rPr>
+              <a:t>Different material valuation per plant: finished goods in Plant GER, trading goods in Plant FIN</a:t>
+            </a:r>
+          </a:p>
+          <a:p>
+            <a:pPr marL="380990" indent="-380990" defTabSz="1119689">
+              <a:spcBef>
+                <a:spcPct val="20000"/>
+              </a:spcBef>
+              <a:buClr>
+                <a:srgbClr val="5D7298"/>
+              </a:buClr>
+              <a:buSzPct val="65000"/>
+              <a:buFont typeface="Wingdings" pitchFamily="2" charset="2"/>
+              <a:buChar char="Ø"/>
+            </a:pPr>
+            <a:r>
+              <a:rPr lang="en-US" sz="1400" dirty="0">
+                <a:solidFill>
+                  <a:srgbClr val="000000"/>
+                </a:solidFill>
+              </a:rPr>
+              <a:t>A material number has exactly one material type across all company codes</a:t>
+            </a:r>
+          </a:p>
+          <a:p>
+            <a:pPr marL="380990" indent="-380990" defTabSz="1119689">
+              <a:spcBef>
+                <a:spcPct val="20000"/>
+              </a:spcBef>
+              <a:buClr>
+                <a:srgbClr val="5D7298"/>
+              </a:buClr>
+              <a:buSzPct val="65000"/>
+              <a:buFont typeface="Wingdings" pitchFamily="2" charset="2"/>
+              <a:buChar char="Ø"/>
+            </a:pPr>
+            <a:r>
+              <a:rPr lang="en-US" sz="1400" dirty="0">
+                <a:solidFill>
+                  <a:srgbClr val="000000"/>
+                </a:solidFill>
+              </a:rPr>
+              <a:t>A valuation class belongs to one account category reference, but is assigned per plant in the material master</a:t>
+            </a:r>
+          </a:p>
+        </p:txBody>
+      </p:sp>
+      <p:sp>
+        <p:nvSpPr>
+          <p:cNvPr id="68" name="Rectangle 16"/>
+          <p:cNvSpPr>
+            <a:spLocks noChangeArrowheads="1"/>
+          </p:cNvSpPr>
+          <p:nvPr>
+            <p:custDataLst>
+              <p:tags r:id="rId5"/>
+            </p:custDataLst>
+          </p:nvPr>
+        </p:nvSpPr>
+        <p:spPr bwMode="auto">
+          <a:xfrm>
+            <a:off x="2564482" y="4072255"/>
+            <a:ext cx="9292159" cy="883775"/>
+          </a:xfrm>
+          <a:prstGeom prst="rect">
+            <a:avLst/>
+          </a:prstGeom>
+          <a:noFill/>
+          <a:ln>
+            <a:noFill/>
+          </a:ln>
+          <a:effectLst/>
+          <a:extLst>
+            <a:ext uri="{909E8E84-426E-40DD-AFC4-6F175D3DCCD1}">
+              <a14:hiddenFill xmlns:a14="http://schemas.microsoft.com/office/drawing/2010/main">
+                <a:solidFill>
+                  <a:schemeClr val="accent1"/>
+                </a:solidFill>
+              </a14:hiddenFill>
+            </a:ext>
+            <a:ext uri="{91240B29-F687-4F45-9708-019B960494DF}">
+              <a14:hiddenLine xmlns:a14="http://schemas.microsoft.com/office/drawing/2010/main" w="0">
+                <a:solidFill>
+                  <a:schemeClr val="tx1"/>
+                </a:solidFill>
+                <a:miter lim="800000"/>
+                <a:headEnd/>
+                <a:tailEnd/>
+              </a14:hiddenLine>
+            </a:ext>
+            <a:ext uri="{AF507438-7753-43E0-B8FC-AC1667EBCBE1}">
+              <a14:hiddenEffects xmlns:a14="http://schemas.microsoft.com/office/drawing/2010/main">
+                <a:effectLst>
+                  <a:outerShdw algn="ctr" rotWithShape="0">
+                    <a:schemeClr val="bg2"/>
+                  </a:outerShdw>
+                </a:effectLst>
+              </a14:hiddenEffects>
+            </a:ext>
+          </a:extLst>
+        </p:spPr>
+        <p:txBody>
+          <a:bodyPr lIns="0" tIns="84667" rIns="0" bIns="0"/>
+          <a:lstStyle/>
+          <a:p>
+            <a:pPr defTabSz="1119689">
+              <a:spcBef>
+                <a:spcPct val="20000"/>
+              </a:spcBef>
+              <a:buClr>
+                <a:srgbClr val="5D7298"/>
+              </a:buClr>
+              <a:buSzPct val="65000"/>
+            </a:pPr>
+            <a:r>
+              <a:rPr lang="en-US" sz="1400">
+                <a:solidFill>
+                  <a:srgbClr val="000000"/>
+                </a:solidFill>
+              </a:rPr>
+              <a:t>Given the facts we see the following possible solution alternatives:</a:t>
+            </a:r>
+          </a:p>
+          <a:p>
+            <a:pPr marL="380990" indent="-380990" defTabSz="1119689">
+              <a:spcBef>
+                <a:spcPct val="20000"/>
+              </a:spcBef>
+              <a:buClr>
+                <a:srgbClr val="5D7298"/>
+              </a:buClr>
+              <a:buSzPct val="65000"/>
+              <a:buFont typeface="Wingdings" pitchFamily="2" charset="2"/>
+              <a:buChar char="Ø"/>
+            </a:pPr>
+            <a:r>
+              <a:rPr lang="en-US" sz="1400">
+                <a:solidFill>
+                  <a:srgbClr val="000000"/>
+                </a:solidFill>
+              </a:rPr>
+              <a:t>Alternative 1: </a:t>
+            </a:r>
+            <a:r>
+              <a:rPr lang="en-US" sz="1400" b="1">
+                <a:solidFill>
+                  <a:srgbClr val="000000"/>
+                </a:solidFill>
+              </a:rPr>
+              <a:t>Separate material numbers</a:t>
+            </a:r>
+            <a:r>
+              <a:rPr lang="en-US" sz="1400">
+                <a:solidFill>
+                  <a:srgbClr val="000000"/>
+                </a:solidFill>
+              </a:rPr>
+              <a:t> per plant (FERT in GER, HAWA in FIN)</a:t>
+            </a:r>
+          </a:p>
+          <a:p>
+            <a:pPr marL="380990" indent="-380990" defTabSz="1119689">
+              <a:spcBef>
+                <a:spcPct val="20000"/>
+              </a:spcBef>
+              <a:buClr>
+                <a:srgbClr val="5D7298"/>
+              </a:buClr>
+              <a:buSzPct val="65000"/>
+              <a:buFont typeface="Wingdings" pitchFamily="2" charset="2"/>
+              <a:buChar char="Ø"/>
+            </a:pPr>
+            <a:r>
+              <a:rPr lang="en-US" sz="1400">
+                <a:solidFill>
+                  <a:srgbClr val="000000"/>
+                </a:solidFill>
+              </a:rPr>
+              <a:t>Alternative 2: </a:t>
+            </a:r>
+            <a:r>
+              <a:rPr lang="en-US" sz="1400" b="1">
+                <a:solidFill>
+                  <a:srgbClr val="000000"/>
+                </a:solidFill>
+              </a:rPr>
+              <a:t>Uniform FERT valuation</a:t>
+            </a:r>
+            <a:r>
+              <a:rPr lang="en-US" sz="1400">
+                <a:solidFill>
+                  <a:srgbClr val="000000"/>
+                </a:solidFill>
+              </a:rPr>
+              <a:t> (7920) in both plants, manual reclassification</a:t>
+            </a:r>
+          </a:p>
+          <a:p>
+            <a:pPr marL="380990" indent="-380990" defTabSz="1119689">
+              <a:spcBef>
+                <a:spcPct val="20000"/>
+              </a:spcBef>
+              <a:buClr>
+                <a:srgbClr val="5D7298"/>
+              </a:buClr>
+              <a:buSzPct val="65000"/>
+              <a:buFont typeface="Wingdings" pitchFamily="2" charset="2"/>
+              <a:buChar char="Ø"/>
+            </a:pPr>
+            <a:r>
+              <a:rPr lang="en-US" sz="1400">
+                <a:solidFill>
+                  <a:srgbClr val="000000"/>
+                </a:solidFill>
+              </a:rPr>
+              <a:t>Alternative 3: </a:t>
+            </a:r>
+            <a:r>
+              <a:rPr lang="en-US" sz="1400" b="1">
+                <a:solidFill>
+                  <a:srgbClr val="000000"/>
+                </a:solidFill>
+              </a:rPr>
+              <a:t>Custom valuation class</a:t>
+            </a:r>
+            <a:r>
+              <a:rPr lang="en-US" sz="1400">
+                <a:solidFill>
+                  <a:srgbClr val="000000"/>
+                </a:solidFill>
+              </a:rPr>
+              <a:t> with HAWA account determination for Plant FIN</a:t>
+            </a:r>
+          </a:p>
+        </p:txBody>
+      </p:sp>
+      <p:sp>
+        <p:nvSpPr>
+          <p:cNvPr id="14" name="Rectangle 16"/>
+          <p:cNvSpPr>
+            <a:spLocks noChangeArrowheads="1"/>
+          </p:cNvSpPr>
+          <p:nvPr>
+            <p:custDataLst>
+              <p:tags r:id="rId6"/>
+            </p:custDataLst>
+          </p:nvPr>
+        </p:nvSpPr>
+        <p:spPr bwMode="auto">
+          <a:xfrm>
+            <a:off x="2561325" y="5425546"/>
+            <a:ext cx="9292159" cy="883775"/>
+          </a:xfrm>
+          <a:prstGeom prst="rect">
+            <a:avLst/>
+          </a:prstGeom>
+          <a:noFill/>
+          <a:ln>
+            <a:noFill/>
+          </a:ln>
+          <a:effectLst/>
+          <a:extLst>
+            <a:ext uri="{909E8E84-426E-40DD-AFC4-6F175D3DCCD1}">
+              <a14:hiddenFill xmlns:a14="http://schemas.microsoft.com/office/drawing/2010/main">
+                <a:solidFill>
+                  <a:schemeClr val="accent1"/>
+                </a:solidFill>
+              </a14:hiddenFill>
+            </a:ext>
+            <a:ext uri="{91240B29-F687-4F45-9708-019B960494DF}">
+              <a14:hiddenLine xmlns:a14="http://schemas.microsoft.com/office/drawing/2010/main" w="0">
+                <a:solidFill>
+                  <a:schemeClr val="tx1"/>
+                </a:solidFill>
+                <a:miter lim="800000"/>
+                <a:headEnd/>
+                <a:tailEnd/>
+              </a14:hiddenLine>
+            </a:ext>
+            <a:ext uri="{AF507438-7753-43E0-B8FC-AC1667EBCBE1}">
+              <a14:hiddenEffects xmlns:a14="http://schemas.microsoft.com/office/drawing/2010/main">
+                <a:effectLst>
+                  <a:outerShdw algn="ctr" rotWithShape="0">
+                    <a:schemeClr val="bg2"/>
+                  </a:outerShdw>
+                </a:effectLst>
+              </a14:hiddenEffects>
+            </a:ext>
+          </a:extLst>
+        </p:spPr>
+        <p:txBody>
+          <a:bodyPr lIns="0" tIns="84667" rIns="0" bIns="0"/>
+          <a:lstStyle/>
+          <a:p>
+            <a:pPr defTabSz="1119689">
+              <a:spcBef>
+                <a:spcPct val="20000"/>
+              </a:spcBef>
+              <a:buClr>
+                <a:srgbClr val="5D7298"/>
+              </a:buClr>
+              <a:buSzPct val="65000"/>
+            </a:pPr>
+            <a:r>
+              <a:rPr lang="en-US" sz="1400" b="1">
+                <a:solidFill>
+                  <a:srgbClr val="000000"/>
+                </a:solidFill>
+              </a:rPr>
+              <a:t>Alternative 3: Custom valuation class with HAWA account determination for Plant FIN</a:t>
+            </a:r>
+            <a:r>
+              <a:rPr lang="en-US" sz="1400">
+                <a:solidFill>
+                  <a:srgbClr val="000000"/>
+                </a:solidFill>
+              </a:rPr>
+              <a:t> (one material number and material type, plant-specific valuation via the material master)</a:t>
+            </a:r>
+          </a:p>
+        </p:txBody>
+      </p:sp>
+      <p:sp>
+        <p:nvSpPr>
+          <p:cNvPr id="16" name="AutoShape 11"/>
+          <p:cNvSpPr>
+            <a:spLocks noChangeArrowheads="1"/>
+          </p:cNvSpPr>
+          <p:nvPr>
+            <p:custDataLst>
+              <p:tags r:id="rId7"/>
+            </p:custDataLst>
+          </p:nvPr>
+        </p:nvSpPr>
+        <p:spPr bwMode="auto">
+          <a:xfrm>
+            <a:off x="719403" y="4091934"/>
+            <a:ext cx="1519932" cy="573132"/>
+          </a:xfrm>
+          <a:prstGeom prst="homePlate">
+            <a:avLst>
+              <a:gd name="adj" fmla="val 29078"/>
+            </a:avLst>
+          </a:prstGeom>
+          <a:solidFill>
+            <a:schemeClr val="accent1"/>
+          </a:solidFill>
+          <a:ln w="9525">
+            <a:noFill/>
+            <a:miter lim="800000"/>
+            <a:headEnd/>
+            <a:tailEnd/>
+          </a:ln>
+          <a:effectLst/>
+        </p:spPr>
+        <p:txBody>
+          <a:bodyPr lIns="96000" tIns="48000" rIns="96000" bIns="48000" anchor="ctr"/>
+          <a:lstStyle/>
+          <a:p>
+            <a:pPr algn="ctr"/>
+            <a:r>
+              <a:rPr lang="en-US" sz="1467" b="1">
+                <a:solidFill>
+                  <a:schemeClr val="bg1"/>
+                </a:solidFill>
+              </a:rPr>
+              <a:t>Solution Alternatives</a:t>
+            </a:r>
+          </a:p>
+        </p:txBody>
+      </p:sp>
+      <p:sp>
+        <p:nvSpPr>
+          <p:cNvPr id="18" name="AutoShape 11"/>
+          <p:cNvSpPr>
+            <a:spLocks noChangeArrowheads="1"/>
+          </p:cNvSpPr>
+          <p:nvPr>
+            <p:custDataLst>
+              <p:tags r:id="rId8"/>
+            </p:custDataLst>
+          </p:nvPr>
+        </p:nvSpPr>
+        <p:spPr bwMode="auto">
+          <a:xfrm>
+            <a:off x="735642" y="2663847"/>
+            <a:ext cx="1519932" cy="573132"/>
+          </a:xfrm>
+          <a:prstGeom prst="homePlate">
+            <a:avLst>
+              <a:gd name="adj" fmla="val 29078"/>
+            </a:avLst>
+          </a:prstGeom>
+          <a:solidFill>
+            <a:schemeClr val="accent1"/>
+          </a:solidFill>
+          <a:ln w="9525">
+            <a:noFill/>
+            <a:miter lim="800000"/>
+            <a:headEnd/>
+            <a:tailEnd/>
+          </a:ln>
+          <a:effectLst/>
+        </p:spPr>
+        <p:txBody>
+          <a:bodyPr lIns="96000" tIns="48000" rIns="96000" bIns="48000" anchor="ctr"/>
+          <a:lstStyle/>
+          <a:p>
+            <a:pPr algn="ctr"/>
+            <a:r>
+              <a:rPr lang="en-US" sz="1467" b="1">
+                <a:solidFill>
+                  <a:schemeClr val="bg1"/>
+                </a:solidFill>
+              </a:rPr>
+              <a:t>Issues</a:t>
+            </a:r>
+          </a:p>
+        </p:txBody>
+      </p:sp>
+      <p:sp>
+        <p:nvSpPr>
+          <p:cNvPr id="19" name="AutoShape 11"/>
+          <p:cNvSpPr>
+            <a:spLocks noChangeArrowheads="1"/>
+          </p:cNvSpPr>
+          <p:nvPr>
+            <p:custDataLst>
+              <p:tags r:id="rId9"/>
+            </p:custDataLst>
+          </p:nvPr>
+        </p:nvSpPr>
+        <p:spPr bwMode="auto">
+          <a:xfrm>
+            <a:off x="735642" y="5448155"/>
+            <a:ext cx="1519932" cy="573132"/>
+          </a:xfrm>
+          <a:prstGeom prst="homePlate">
+            <a:avLst>
+              <a:gd name="adj" fmla="val 29078"/>
+            </a:avLst>
+          </a:prstGeom>
+          <a:solidFill>
+            <a:schemeClr val="accent1"/>
+          </a:solidFill>
+          <a:ln w="9525">
+            <a:noFill/>
+            <a:miter lim="800000"/>
+            <a:headEnd/>
+            <a:tailEnd/>
+          </a:ln>
+          <a:effectLst/>
+        </p:spPr>
+        <p:txBody>
+          <a:bodyPr lIns="96000" tIns="48000" rIns="96000" bIns="48000" anchor="ctr"/>
+          <a:lstStyle/>
+          <a:p>
+            <a:pPr algn="ctr"/>
+            <a:r>
+              <a:rPr lang="en-US" sz="1467" b="1">
+                <a:solidFill>
+                  <a:schemeClr val="bg1"/>
+                </a:solidFill>
+              </a:rPr>
+              <a:t>Recommen-dation</a:t>
+            </a:r>
+          </a:p>
+        </p:txBody>
+      </p:sp>
+      <p:sp>
+        <p:nvSpPr>
+          <p:cNvPr id="4" name="Fußzeilenplatzhalter 5">
+            <a:extLst>
+              <a:ext uri="{FF2B5EF4-FFF2-40B4-BE49-F238E27FC236}">
+                <a16:creationId xmlns:a16="http://schemas.microsoft.com/office/drawing/2014/main" id="{4654CE0E-2BD9-F5A5-84E8-02ACC07332E5}"/>
+              </a:ext>
+            </a:extLst>
+          </p:cNvPr>
+          <p:cNvSpPr txBox="1">
+            <a:spLocks/>
+          </p:cNvSpPr>
+          <p:nvPr/>
+        </p:nvSpPr>
+        <p:spPr>
+          <a:xfrm>
+            <a:off x="0" y="6527297"/>
+            <a:ext cx="12192000" cy="230832"/>
+          </a:xfrm>
+          <a:prstGeom prst="rect">
+            <a:avLst/>
+          </a:prstGeom>
+          <a:ln/>
+        </p:spPr>
+        <p:txBody>
+          <a:bodyPr anchor="ctr"/>
+          <a:lstStyle>
+            <a:defPPr>
+              <a:defRPr lang="de-DE"/>
+            </a:defPPr>
+            <a:lvl1pPr algn="l" rtl="0" fontAlgn="base">
+              <a:spcBef>
+                <a:spcPct val="0"/>
+              </a:spcBef>
+              <a:spcAft>
+                <a:spcPct val="0"/>
+              </a:spcAft>
+              <a:defRPr sz="900" kern="1200">
+                <a:solidFill>
+                  <a:schemeClr val="tx1"/>
+                </a:solidFill>
+                <a:latin typeface="Arial" pitchFamily="34" charset="0"/>
+                <a:ea typeface="MS PGothic" pitchFamily="34" charset="-128"/>
+                <a:cs typeface="+mn-cs"/>
+              </a:defRPr>
+            </a:lvl1pPr>
+            <a:lvl2pPr marL="457200" algn="l" rtl="0" fontAlgn="base">
+              <a:spcBef>
+                <a:spcPct val="0"/>
+              </a:spcBef>
+              <a:spcAft>
+                <a:spcPct val="0"/>
+              </a:spcAft>
+              <a:defRPr sz="2400" kern="1200">
+                <a:solidFill>
+                  <a:schemeClr val="tx1"/>
+                </a:solidFill>
+                <a:latin typeface="Arial" pitchFamily="34" charset="0"/>
+                <a:ea typeface="MS PGothic" pitchFamily="34" charset="-128"/>
+                <a:cs typeface="+mn-cs"/>
+              </a:defRPr>
+            </a:lvl2pPr>
+            <a:lvl3pPr marL="914400" algn="l" rtl="0" fontAlgn="base">
+              <a:spcBef>
+                <a:spcPct val="0"/>
+              </a:spcBef>
+              <a:spcAft>
+                <a:spcPct val="0"/>
+              </a:spcAft>
+              <a:defRPr sz="2400" kern="1200">
+                <a:solidFill>
+                  <a:schemeClr val="tx1"/>
+                </a:solidFill>
+                <a:latin typeface="Arial" pitchFamily="34" charset="0"/>
+                <a:ea typeface="MS PGothic" pitchFamily="34" charset="-128"/>
+                <a:cs typeface="+mn-cs"/>
+              </a:defRPr>
+            </a:lvl3pPr>
+            <a:lvl4pPr marL="1371600" algn="l" rtl="0" fontAlgn="base">
+              <a:spcBef>
+                <a:spcPct val="0"/>
+              </a:spcBef>
+              <a:spcAft>
+                <a:spcPct val="0"/>
+              </a:spcAft>
+              <a:defRPr sz="2400" kern="1200">
+                <a:solidFill>
+                  <a:schemeClr val="tx1"/>
+                </a:solidFill>
+                <a:latin typeface="Arial" pitchFamily="34" charset="0"/>
+                <a:ea typeface="MS PGothic" pitchFamily="34" charset="-128"/>
+                <a:cs typeface="+mn-cs"/>
+              </a:defRPr>
+            </a:lvl4pPr>
+            <a:lvl5pPr marL="1828800" algn="l" rtl="0" fontAlgn="base">
+              <a:spcBef>
+                <a:spcPct val="0"/>
+              </a:spcBef>
+              <a:spcAft>
+                <a:spcPct val="0"/>
+              </a:spcAft>
+              <a:defRPr sz="2400" kern="1200">
+                <a:solidFill>
+                  <a:schemeClr val="tx1"/>
+                </a:solidFill>
+                <a:latin typeface="Arial" pitchFamily="34" charset="0"/>
+                <a:ea typeface="MS PGothic" pitchFamily="34" charset="-128"/>
+                <a:cs typeface="+mn-cs"/>
+              </a:defRPr>
+            </a:lvl5pPr>
+            <a:lvl6pPr marL="2286000" algn="l" defTabSz="914400" rtl="0" eaLnBrk="1" latinLnBrk="0" hangingPunct="1">
+              <a:defRPr sz="2400" kern="1200">
+                <a:solidFill>
+                  <a:schemeClr val="tx1"/>
+                </a:solidFill>
+                <a:latin typeface="Arial" pitchFamily="34" charset="0"/>
+                <a:ea typeface="MS PGothic" pitchFamily="34" charset="-128"/>
+                <a:cs typeface="+mn-cs"/>
+              </a:defRPr>
+            </a:lvl6pPr>
+            <a:lvl7pPr marL="2743200" algn="l" defTabSz="914400" rtl="0" eaLnBrk="1" latinLnBrk="0" hangingPunct="1">
+              <a:defRPr sz="2400" kern="1200">
+                <a:solidFill>
+                  <a:schemeClr val="tx1"/>
+                </a:solidFill>
+                <a:latin typeface="Arial" pitchFamily="34" charset="0"/>
+                <a:ea typeface="MS PGothic" pitchFamily="34" charset="-128"/>
+                <a:cs typeface="+mn-cs"/>
+              </a:defRPr>
+            </a:lvl7pPr>
+            <a:lvl8pPr marL="3200400" algn="l" defTabSz="914400" rtl="0" eaLnBrk="1" latinLnBrk="0" hangingPunct="1">
+              <a:defRPr sz="2400" kern="1200">
+                <a:solidFill>
+                  <a:schemeClr val="tx1"/>
+                </a:solidFill>
+                <a:latin typeface="Arial" pitchFamily="34" charset="0"/>
+                <a:ea typeface="MS PGothic" pitchFamily="34" charset="-128"/>
+                <a:cs typeface="+mn-cs"/>
+              </a:defRPr>
+            </a:lvl8pPr>
+            <a:lvl9pPr marL="3657600" algn="l" defTabSz="914400" rtl="0" eaLnBrk="1" latinLnBrk="0" hangingPunct="1">
+              <a:defRPr sz="2400" kern="1200">
+                <a:solidFill>
+                  <a:schemeClr val="tx1"/>
+                </a:solidFill>
+                <a:latin typeface="Arial" pitchFamily="34" charset="0"/>
+                <a:ea typeface="MS PGothic" pitchFamily="34" charset="-128"/>
+                <a:cs typeface="+mn-cs"/>
+              </a:defRPr>
+            </a:lvl9pPr>
+          </a:lstStyle>
+          <a:p>
+            <a:pPr algn="ctr">
+              <a:spcBef>
+                <a:spcPts val="600"/>
+              </a:spcBef>
+              <a:buSzPct val="100000"/>
+            </a:pPr>
+            <a:r>
+              <a:rPr lang="en-US" sz="800" noProof="0" dirty="0">
+                <a:solidFill>
+                  <a:srgbClr val="313131"/>
+                </a:solidFill>
+                <a:latin typeface="Arial"/>
+              </a:rPr>
+              <a:t>Armin Turken </a:t>
+            </a:r>
+            <a:r>
+              <a:rPr lang="en-US" sz="800" b="1" noProof="0" dirty="0">
+                <a:solidFill>
+                  <a:srgbClr val="313131"/>
+                </a:solidFill>
+                <a:latin typeface="Arial"/>
+              </a:rPr>
+              <a:t>| </a:t>
+            </a:r>
+            <a:r>
+              <a:rPr lang="en-US" sz="800" noProof="0" dirty="0">
+                <a:solidFill>
+                  <a:srgbClr val="313131"/>
+                </a:solidFill>
+                <a:latin typeface="Arial"/>
+              </a:rPr>
+              <a:t>Deloitte</a:t>
+            </a:r>
+            <a:r>
+              <a:rPr lang="en-US" sz="800" b="1" noProof="0" dirty="0">
+                <a:solidFill>
+                  <a:srgbClr val="313131"/>
+                </a:solidFill>
+                <a:latin typeface="Arial"/>
+              </a:rPr>
+              <a:t> | </a:t>
+            </a:r>
+            <a:r>
+              <a:rPr lang="en-US" sz="800" noProof="0" dirty="0">
+                <a:solidFill>
+                  <a:srgbClr val="313131"/>
+                </a:solidFill>
+              </a:rPr>
+              <a:t>Controlling</a:t>
+            </a:r>
+            <a:endParaRPr lang="en-US" sz="800" noProof="0" dirty="0">
+              <a:solidFill>
+                <a:srgbClr val="313131"/>
+              </a:solidFill>
+              <a:latin typeface="Arial"/>
+            </a:endParaRPr>
+          </a:p>
+        </p:txBody>
+      </p:sp>
+    </p:spTree>
+    <p:extLst>
+      <p:ext uri="{BB962C8B-B14F-4D97-AF65-F5344CB8AC3E}">
+        <p14:creationId xmlns:p14="http://schemas.microsoft.com/office/powerpoint/2010/main" val="1054758616"/>
+      </p:ext>
+    </p:extLst>
+  </p:cSld>
+  <p:clrMapOvr>
+    <a:masterClrMapping/>
+  </p:clrMapOvr>
+</p:sld>
+</file>
+
+<file path=ppt/slides/slide4.xml><?xml version="1.0" encoding="utf-8"?>
+<p:sld xmlns:a="http://schemas.openxmlformats.org/drawingml/2006/main" xmlns:r="http://schemas.openxmlformats.org/officeDocument/2006/relationships" xmlns:p="http://schemas.openxmlformats.org/presentationml/2006/main">
+  <p:cSld>
+    <p:spTree>
+      <p:nvGrpSpPr>
+        <p:cNvPr id="1" name=""/>
+        <p:cNvGrpSpPr/>
+        <p:nvPr/>
+      </p:nvGrpSpPr>
+      <p:grpSpPr>
+        <a:xfrm>
+          <a:off x="0" y="0"/>
+          <a:ext cx="0" cy="0"/>
+          <a:chOff x="0" y="0"/>
+          <a:chExt cx="0" cy="0"/>
+        </a:xfrm>
+      </p:grpSpPr>
+      <p:graphicFrame>
+        <p:nvGraphicFramePr>
+          <p:cNvPr id="17" name="Objekt 16" hidden="1"/>
+          <p:cNvGraphicFramePr>
+            <a:graphicFrameLocks noChangeAspect="1"/>
+          </p:cNvGraphicFramePr>
+          <p:nvPr>
+            <p:custDataLst>
+              <p:tags r:id="rId1"/>
+            </p:custDataLst>
+          </p:nvPr>
+        </p:nvGraphicFramePr>
+        <p:xfrm>
+          <a:off x="2118" y="2118"/>
+          <a:ext cx="2116" cy="2116"/>
+        </p:xfrm>
+        <a:graphic>
+          <a:graphicData uri="http://schemas.openxmlformats.org/presentationml/2006/ole">
+            <mc:AlternateContent xmlns:mc="http://schemas.openxmlformats.org/markup-compatibility/2006">
+              <mc:Choice xmlns:v="urn:schemas-microsoft-com:vml" Requires="v">
+                <p:oleObj name="think-cell Folie" r:id="rId5" imgW="216" imgH="216" progId="">
+                  <p:embed/>
+                </p:oleObj>
+              </mc:Choice>
+              <mc:Fallback>
+                <p:oleObj name="think-cell Folie" r:id="rId5" imgW="216" imgH="216" progId="">
+                  <p:embed/>
+                  <p:pic>
+                    <p:nvPicPr>
+                      <p:cNvPr id="17" name="Objekt 16" hidden="1"/>
+                      <p:cNvPicPr>
+                        <a:picLocks noChangeAspect="1" noChangeArrowheads="1"/>
+                      </p:cNvPicPr>
+                      <p:nvPr/>
+                    </p:nvPicPr>
+                    <p:blipFill>
+                      <a:blip r:embed="rId6">
+                        <a:extLst>
+                          <a:ext uri="{28A0092B-C50C-407E-A947-70E740481C1C}">
+                            <a14:useLocalDpi xmlns:a14="http://schemas.microsoft.com/office/drawing/2010/main" val="0"/>
+                          </a:ext>
+                        </a:extLst>
+                      </a:blip>
+                      <a:srcRect/>
+                      <a:stretch>
+                        <a:fillRect/>
+                      </a:stretch>
+                    </p:blipFill>
+                    <p:spPr bwMode="auto">
+                      <a:xfrm>
+                        <a:off x="2118" y="2118"/>
+                        <a:ext cx="2116" cy="2116"/>
+                      </a:xfrm>
+                      <a:prstGeom prst="rect">
+                        <a:avLst/>
+                      </a:prstGeom>
+                      <a:noFill/>
+                      <a:extLst>
+                        <a:ext uri="{909E8E84-426E-40DD-AFC4-6F175D3DCCD1}">
+                          <a14:hiddenFill xmlns:a14="http://schemas.microsoft.com/office/drawing/2010/main">
+                            <a:solidFill>
+                              <a:srgbClr val="FFFFFF"/>
+                            </a:solidFill>
+                          </a14:hiddenFill>
+                        </a:ext>
+                      </a:extLst>
+                    </p:spPr>
+                  </p:pic>
+                </p:oleObj>
+              </mc:Fallback>
+            </mc:AlternateContent>
+          </a:graphicData>
+        </a:graphic>
+      </p:graphicFrame>
+      <p:sp>
+        <p:nvSpPr>
+          <p:cNvPr id="15" name="Titel 2"/>
+          <p:cNvSpPr>
+            <a:spLocks noGrp="1"/>
+          </p:cNvSpPr>
+          <p:nvPr>
+            <p:ph type="title"/>
+          </p:nvPr>
+        </p:nvSpPr>
+        <p:spPr bwMode="gray"/>
+        <p:txBody>
+          <a:bodyPr>
+            <a:noAutofit/>
+          </a:bodyPr>
+          <a:lstStyle/>
+          <a:p>
+            <a:r>
+              <a:rPr lang="en-US" dirty="0"/>
+              <a:t>Solution Alternatives and Recommendation</a:t>
+            </a:r>
+          </a:p>
+        </p:txBody>
+      </p:sp>
+      <p:sp>
+        <p:nvSpPr>
+          <p:cNvPr id="2" name="Textplatzhalter 1">
+            <a:extLst>
+              <a:ext uri="{FF2B5EF4-FFF2-40B4-BE49-F238E27FC236}">
+                <a16:creationId xmlns:a16="http://schemas.microsoft.com/office/drawing/2014/main" id="{B3366716-6EA6-3D5A-6FE5-2FC39DA12F83}"/>
+              </a:ext>
+            </a:extLst>
+          </p:cNvPr>
+          <p:cNvSpPr>
+            <a:spLocks noGrp="1"/>
+          </p:cNvSpPr>
+          <p:nvPr>
+            <p:ph type="body" sz="quarter" idx="17"/>
+          </p:nvPr>
+        </p:nvSpPr>
+        <p:spPr/>
+        <p:txBody>
+          <a:bodyPr/>
+          <a:lstStyle/>
+          <a:p>
+            <a:endParaRPr lang="de-DE" dirty="0"/>
+          </a:p>
+        </p:txBody>
+      </p:sp>
+      <p:graphicFrame>
+        <p:nvGraphicFramePr>
+          <p:cNvPr id="63" name="Group 96"/>
+          <p:cNvGraphicFramePr>
+            <a:graphicFrameLocks/>
+          </p:cNvGraphicFramePr>
+          <p:nvPr>
+            <p:custDataLst>
+              <p:tags r:id="rId2"/>
+            </p:custDataLst>
+            <p:extLst>
+              <p:ext uri="{D42A27DB-BD31-4B8C-83A1-F6EECF244321}">
+                <p14:modId xmlns:p14="http://schemas.microsoft.com/office/powerpoint/2010/main" val="316534479"/>
+              </p:ext>
+            </p:extLst>
+          </p:nvPr>
+        </p:nvGraphicFramePr>
+        <p:xfrm>
+          <a:off x="228080" y="1117592"/>
+          <a:ext cx="11735840" cy="4431937"/>
+        </p:xfrm>
+        <a:graphic>
+          <a:graphicData uri="http://schemas.openxmlformats.org/drawingml/2006/table">
+            <a:tbl>
+              <a:tblPr/>
+              <a:tblGrid>
+                <a:gridCol w="1418462">
+                  <a:extLst>
+                    <a:ext uri="{9D8B030D-6E8A-4147-A177-3AD203B41FA5}">
+                      <a16:colId xmlns:a16="http://schemas.microsoft.com/office/drawing/2014/main" val="20000"/>
+                    </a:ext>
+                  </a:extLst>
+                </a:gridCol>
+                <a:gridCol w="3340967">
+                  <a:extLst>
+                    <a:ext uri="{9D8B030D-6E8A-4147-A177-3AD203B41FA5}">
+                      <a16:colId xmlns:a16="http://schemas.microsoft.com/office/drawing/2014/main" val="20001"/>
+                    </a:ext>
+                  </a:extLst>
+                </a:gridCol>
+                <a:gridCol w="3568850">
+                  <a:extLst>
+                    <a:ext uri="{9D8B030D-6E8A-4147-A177-3AD203B41FA5}">
+                      <a16:colId xmlns:a16="http://schemas.microsoft.com/office/drawing/2014/main" val="20002"/>
+                    </a:ext>
+                  </a:extLst>
+                </a:gridCol>
+                <a:gridCol w="3407561">
+                  <a:extLst>
+                    <a:ext uri="{9D8B030D-6E8A-4147-A177-3AD203B41FA5}">
+                      <a16:colId xmlns:a16="http://schemas.microsoft.com/office/drawing/2014/main" val="20003"/>
+                    </a:ext>
+                  </a:extLst>
+                </a:gridCol>
+              </a:tblGrid>
+              <a:tr h="350384">
+                <a:tc>
+                  <a:txBody>
+                    <a:bodyPr/>
+                    <a:lstStyle/>
+                    <a:p>
+                      <a:pPr marL="0" marR="0" lvl="0" indent="0" algn="ctr" defTabSz="839788" rtl="0" eaLnBrk="0" fontAlgn="base" latinLnBrk="0" hangingPunct="0">
+                        <a:lnSpc>
+                          <a:spcPct val="111000"/>
+                        </a:lnSpc>
+                        <a:spcBef>
+                          <a:spcPct val="0"/>
+                        </a:spcBef>
+                        <a:spcAft>
+                          <a:spcPct val="0"/>
+                        </a:spcAft>
+                        <a:buClr>
+                          <a:srgbClr val="5D7298"/>
+                        </a:buClr>
+                        <a:buSzPct val="65000"/>
+                        <a:buFont typeface="Wingdings" pitchFamily="2" charset="2"/>
+                        <a:buNone/>
+                        <a:tabLst/>
+                      </a:pPr>
+                      <a:endParaRPr kumimoji="0" lang="en-US" sz="1300" b="0" i="0" u="none" strike="noStrike" cap="none" normalizeH="0" baseline="0" noProof="0" dirty="0">
+                        <a:ln>
+                          <a:noFill/>
+                        </a:ln>
+                        <a:solidFill>
+                          <a:srgbClr val="000000"/>
+                        </a:solidFill>
+                        <a:effectLst/>
+                        <a:latin typeface="+mn-lt"/>
+                      </a:endParaRPr>
+                    </a:p>
+                  </a:txBody>
+                  <a:tcPr marL="121916" marR="121916" marT="60979" marB="60979" horzOverflow="overflow">
+                    <a:lnL w="12700" cap="flat" cmpd="sng" algn="ctr">
+                      <a:solidFill>
+                        <a:schemeClr val="bg1"/>
+                      </a:solidFill>
+                      <a:prstDash val="solid"/>
+                      <a:round/>
+                      <a:headEnd type="none" w="med" len="med"/>
+                      <a:tailEnd type="none" w="med" len="med"/>
+                    </a:lnL>
+                    <a:lnR w="12700" cap="flat" cmpd="sng" algn="ctr">
+                      <a:solidFill>
+                        <a:schemeClr val="bg1"/>
+                      </a:solidFill>
+                      <a:prstDash val="solid"/>
+                      <a:round/>
+                      <a:headEnd type="none" w="med" len="med"/>
+                      <a:tailEnd type="none" w="med" len="med"/>
+                    </a:lnR>
+                    <a:lnT w="12700" cap="flat" cmpd="sng" algn="ctr">
+                      <a:solidFill>
+                        <a:schemeClr val="bg1"/>
+                      </a:solidFill>
+                      <a:prstDash val="solid"/>
+                      <a:round/>
+                      <a:headEnd type="none" w="med" len="med"/>
+                      <a:tailEnd type="none" w="med" len="med"/>
+                    </a:lnT>
+                    <a:lnB w="12700" cap="flat" cmpd="sng" algn="ctr">
+                      <a:solidFill>
+                        <a:schemeClr val="bg1"/>
+                      </a:solidFill>
+                      <a:prstDash val="solid"/>
+                      <a:round/>
+                      <a:headEnd type="none" w="med" len="med"/>
+                      <a:tailEnd type="none" w="med" len="med"/>
+                    </a:lnB>
+                    <a:lnTlToBr>
+                      <a:noFill/>
+                    </a:lnTlToBr>
+                    <a:lnBlToTr>
+                      <a:noFill/>
+                    </a:lnBlToTr>
+                    <a:solidFill>
+                      <a:schemeClr val="accent1">
+                        <a:lumMod val="75000"/>
+                      </a:schemeClr>
+                    </a:solidFill>
+                  </a:tcPr>
+                </a:tc>
+                <a:tc>
+                  <a:txBody>
+                    <a:bodyPr/>
+                    <a:lstStyle/>
+                    <a:p>
+                      <a:pPr marL="0" marR="0" lvl="0" indent="0" algn="ctr" defTabSz="839788" rtl="0" eaLnBrk="0" fontAlgn="base" latinLnBrk="0" hangingPunct="0">
+                        <a:lnSpc>
+                          <a:spcPct val="111000"/>
+                        </a:lnSpc>
+                        <a:spcBef>
+                          <a:spcPct val="0"/>
+                        </a:spcBef>
+                        <a:spcAft>
+                          <a:spcPct val="0"/>
+                        </a:spcAft>
+                        <a:buClr>
+                          <a:srgbClr val="5D7298"/>
+                        </a:buClr>
+                        <a:buSzPct val="65000"/>
+                        <a:buFont typeface="Wingdings" pitchFamily="2" charset="2"/>
+                        <a:buNone/>
+                        <a:tabLst/>
+                        <a:defRPr/>
+                      </a:pPr>
+                      <a:r>
+                        <a:rPr kumimoji="0" lang="en-US" sz="1300" b="1" i="0" u="none" strike="noStrike" cap="none" normalizeH="0" baseline="0" noProof="0" dirty="0">
+                          <a:ln>
+                            <a:noFill/>
+                          </a:ln>
+                          <a:solidFill>
+                            <a:schemeClr val="bg1"/>
+                          </a:solidFill>
+                          <a:effectLst/>
+                          <a:latin typeface="+mn-lt"/>
+                        </a:rPr>
+                        <a:t>Alternative 1</a:t>
+                      </a:r>
+                    </a:p>
+                  </a:txBody>
+                  <a:tcPr marL="121916" marR="121916" marT="60979" marB="60979" horzOverflow="overflow">
+                    <a:lnL w="12700" cap="flat" cmpd="sng" algn="ctr">
+                      <a:solidFill>
+                        <a:schemeClr val="bg1"/>
+                      </a:solidFill>
+                      <a:prstDash val="solid"/>
+                      <a:round/>
+                      <a:headEnd type="none" w="med" len="med"/>
+                      <a:tailEnd type="none" w="med" len="med"/>
+                    </a:lnL>
+                    <a:lnR w="12700" cap="flat" cmpd="sng" algn="ctr">
+                      <a:solidFill>
+                        <a:schemeClr val="bg1"/>
+                      </a:solidFill>
+                      <a:prstDash val="solid"/>
+                      <a:round/>
+                      <a:headEnd type="none" w="med" len="med"/>
+                      <a:tailEnd type="none" w="med" len="med"/>
+                    </a:lnR>
+                    <a:lnT w="12700" cap="flat" cmpd="sng" algn="ctr">
+                      <a:solidFill>
+                        <a:schemeClr val="bg1"/>
+                      </a:solidFill>
+                      <a:prstDash val="solid"/>
+                      <a:round/>
+                      <a:headEnd type="none" w="med" len="med"/>
+                      <a:tailEnd type="none" w="med" len="med"/>
+                    </a:lnT>
+                    <a:lnB w="12700" cap="flat" cmpd="sng" algn="ctr">
+                      <a:solidFill>
+                        <a:schemeClr val="bg1"/>
+                      </a:solidFill>
+                      <a:prstDash val="solid"/>
+                      <a:round/>
+                      <a:headEnd type="none" w="med" len="med"/>
+                      <a:tailEnd type="none" w="med" len="med"/>
+                    </a:lnB>
+                    <a:lnTlToBr>
+                      <a:noFill/>
+                    </a:lnTlToBr>
+                    <a:lnBlToTr>
+                      <a:noFill/>
+                    </a:lnBlToTr>
+                    <a:solidFill>
+                      <a:schemeClr val="accent1">
+                        <a:lumMod val="75000"/>
+                      </a:schemeClr>
+                    </a:solidFill>
+                  </a:tcPr>
+                </a:tc>
+                <a:tc>
+                  <a:txBody>
+                    <a:bodyPr/>
+                    <a:lstStyle/>
+                    <a:p>
+                      <a:pPr marL="0" marR="0" lvl="0" indent="0" algn="ctr" defTabSz="839788" rtl="0" eaLnBrk="0" fontAlgn="base" latinLnBrk="0" hangingPunct="0">
+                        <a:lnSpc>
+                          <a:spcPct val="111000"/>
+                        </a:lnSpc>
+                        <a:spcBef>
+                          <a:spcPct val="0"/>
+                        </a:spcBef>
+                        <a:spcAft>
+                          <a:spcPct val="0"/>
+                        </a:spcAft>
+                        <a:buClr>
+                          <a:srgbClr val="5D7298"/>
+                        </a:buClr>
+                        <a:buSzPct val="65000"/>
+                        <a:buFont typeface="Wingdings" pitchFamily="2" charset="2"/>
+                        <a:buNone/>
+                        <a:tabLst/>
+                      </a:pPr>
+                      <a:r>
+                        <a:rPr kumimoji="0" lang="en-US" sz="1300" b="1" i="0" u="none" strike="noStrike" cap="none" normalizeH="0" baseline="0" noProof="0" dirty="0">
+                          <a:ln>
+                            <a:noFill/>
+                          </a:ln>
+                          <a:solidFill>
+                            <a:schemeClr val="bg1"/>
+                          </a:solidFill>
+                          <a:effectLst/>
+                          <a:latin typeface="+mn-lt"/>
+                        </a:rPr>
+                        <a:t>Alternative 2</a:t>
+                      </a:r>
+                    </a:p>
+                  </a:txBody>
+                  <a:tcPr marL="121916" marR="121916" marT="60979" marB="60979" horzOverflow="overflow">
+                    <a:lnL w="12700" cap="flat" cmpd="sng" algn="ctr">
+                      <a:solidFill>
+                        <a:schemeClr val="bg1"/>
+                      </a:solidFill>
+                      <a:prstDash val="solid"/>
+                      <a:round/>
+                      <a:headEnd type="none" w="med" len="med"/>
+                      <a:tailEnd type="none" w="med" len="med"/>
+                    </a:lnL>
+                    <a:lnR w="12700" cap="flat" cmpd="sng" algn="ctr">
+                      <a:solidFill>
+                        <a:schemeClr val="bg1"/>
+                      </a:solidFill>
+                      <a:prstDash val="solid"/>
+                      <a:round/>
+                      <a:headEnd type="none" w="med" len="med"/>
+                      <a:tailEnd type="none" w="med" len="med"/>
+                    </a:lnR>
+                    <a:lnT w="12700" cap="flat" cmpd="sng" algn="ctr">
+                      <a:solidFill>
+                        <a:schemeClr val="bg1"/>
+                      </a:solidFill>
+                      <a:prstDash val="solid"/>
+                      <a:round/>
+                      <a:headEnd type="none" w="med" len="med"/>
+                      <a:tailEnd type="none" w="med" len="med"/>
+                    </a:lnT>
+                    <a:lnB w="12700" cap="flat" cmpd="sng" algn="ctr">
+                      <a:solidFill>
+                        <a:schemeClr val="bg1"/>
+                      </a:solidFill>
+                      <a:prstDash val="solid"/>
+                      <a:round/>
+                      <a:headEnd type="none" w="med" len="med"/>
+                      <a:tailEnd type="none" w="med" len="med"/>
+                    </a:lnB>
+                    <a:lnTlToBr>
+                      <a:noFill/>
+                    </a:lnTlToBr>
+                    <a:lnBlToTr>
+                      <a:noFill/>
+                    </a:lnBlToTr>
+                    <a:solidFill>
+                      <a:schemeClr val="accent1">
+                        <a:lumMod val="75000"/>
+                      </a:schemeClr>
+                    </a:solidFill>
+                  </a:tcPr>
+                </a:tc>
+                <a:tc>
+                  <a:txBody>
+                    <a:bodyPr/>
+                    <a:lstStyle/>
+                    <a:p>
+                      <a:pPr marL="0" marR="0" lvl="0" indent="0" algn="ctr" defTabSz="839788" rtl="0" eaLnBrk="0" fontAlgn="base" latinLnBrk="0" hangingPunct="0">
+                        <a:lnSpc>
+                          <a:spcPct val="111000"/>
+                        </a:lnSpc>
+                        <a:spcBef>
+                          <a:spcPct val="0"/>
+                        </a:spcBef>
+                        <a:spcAft>
+                          <a:spcPct val="0"/>
+                        </a:spcAft>
+                        <a:buClr>
+                          <a:srgbClr val="5D7298"/>
+                        </a:buClr>
+                        <a:buSzPct val="65000"/>
+                        <a:buFont typeface="Wingdings" pitchFamily="2" charset="2"/>
+                        <a:buNone/>
+                        <a:tabLst/>
+                      </a:pPr>
+                      <a:r>
+                        <a:rPr kumimoji="0" lang="en-US" sz="1300" b="1" i="0" u="none" strike="noStrike" cap="none" normalizeH="0" baseline="0" noProof="0" dirty="0">
+                          <a:ln>
+                            <a:noFill/>
+                          </a:ln>
+                          <a:solidFill>
+                            <a:schemeClr val="bg1"/>
+                          </a:solidFill>
+                          <a:effectLst/>
+                          <a:latin typeface="+mn-lt"/>
+                        </a:rPr>
+                        <a:t>Alternative 3 (Recommendation)</a:t>
+                      </a:r>
+                    </a:p>
+                  </a:txBody>
+                  <a:tcPr marL="121916" marR="121916" marT="60979" marB="60979" horzOverflow="overflow">
+                    <a:lnL w="12700" cap="flat" cmpd="sng" algn="ctr">
+                      <a:solidFill>
+                        <a:schemeClr val="bg1"/>
+                      </a:solidFill>
+                      <a:prstDash val="solid"/>
+                      <a:round/>
+                      <a:headEnd type="none" w="med" len="med"/>
+                      <a:tailEnd type="none" w="med" len="med"/>
+                    </a:lnL>
+                    <a:lnR w="12700" cap="flat" cmpd="sng" algn="ctr">
+                      <a:solidFill>
+                        <a:schemeClr val="bg1"/>
+                      </a:solidFill>
+                      <a:prstDash val="solid"/>
+                      <a:round/>
+                      <a:headEnd type="none" w="med" len="med"/>
+                      <a:tailEnd type="none" w="med" len="med"/>
+                    </a:lnR>
+                    <a:lnT w="12700" cap="flat" cmpd="sng" algn="ctr">
+                      <a:solidFill>
+                        <a:schemeClr val="bg1"/>
+                      </a:solidFill>
+                      <a:prstDash val="solid"/>
+                      <a:round/>
+                      <a:headEnd type="none" w="med" len="med"/>
+                      <a:tailEnd type="none" w="med" len="med"/>
+                    </a:lnT>
+                    <a:lnB w="12700" cap="flat" cmpd="sng" algn="ctr">
+                      <a:solidFill>
+                        <a:schemeClr val="bg1"/>
+                      </a:solidFill>
+                      <a:prstDash val="solid"/>
+                      <a:round/>
+                      <a:headEnd type="none" w="med" len="med"/>
+                      <a:tailEnd type="none" w="med" len="med"/>
+                    </a:lnB>
+                    <a:lnTlToBr>
+                      <a:noFill/>
+                    </a:lnTlToBr>
+                    <a:lnBlToTr>
+                      <a:noFill/>
+                    </a:lnBlToTr>
+                    <a:solidFill>
+                      <a:schemeClr val="accent6"/>
+                    </a:solidFill>
+                  </a:tcPr>
+                </a:tc>
+                <a:extLst>
+                  <a:ext uri="{0D108BD9-81ED-4DB2-BD59-A6C34878D82A}">
+                    <a16:rowId xmlns:a16="http://schemas.microsoft.com/office/drawing/2014/main" val="10000"/>
+                  </a:ext>
+                </a:extLst>
+              </a:tr>
+              <a:tr h="347639">
+                <a:tc>
+                  <a:txBody>
+                    <a:bodyPr/>
+                    <a:lstStyle/>
+                    <a:p>
+                      <a:pPr marL="0" marR="0" lvl="0" indent="0" algn="ctr" defTabSz="839788" rtl="0" eaLnBrk="0" fontAlgn="base" latinLnBrk="0" hangingPunct="0">
+                        <a:lnSpc>
+                          <a:spcPct val="111000"/>
+                        </a:lnSpc>
+                        <a:spcBef>
+                          <a:spcPct val="0"/>
+                        </a:spcBef>
+                        <a:spcAft>
+                          <a:spcPct val="0"/>
+                        </a:spcAft>
+                        <a:buClr>
+                          <a:srgbClr val="5D7298"/>
+                        </a:buClr>
+                        <a:buSzPct val="65000"/>
+                        <a:buFont typeface="Wingdings" pitchFamily="2" charset="2"/>
+                        <a:buNone/>
+                        <a:tabLst/>
+                      </a:pPr>
+                      <a:r>
+                        <a:rPr kumimoji="0" lang="en-US" sz="1300" b="1" i="0" u="none" strike="noStrike" cap="none" normalizeH="0" baseline="0" noProof="0" dirty="0">
+                          <a:ln>
+                            <a:noFill/>
+                          </a:ln>
+                          <a:solidFill>
+                            <a:schemeClr val="bg1"/>
+                          </a:solidFill>
+                          <a:effectLst/>
+                          <a:latin typeface="+mn-lt"/>
+                        </a:rPr>
+                        <a:t>Description</a:t>
+                      </a:r>
+                    </a:p>
+                  </a:txBody>
+                  <a:tcPr marL="119996" marR="119996" marT="62419" marB="62419" anchor="ctr" horzOverflow="overflow">
+                    <a:lnL w="12700" cap="flat" cmpd="sng" algn="ctr">
+                      <a:solidFill>
+                        <a:schemeClr val="bg1"/>
+                      </a:solidFill>
+                      <a:prstDash val="solid"/>
+                      <a:round/>
+                      <a:headEnd type="none" w="med" len="med"/>
+                      <a:tailEnd type="none" w="med" len="med"/>
+                    </a:lnL>
+                    <a:lnR w="12700" cap="flat" cmpd="sng" algn="ctr">
+                      <a:solidFill>
+                        <a:schemeClr val="bg1"/>
+                      </a:solidFill>
+                      <a:prstDash val="solid"/>
+                      <a:round/>
+                      <a:headEnd type="none" w="med" len="med"/>
+                      <a:tailEnd type="none" w="med" len="med"/>
+                    </a:lnR>
+                    <a:lnT w="12700" cap="flat" cmpd="sng" algn="ctr">
+                      <a:solidFill>
+                        <a:schemeClr val="bg1"/>
+                      </a:solidFill>
+                      <a:prstDash val="solid"/>
+                      <a:round/>
+                      <a:headEnd type="none" w="med" len="med"/>
+                      <a:tailEnd type="none" w="med" len="med"/>
+                    </a:lnT>
+                    <a:lnB w="12700" cap="flat" cmpd="sng" algn="ctr">
+                      <a:solidFill>
+                        <a:schemeClr val="bg1"/>
+                      </a:solidFill>
+                      <a:prstDash val="solid"/>
+                      <a:round/>
+                      <a:headEnd type="none" w="med" len="med"/>
+                      <a:tailEnd type="none" w="med" len="med"/>
+                    </a:lnB>
+                    <a:lnTlToBr>
+                      <a:noFill/>
+                    </a:lnTlToBr>
+                    <a:lnBlToTr>
+                      <a:noFill/>
+                    </a:lnBlToTr>
+                    <a:solidFill>
+                      <a:schemeClr val="accent1">
+                        <a:lumMod val="75000"/>
+                      </a:schemeClr>
+                    </a:solidFill>
+                  </a:tcPr>
+                </a:tc>
+                <a:tc>
+                  <a:txBody>
+                    <a:bodyPr/>
+                    <a:lstStyle/>
+                    <a:p>
+                      <a:pPr marL="0" marR="0" lvl="0" indent="0" algn="ctr" defTabSz="839788" rtl="0" eaLnBrk="0" fontAlgn="base" latinLnBrk="0" hangingPunct="0">
+                        <a:lnSpc>
+                          <a:spcPct val="100000"/>
+                        </a:lnSpc>
+                        <a:spcBef>
+                          <a:spcPct val="0"/>
+                        </a:spcBef>
+                        <a:spcAft>
+                          <a:spcPct val="0"/>
+                        </a:spcAft>
+                        <a:buClrTx/>
+                        <a:buSzTx/>
+                        <a:buFontTx/>
+                        <a:buNone/>
+                        <a:tabLst/>
+                      </a:pPr>
+                      <a:r>
+                        <a:rPr kumimoji="0" lang="en-US" sz="1300" b="0" i="0" u="sng" strike="noStrike" cap="none" normalizeH="0" baseline="0" noProof="0" dirty="0">
+                          <a:ln>
+                            <a:noFill/>
+                          </a:ln>
+                          <a:solidFill>
+                            <a:srgbClr val="000000"/>
+                          </a:solidFill>
+                          <a:effectLst/>
+                          <a:latin typeface="+mn-lt"/>
+                        </a:rPr>
+                        <a:t>Separate material numbers per plant</a:t>
+                      </a:r>
+                    </a:p>
+                  </a:txBody>
+                  <a:tcPr marL="119996" marR="119996" marT="62419" marB="62419" anchor="ctr" horzOverflow="overflow">
+                    <a:lnL w="12700" cap="flat" cmpd="sng" algn="ctr">
+                      <a:solidFill>
+                        <a:schemeClr val="bg1"/>
+                      </a:solidFill>
+                      <a:prstDash val="solid"/>
+                      <a:round/>
+                      <a:headEnd type="none" w="med" len="med"/>
+                      <a:tailEnd type="none" w="med" len="med"/>
+                    </a:lnL>
+                    <a:lnR w="12700" cap="flat" cmpd="sng" algn="ctr">
+                      <a:solidFill>
+                        <a:schemeClr val="bg1"/>
+                      </a:solidFill>
+                      <a:prstDash val="solid"/>
+                      <a:round/>
+                      <a:headEnd type="none" w="med" len="med"/>
+                      <a:tailEnd type="none" w="med" len="med"/>
+                    </a:lnR>
+                    <a:lnT w="12700" cap="flat" cmpd="sng" algn="ctr">
+                      <a:solidFill>
+                        <a:schemeClr val="bg1"/>
+                      </a:solidFill>
+                      <a:prstDash val="solid"/>
+                      <a:round/>
+                      <a:headEnd type="none" w="med" len="med"/>
+                      <a:tailEnd type="none" w="med" len="med"/>
+                    </a:lnT>
+                    <a:lnB w="12700" cap="flat" cmpd="sng" algn="ctr">
+                      <a:solidFill>
+                        <a:schemeClr val="bg1"/>
+                      </a:solidFill>
+                      <a:prstDash val="solid"/>
+                      <a:round/>
+                      <a:headEnd type="none" w="med" len="med"/>
+                      <a:tailEnd type="none" w="med" len="med"/>
+                    </a:lnB>
+                    <a:lnTlToBr>
+                      <a:noFill/>
+                    </a:lnTlToBr>
+                    <a:lnBlToTr>
+                      <a:noFill/>
+                    </a:lnBlToTr>
+                    <a:solidFill>
+                      <a:srgbClr val="C7CFDC"/>
+                    </a:solidFill>
+                  </a:tcPr>
+                </a:tc>
+                <a:tc>
+                  <a:txBody>
+                    <a:bodyPr/>
+                    <a:lstStyle/>
+                    <a:p>
+                      <a:pPr marL="0" marR="0" lvl="0" indent="0" algn="ctr" defTabSz="839788" rtl="0" eaLnBrk="0" fontAlgn="base" latinLnBrk="0" hangingPunct="0">
+                        <a:lnSpc>
+                          <a:spcPct val="100000"/>
+                        </a:lnSpc>
+                        <a:spcBef>
+                          <a:spcPct val="0"/>
+                        </a:spcBef>
+                        <a:spcAft>
+                          <a:spcPct val="0"/>
+                        </a:spcAft>
+                        <a:buClrTx/>
+                        <a:buSzTx/>
+                        <a:buFontTx/>
+                        <a:buNone/>
+                        <a:tabLst/>
+                      </a:pPr>
+                      <a:r>
+                        <a:rPr kumimoji="0" lang="en-US" sz="1300" b="0" i="0" u="sng" strike="noStrike" cap="none" normalizeH="0" baseline="0" noProof="0">
+                          <a:ln>
+                            <a:noFill/>
+                          </a:ln>
+                          <a:solidFill>
+                            <a:srgbClr val="000000"/>
+                          </a:solidFill>
+                          <a:effectLst/>
+                          <a:latin typeface="+mn-lt"/>
+                        </a:rPr>
+                        <a:t>Uniform FERT valuation in both plants</a:t>
+                      </a:r>
+                      <a:endParaRPr kumimoji="0" lang="en-US" sz="1300" b="0" i="0" u="sng" strike="noStrike" cap="none" normalizeH="0" baseline="0" noProof="0" dirty="0">
+                        <a:ln>
+                          <a:noFill/>
+                        </a:ln>
+                        <a:solidFill>
+                          <a:srgbClr val="000000"/>
+                        </a:solidFill>
+                        <a:effectLst/>
+                        <a:latin typeface="+mn-lt"/>
+                      </a:endParaRPr>
+                    </a:p>
+                  </a:txBody>
+                  <a:tcPr marL="119996" marR="119996" marT="62419" marB="62419" anchor="ctr" horzOverflow="overflow">
+                    <a:lnL w="12700" cap="flat" cmpd="sng" algn="ctr">
+                      <a:solidFill>
+                        <a:schemeClr val="bg1"/>
+                      </a:solidFill>
+                      <a:prstDash val="solid"/>
+                      <a:round/>
+                      <a:headEnd type="none" w="med" len="med"/>
+                      <a:tailEnd type="none" w="med" len="med"/>
+                    </a:lnL>
+                    <a:lnR w="12700" cap="flat" cmpd="sng" algn="ctr">
+                      <a:solidFill>
+                        <a:schemeClr val="bg1"/>
+                      </a:solidFill>
+                      <a:prstDash val="solid"/>
+                      <a:round/>
+                      <a:headEnd type="none" w="med" len="med"/>
+                      <a:tailEnd type="none" w="med" len="med"/>
+                    </a:lnR>
+                    <a:lnT w="12700" cap="flat" cmpd="sng" algn="ctr">
+                      <a:solidFill>
+                        <a:schemeClr val="bg1"/>
+                      </a:solidFill>
+                      <a:prstDash val="solid"/>
+                      <a:round/>
+                      <a:headEnd type="none" w="med" len="med"/>
+                      <a:tailEnd type="none" w="med" len="med"/>
+                    </a:lnT>
+                    <a:lnB w="12700" cap="flat" cmpd="sng" algn="ctr">
+                      <a:solidFill>
+                        <a:schemeClr val="bg1"/>
+                      </a:solidFill>
+                      <a:prstDash val="solid"/>
+                      <a:round/>
+                      <a:headEnd type="none" w="med" len="med"/>
+                      <a:tailEnd type="none" w="med" len="med"/>
+                    </a:lnB>
+                    <a:lnTlToBr>
+                      <a:noFill/>
+                    </a:lnTlToBr>
+                    <a:lnBlToTr>
+                      <a:noFill/>
+                    </a:lnBlToTr>
+                    <a:solidFill>
+                      <a:srgbClr val="C7CFDC"/>
+                    </a:solidFill>
+                  </a:tcPr>
+                </a:tc>
+                <a:tc>
+                  <a:txBody>
+                    <a:bodyPr/>
+                    <a:lstStyle/>
+                    <a:p>
+                      <a:pPr marL="0" marR="0" lvl="0" indent="0" algn="ctr" defTabSz="839788" rtl="0" eaLnBrk="0" fontAlgn="base" latinLnBrk="0" hangingPunct="0">
+                        <a:lnSpc>
+                          <a:spcPct val="100000"/>
+                        </a:lnSpc>
+                        <a:spcBef>
+                          <a:spcPct val="0"/>
+                        </a:spcBef>
+                        <a:spcAft>
+                          <a:spcPct val="0"/>
+                        </a:spcAft>
+                        <a:buClrTx/>
+                        <a:buSzTx/>
+                        <a:buFontTx/>
+                        <a:buNone/>
+                        <a:tabLst/>
+                      </a:pPr>
+                      <a:r>
+                        <a:rPr kumimoji="0" lang="en-US" sz="1300" b="0" i="0" u="sng" strike="noStrike" cap="none" normalizeH="0" baseline="0" noProof="0">
+                          <a:ln>
+                            <a:noFill/>
+                          </a:ln>
+                          <a:solidFill>
+                            <a:srgbClr val="000000"/>
+                          </a:solidFill>
+                          <a:effectLst/>
+                          <a:latin typeface="+mn-lt"/>
+                        </a:rPr>
+                        <a:t>Custom valuation class for Plant FIN</a:t>
+                      </a:r>
+                      <a:endParaRPr kumimoji="0" lang="en-US" sz="1300" b="0" i="0" u="sng" strike="noStrike" cap="none" normalizeH="0" baseline="0" noProof="0" dirty="0">
+                        <a:ln>
+                          <a:noFill/>
+                        </a:ln>
+                        <a:solidFill>
+                          <a:srgbClr val="000000"/>
+                        </a:solidFill>
+                        <a:effectLst/>
+                        <a:latin typeface="+mn-lt"/>
+                      </a:endParaRPr>
+                    </a:p>
+                  </a:txBody>
+                  <a:tcPr marL="119996" marR="119996" marT="62419" marB="62419" anchor="ctr" horzOverflow="overflow">
+                    <a:lnL w="12700" cap="flat" cmpd="sng" algn="ctr">
+                      <a:solidFill>
+                        <a:schemeClr val="bg1"/>
+                      </a:solidFill>
+                      <a:prstDash val="solid"/>
+                      <a:round/>
+                      <a:headEnd type="none" w="med" len="med"/>
+                      <a:tailEnd type="none" w="med" len="med"/>
+                    </a:lnL>
+                    <a:lnR w="12700" cap="flat" cmpd="sng" algn="ctr">
+                      <a:solidFill>
+                        <a:schemeClr val="bg1"/>
+                      </a:solidFill>
+                      <a:prstDash val="solid"/>
+                      <a:round/>
+                      <a:headEnd type="none" w="med" len="med"/>
+                      <a:tailEnd type="none" w="med" len="med"/>
+                    </a:lnR>
+                    <a:lnT w="12700" cap="flat" cmpd="sng" algn="ctr">
+                      <a:solidFill>
+                        <a:schemeClr val="bg1"/>
+                      </a:solidFill>
+                      <a:prstDash val="solid"/>
+                      <a:round/>
+                      <a:headEnd type="none" w="med" len="med"/>
+                      <a:tailEnd type="none" w="med" len="med"/>
+                    </a:lnT>
+                    <a:lnB w="12700" cap="flat" cmpd="sng" algn="ctr">
+                      <a:solidFill>
+                        <a:schemeClr val="bg1"/>
+                      </a:solidFill>
+                      <a:prstDash val="solid"/>
+                      <a:round/>
+                      <a:headEnd type="none" w="med" len="med"/>
+                      <a:tailEnd type="none" w="med" len="med"/>
+                    </a:lnB>
+                    <a:lnTlToBr>
+                      <a:noFill/>
+                    </a:lnTlToBr>
+                    <a:lnBlToTr>
+                      <a:noFill/>
+                    </a:lnBlToTr>
+                    <a:solidFill>
+                      <a:srgbClr val="C7CFDC"/>
+                    </a:solidFill>
+                  </a:tcPr>
+                </a:tc>
+                <a:extLst>
+                  <a:ext uri="{0D108BD9-81ED-4DB2-BD59-A6C34878D82A}">
+                    <a16:rowId xmlns:a16="http://schemas.microsoft.com/office/drawing/2014/main" val="10001"/>
+                  </a:ext>
+                </a:extLst>
+              </a:tr>
+              <a:tr h="1500000">
+                <a:tc>
+                  <a:txBody>
+                    <a:bodyPr/>
+                    <a:lstStyle/>
+                    <a:p>
+                      <a:pPr marL="0" marR="0" lvl="0" indent="0" algn="ctr" defTabSz="839788" rtl="0" eaLnBrk="0" fontAlgn="base" latinLnBrk="0" hangingPunct="0">
+                        <a:lnSpc>
+                          <a:spcPct val="111000"/>
+                        </a:lnSpc>
+                        <a:spcBef>
+                          <a:spcPct val="0"/>
+                        </a:spcBef>
+                        <a:spcAft>
+                          <a:spcPct val="0"/>
+                        </a:spcAft>
+                        <a:buClr>
+                          <a:srgbClr val="5D7298"/>
+                        </a:buClr>
+                        <a:buSzPct val="65000"/>
+                        <a:buFont typeface="Wingdings" pitchFamily="2" charset="2"/>
+                        <a:buNone/>
+                        <a:tabLst/>
+                      </a:pPr>
+                      <a:r>
+                        <a:rPr kumimoji="0" lang="en-US" sz="1300" b="1" i="0" u="none" strike="noStrike" cap="none" normalizeH="0" baseline="0" noProof="0" dirty="0">
+                          <a:ln>
+                            <a:noFill/>
+                          </a:ln>
+                          <a:solidFill>
+                            <a:schemeClr val="bg1"/>
+                          </a:solidFill>
+                          <a:effectLst/>
+                          <a:latin typeface="+mn-lt"/>
+                        </a:rPr>
+                        <a:t>PRO</a:t>
+                      </a:r>
+                    </a:p>
+                  </a:txBody>
+                  <a:tcPr marL="119996" marR="119996" marT="62419" marB="62419" anchor="ctr" horzOverflow="overflow">
+                    <a:lnL w="12700" cap="flat" cmpd="sng" algn="ctr">
+                      <a:solidFill>
+                        <a:schemeClr val="bg1"/>
+                      </a:solidFill>
+                      <a:prstDash val="solid"/>
+                      <a:round/>
+                      <a:headEnd type="none" w="med" len="med"/>
+                      <a:tailEnd type="none" w="med" len="med"/>
+                    </a:lnL>
+                    <a:lnR w="12700" cap="flat" cmpd="sng" algn="ctr">
+                      <a:solidFill>
+                        <a:schemeClr val="bg1"/>
+                      </a:solidFill>
+                      <a:prstDash val="solid"/>
+                      <a:round/>
+                      <a:headEnd type="none" w="med" len="med"/>
+                      <a:tailEnd type="none" w="med" len="med"/>
+                    </a:lnR>
+                    <a:lnT w="12700" cap="flat" cmpd="sng" algn="ctr">
+                      <a:solidFill>
+                        <a:schemeClr val="bg1"/>
+                      </a:solidFill>
+                      <a:prstDash val="solid"/>
+                      <a:round/>
+                      <a:headEnd type="none" w="med" len="med"/>
+                      <a:tailEnd type="none" w="med" len="med"/>
+                    </a:lnT>
+                    <a:lnB w="12700" cap="flat" cmpd="sng" algn="ctr">
+                      <a:solidFill>
+                        <a:schemeClr val="bg1"/>
+                      </a:solidFill>
+                      <a:prstDash val="solid"/>
+                      <a:round/>
+                      <a:headEnd type="none" w="med" len="med"/>
+                      <a:tailEnd type="none" w="med" len="med"/>
+                    </a:lnB>
+                    <a:lnTlToBr>
+                      <a:noFill/>
+                    </a:lnTlToBr>
+                    <a:lnBlToTr>
+                      <a:noFill/>
+                    </a:lnBlToTr>
+                    <a:solidFill>
+                      <a:schemeClr val="accent1">
+                        <a:lumMod val="75000"/>
+                      </a:schemeClr>
+                    </a:solidFill>
+                  </a:tcPr>
+                </a:tc>
+                <a:tc>
+                  <a:txBody>
+                    <a:bodyPr/>
+                    <a:lstStyle/>
+                    <a:p>
+                      <a:pPr marL="171450" marR="0" lvl="0" indent="-171450" algn="l" defTabSz="839788" rtl="0" eaLnBrk="0" fontAlgn="base" latinLnBrk="0" hangingPunct="0">
+                        <a:lnSpc>
+                          <a:spcPct val="100000"/>
+                        </a:lnSpc>
+                        <a:spcBef>
+                          <a:spcPct val="0"/>
+                        </a:spcBef>
+                        <a:spcAft>
+                          <a:spcPct val="0"/>
+                        </a:spcAft>
+                        <a:buClr>
+                          <a:schemeClr val="tx1"/>
+                        </a:buClr>
+                        <a:buSzTx/>
+                        <a:buFont typeface="Arial" pitchFamily="34" charset="0"/>
+                        <a:buChar char="•"/>
+                        <a:tabLst/>
+                      </a:pPr>
+                      <a:r>
+                        <a:rPr kumimoji="0" lang="en-US" sz="1300" b="0" i="0" u="none" strike="noStrike" cap="none" normalizeH="0" baseline="0" noProof="0">
+                          <a:ln>
+                            <a:noFill/>
+                          </a:ln>
+                          <a:solidFill>
+                            <a:srgbClr val="000000"/>
+                          </a:solidFill>
+                          <a:effectLst/>
+                          <a:latin typeface="+mn-lt"/>
+                        </a:rPr>
+                        <a:t>SAP standard material types and valuation classes, no additional configuration</a:t>
+                      </a:r>
+                    </a:p>
+                    <a:p>
+                      <a:pPr marL="171450" marR="0" lvl="0" indent="-171450" algn="l" defTabSz="839788" rtl="0" eaLnBrk="0" fontAlgn="base" latinLnBrk="0" hangingPunct="0">
+                        <a:lnSpc>
+                          <a:spcPct val="100000"/>
+                        </a:lnSpc>
+                        <a:spcBef>
+                          <a:spcPct val="0"/>
+                        </a:spcBef>
+                        <a:spcAft>
+                          <a:spcPct val="0"/>
+                        </a:spcAft>
+                        <a:buClr>
+                          <a:schemeClr val="tx1"/>
+                        </a:buClr>
+                        <a:buSzTx/>
+                        <a:buFont typeface="Arial" pitchFamily="34" charset="0"/>
+                        <a:buChar char="•"/>
+                        <a:tabLst/>
+                      </a:pPr>
+                      <a:r>
+                        <a:rPr kumimoji="0" lang="en-US" sz="1300" b="0" i="0" u="none" strike="noStrike" cap="none" normalizeH="0" baseline="0" noProof="0">
+                          <a:ln>
+                            <a:noFill/>
+                          </a:ln>
+                          <a:solidFill>
+                            <a:srgbClr val="000000"/>
+                          </a:solidFill>
+                          <a:effectLst/>
+                          <a:latin typeface="+mn-lt"/>
+                        </a:rPr>
+                        <a:t>Correct stock and P&amp;L accounts in both plants via standard account determination</a:t>
+                      </a:r>
+                    </a:p>
+                  </a:txBody>
+                  <a:tcPr marL="121916" marR="121916" marT="60979" marB="60979" horzOverflow="overflow">
+                    <a:lnL w="12700" cap="flat" cmpd="sng" algn="ctr">
+                      <a:solidFill>
+                        <a:schemeClr val="bg1"/>
+                      </a:solidFill>
+                      <a:prstDash val="solid"/>
+                      <a:round/>
+                      <a:headEnd type="none" w="med" len="med"/>
+                      <a:tailEnd type="none" w="med" len="med"/>
+                    </a:lnL>
+                    <a:lnR w="12700" cap="flat" cmpd="sng" algn="ctr">
+                      <a:solidFill>
+                        <a:schemeClr val="bg1"/>
+                      </a:solidFill>
+                      <a:prstDash val="solid"/>
+                      <a:round/>
+                      <a:headEnd type="none" w="med" len="med"/>
+                      <a:tailEnd type="none" w="med" len="med"/>
+                    </a:lnR>
+                    <a:lnT w="12700" cap="flat" cmpd="sng" algn="ctr">
+                      <a:solidFill>
+                        <a:schemeClr val="bg1"/>
+                      </a:solidFill>
+                      <a:prstDash val="solid"/>
+                      <a:round/>
+                      <a:headEnd type="none" w="med" len="med"/>
+                      <a:tailEnd type="none" w="med" len="med"/>
+                    </a:lnT>
+                    <a:lnB w="12700" cap="flat" cmpd="sng" algn="ctr">
+                      <a:solidFill>
+                        <a:schemeClr val="bg1"/>
+                      </a:solidFill>
+                      <a:prstDash val="solid"/>
+                      <a:round/>
+                      <a:headEnd type="none" w="med" len="med"/>
+                      <a:tailEnd type="none" w="med" len="med"/>
+                    </a:lnB>
+                    <a:lnTlToBr>
+                      <a:noFill/>
+                    </a:lnTlToBr>
+                    <a:lnBlToTr>
+                      <a:noFill/>
+                    </a:lnBlToTr>
+                    <a:solidFill>
+                      <a:srgbClr val="C7CFDC"/>
+                    </a:solidFill>
+                  </a:tcPr>
+                </a:tc>
+                <a:tc>
+                  <a:txBody>
+                    <a:bodyPr/>
+                    <a:lstStyle/>
+                    <a:p>
+                      <a:pPr marL="171450" marR="0" lvl="0" indent="-171450" algn="l" defTabSz="839788" rtl="0" eaLnBrk="0" fontAlgn="base" latinLnBrk="0" hangingPunct="0">
+                        <a:lnSpc>
+                          <a:spcPct val="100000"/>
+                        </a:lnSpc>
+                        <a:spcBef>
+                          <a:spcPct val="0"/>
+                        </a:spcBef>
+                        <a:spcAft>
+                          <a:spcPct val="0"/>
+                        </a:spcAft>
+                        <a:buClr>
+                          <a:schemeClr val="tx1"/>
+                        </a:buClr>
+                        <a:buSzTx/>
+                        <a:buFont typeface="Arial" pitchFamily="34" charset="0"/>
+                        <a:buChar char="•"/>
+                        <a:tabLst/>
+                      </a:pPr>
+                      <a:r>
+                        <a:rPr kumimoji="0" lang="en-US" sz="1300" b="0" i="0" u="none" strike="noStrike" cap="none" normalizeH="0" baseline="0" noProof="0">
+                          <a:ln>
+                            <a:noFill/>
+                          </a:ln>
+                          <a:solidFill>
+                            <a:srgbClr val="000000"/>
+                          </a:solidFill>
+                          <a:effectLst/>
+                          <a:latin typeface="+mn-lt"/>
+                        </a:rPr>
+                        <a:t>One material number and one valuation class, no additional configuration</a:t>
+                      </a:r>
+                    </a:p>
+                    <a:p>
+                      <a:pPr marL="171450" marR="0" lvl="0" indent="-171450" algn="l" defTabSz="839788" rtl="0" eaLnBrk="0" fontAlgn="base" latinLnBrk="0" hangingPunct="0">
+                        <a:lnSpc>
+                          <a:spcPct val="100000"/>
+                        </a:lnSpc>
+                        <a:spcBef>
+                          <a:spcPct val="0"/>
+                        </a:spcBef>
+                        <a:spcAft>
+                          <a:spcPct val="0"/>
+                        </a:spcAft>
+                        <a:buClr>
+                          <a:schemeClr val="tx1"/>
+                        </a:buClr>
+                        <a:buSzTx/>
+                        <a:buFont typeface="Arial" pitchFamily="34" charset="0"/>
+                        <a:buChar char="•"/>
+                        <a:tabLst/>
+                      </a:pPr>
+                      <a:r>
+                        <a:rPr kumimoji="0" lang="en-US" sz="1300" b="0" i="0" u="none" strike="noStrike" cap="none" normalizeH="0" baseline="0" noProof="0">
+                          <a:ln>
+                            <a:noFill/>
+                          </a:ln>
+                          <a:solidFill>
+                            <a:srgbClr val="000000"/>
+                          </a:solidFill>
+                          <a:effectLst/>
+                          <a:latin typeface="+mn-lt"/>
+                        </a:rPr>
+                        <a:t>Lowest implementation effort, simplest master data maintenance</a:t>
+                      </a:r>
+                    </a:p>
+                  </a:txBody>
+                  <a:tcPr marL="121916" marR="121916" marT="60979" marB="60979" horzOverflow="overflow">
+                    <a:lnL w="12700" cap="flat" cmpd="sng" algn="ctr">
+                      <a:solidFill>
+                        <a:schemeClr val="bg1"/>
+                      </a:solidFill>
+                      <a:prstDash val="solid"/>
+                      <a:round/>
+                      <a:headEnd type="none" w="med" len="med"/>
+                      <a:tailEnd type="none" w="med" len="med"/>
+                    </a:lnL>
+                    <a:lnR w="12700" cap="flat" cmpd="sng" algn="ctr">
+                      <a:solidFill>
+                        <a:schemeClr val="bg1"/>
+                      </a:solidFill>
+                      <a:prstDash val="solid"/>
+                      <a:round/>
+                      <a:headEnd type="none" w="med" len="med"/>
+                      <a:tailEnd type="none" w="med" len="med"/>
+                    </a:lnR>
+                    <a:lnT w="12700" cap="flat" cmpd="sng" algn="ctr">
+                      <a:solidFill>
+                        <a:schemeClr val="bg1"/>
+                      </a:solidFill>
+                      <a:prstDash val="solid"/>
+                      <a:round/>
+                      <a:headEnd type="none" w="med" len="med"/>
+                      <a:tailEnd type="none" w="med" len="med"/>
+                    </a:lnT>
+                    <a:lnB w="12700" cap="flat" cmpd="sng" algn="ctr">
+                      <a:solidFill>
+                        <a:schemeClr val="bg1"/>
+                      </a:solidFill>
+                      <a:prstDash val="solid"/>
+                      <a:round/>
+                      <a:headEnd type="none" w="med" len="med"/>
+                      <a:tailEnd type="none" w="med" len="med"/>
+                    </a:lnB>
+                    <a:lnTlToBr>
+                      <a:noFill/>
+                    </a:lnTlToBr>
+                    <a:lnBlToTr>
+                      <a:noFill/>
+                    </a:lnBlToTr>
+                    <a:solidFill>
+                      <a:srgbClr val="C7CFDC"/>
+                    </a:solidFill>
+                  </a:tcPr>
+                </a:tc>
+                <a:tc>
+                  <a:txBody>
+                    <a:bodyPr/>
+                    <a:lstStyle/>
+                    <a:p>
+                      <a:pPr marL="171450" marR="0" lvl="0" indent="-171450" algn="l" defTabSz="839788" rtl="0" eaLnBrk="0" fontAlgn="base" latinLnBrk="0" hangingPunct="0">
+                        <a:lnSpc>
+                          <a:spcPct val="100000"/>
+                        </a:lnSpc>
+                        <a:spcBef>
+                          <a:spcPct val="0"/>
+                        </a:spcBef>
+                        <a:spcAft>
+                          <a:spcPct val="0"/>
+                        </a:spcAft>
+                        <a:buClr>
+                          <a:schemeClr val="tx1"/>
+                        </a:buClr>
+                        <a:buSzTx/>
+                        <a:buFont typeface="Arial" pitchFamily="34" charset="0"/>
+                        <a:buChar char="•"/>
+                        <a:tabLst/>
+                      </a:pPr>
+                      <a:r>
+                        <a:rPr kumimoji="0" lang="en-US" sz="1300" b="0" i="0" u="none" strike="noStrike" cap="none" normalizeH="0" baseline="0" noProof="0">
+                          <a:ln>
+                            <a:noFill/>
+                          </a:ln>
+                          <a:solidFill>
+                            <a:srgbClr val="000000"/>
+                          </a:solidFill>
+                          <a:effectLst/>
+                          <a:latin typeface="+mn-lt"/>
+                        </a:rPr>
+                        <a:t>One material number and material type across all company codes</a:t>
+                      </a:r>
+                    </a:p>
+                    <a:p>
+                      <a:pPr marL="171450" marR="0" lvl="0" indent="-171450" algn="l" defTabSz="839788" rtl="0" eaLnBrk="0" fontAlgn="base" latinLnBrk="0" hangingPunct="0">
+                        <a:lnSpc>
+                          <a:spcPct val="100000"/>
+                        </a:lnSpc>
+                        <a:spcBef>
+                          <a:spcPct val="0"/>
+                        </a:spcBef>
+                        <a:spcAft>
+                          <a:spcPct val="0"/>
+                        </a:spcAft>
+                        <a:buClr>
+                          <a:schemeClr val="tx1"/>
+                        </a:buClr>
+                        <a:buSzTx/>
+                        <a:buFont typeface="Arial" pitchFamily="34" charset="0"/>
+                        <a:buChar char="•"/>
+                        <a:tabLst/>
+                      </a:pPr>
+                      <a:r>
+                        <a:rPr kumimoji="0" lang="en-US" sz="1300" b="0" i="0" u="none" strike="noStrike" cap="none" normalizeH="0" baseline="0" noProof="0">
+                          <a:ln>
+                            <a:noFill/>
+                          </a:ln>
+                          <a:solidFill>
+                            <a:srgbClr val="000000"/>
+                          </a:solidFill>
+                          <a:effectLst/>
+                          <a:latin typeface="+mn-lt"/>
+                        </a:rPr>
+                        <a:t>Plant-specific valuation via valuation class in the material master (SAP standard)</a:t>
+                      </a:r>
+                    </a:p>
+                    <a:p>
+                      <a:pPr marL="171450" marR="0" lvl="0" indent="-171450" algn="l" defTabSz="839788" rtl="0" eaLnBrk="0" fontAlgn="base" latinLnBrk="0" hangingPunct="0">
+                        <a:lnSpc>
+                          <a:spcPct val="100000"/>
+                        </a:lnSpc>
+                        <a:spcBef>
+                          <a:spcPct val="0"/>
+                        </a:spcBef>
+                        <a:spcAft>
+                          <a:spcPct val="0"/>
+                        </a:spcAft>
+                        <a:buClr>
+                          <a:schemeClr val="tx1"/>
+                        </a:buClr>
+                        <a:buSzTx/>
+                        <a:buFont typeface="Arial" pitchFamily="34" charset="0"/>
+                        <a:buChar char="•"/>
+                        <a:tabLst/>
+                      </a:pPr>
+                      <a:r>
+                        <a:rPr kumimoji="0" lang="en-US" sz="1300" b="0" i="0" u="none" strike="noStrike" cap="none" normalizeH="0" baseline="0" noProof="0">
+                          <a:ln>
+                            <a:noFill/>
+                          </a:ln>
+                          <a:solidFill>
+                            <a:srgbClr val="000000"/>
+                          </a:solidFill>
+                          <a:effectLst/>
+                          <a:latin typeface="+mn-lt"/>
+                        </a:rPr>
+                        <a:t>Correct accounts: finished goods in Plant GER, trading goods in Plant FIN</a:t>
+                      </a:r>
+                    </a:p>
+                  </a:txBody>
+                  <a:tcPr marL="121916" marR="121916" marT="60979" marB="60979" horzOverflow="overflow">
+                    <a:lnL w="12700" cap="flat" cmpd="sng" algn="ctr">
+                      <a:solidFill>
+                        <a:schemeClr val="bg1"/>
+                      </a:solidFill>
+                      <a:prstDash val="solid"/>
+                      <a:round/>
+                      <a:headEnd type="none" w="med" len="med"/>
+                      <a:tailEnd type="none" w="med" len="med"/>
+                    </a:lnL>
+                    <a:lnR w="12700" cap="flat" cmpd="sng" algn="ctr">
+                      <a:solidFill>
+                        <a:schemeClr val="bg1"/>
+                      </a:solidFill>
+                      <a:prstDash val="solid"/>
+                      <a:round/>
+                      <a:headEnd type="none" w="med" len="med"/>
+                      <a:tailEnd type="none" w="med" len="med"/>
+                    </a:lnR>
+                    <a:lnT w="12700" cap="flat" cmpd="sng" algn="ctr">
+                      <a:solidFill>
+                        <a:schemeClr val="bg1"/>
+                      </a:solidFill>
+                      <a:prstDash val="solid"/>
+                      <a:round/>
+                      <a:headEnd type="none" w="med" len="med"/>
+                      <a:tailEnd type="none" w="med" len="med"/>
+                    </a:lnT>
+                    <a:lnB w="12700" cap="flat" cmpd="sng" algn="ctr">
+                      <a:solidFill>
+                        <a:schemeClr val="bg1"/>
+                      </a:solidFill>
+                      <a:prstDash val="solid"/>
+                      <a:round/>
+                      <a:headEnd type="none" w="med" len="med"/>
+                      <a:tailEnd type="none" w="med" len="med"/>
+                    </a:lnB>
+                    <a:lnTlToBr>
+                      <a:noFill/>
+                    </a:lnTlToBr>
+                    <a:lnBlToTr>
+                      <a:noFill/>
+                    </a:lnBlToTr>
+                    <a:solidFill>
+                      <a:srgbClr val="C7CFDC"/>
+                    </a:solidFill>
+                  </a:tcPr>
+                </a:tc>
+                <a:extLst>
+                  <a:ext uri="{0D108BD9-81ED-4DB2-BD59-A6C34878D82A}">
+                    <a16:rowId xmlns:a16="http://schemas.microsoft.com/office/drawing/2014/main" val="10002"/>
+                  </a:ext>
+                </a:extLst>
+              </a:tr>
+              <a:tr h="1500000">
+                <a:tc>
+                  <a:txBody>
+                    <a:bodyPr/>
+                    <a:lstStyle/>
+                    <a:p>
+                      <a:pPr marL="0" marR="0" lvl="0" indent="0" algn="ctr" defTabSz="839788" rtl="0" eaLnBrk="0" fontAlgn="base" latinLnBrk="0" hangingPunct="0">
+                        <a:lnSpc>
+                          <a:spcPct val="111000"/>
+                        </a:lnSpc>
+                        <a:spcBef>
+                          <a:spcPct val="0"/>
+                        </a:spcBef>
+                        <a:spcAft>
+                          <a:spcPct val="0"/>
+                        </a:spcAft>
+                        <a:buClr>
+                          <a:srgbClr val="5D7298"/>
+                        </a:buClr>
+                        <a:buSzPct val="65000"/>
+                        <a:buFont typeface="Wingdings" pitchFamily="2" charset="2"/>
+                        <a:buNone/>
+                        <a:tabLst/>
+                      </a:pPr>
+                      <a:r>
+                        <a:rPr kumimoji="0" lang="en-US" sz="1300" b="1" i="0" u="none" strike="noStrike" cap="none" normalizeH="0" baseline="0" noProof="0" dirty="0">
+                          <a:ln>
+                            <a:noFill/>
+                          </a:ln>
+                          <a:solidFill>
+                            <a:schemeClr val="bg1"/>
+                          </a:solidFill>
+                          <a:effectLst/>
+                          <a:latin typeface="+mn-lt"/>
+                        </a:rPr>
+                        <a:t>CON</a:t>
+                      </a:r>
+                    </a:p>
+                  </a:txBody>
+                  <a:tcPr marL="119996" marR="119996" marT="62419" marB="62419" anchor="ctr" horzOverflow="overflow">
+                    <a:lnL w="12700" cap="flat" cmpd="sng" algn="ctr">
+                      <a:solidFill>
+                        <a:schemeClr val="bg1"/>
+                      </a:solidFill>
+                      <a:prstDash val="solid"/>
+                      <a:round/>
+                      <a:headEnd type="none" w="med" len="med"/>
+                      <a:tailEnd type="none" w="med" len="med"/>
+                    </a:lnL>
+                    <a:lnR w="12700" cap="flat" cmpd="sng" algn="ctr">
+                      <a:solidFill>
+                        <a:schemeClr val="bg1"/>
+                      </a:solidFill>
+                      <a:prstDash val="solid"/>
+                      <a:round/>
+                      <a:headEnd type="none" w="med" len="med"/>
+                      <a:tailEnd type="none" w="med" len="med"/>
+                    </a:lnR>
+                    <a:lnT w="12700" cap="flat" cmpd="sng" algn="ctr">
+                      <a:solidFill>
+                        <a:schemeClr val="bg1"/>
+                      </a:solidFill>
+                      <a:prstDash val="solid"/>
+                      <a:round/>
+                      <a:headEnd type="none" w="med" len="med"/>
+                      <a:tailEnd type="none" w="med" len="med"/>
+                    </a:lnT>
+                    <a:lnB w="12700" cap="flat" cmpd="sng" algn="ctr">
+                      <a:solidFill>
+                        <a:schemeClr val="bg1"/>
+                      </a:solidFill>
+                      <a:prstDash val="solid"/>
+                      <a:round/>
+                      <a:headEnd type="none" w="med" len="med"/>
+                      <a:tailEnd type="none" w="med" len="med"/>
+                    </a:lnB>
+                    <a:lnTlToBr>
+                      <a:noFill/>
+                    </a:lnTlToBr>
+                    <a:lnBlToTr>
+                      <a:noFill/>
+                    </a:lnBlToTr>
+                    <a:solidFill>
+                      <a:schemeClr val="accent1">
+                        <a:lumMod val="75000"/>
+                      </a:schemeClr>
+                    </a:solidFill>
+                  </a:tcPr>
+                </a:tc>
+                <a:tc>
+                  <a:txBody>
+                    <a:bodyPr/>
+                    <a:lstStyle/>
+                    <a:p>
+                      <a:pPr marL="171450" marR="0" lvl="0" indent="-171450" algn="l" defTabSz="839788" rtl="0" eaLnBrk="0" fontAlgn="base" latinLnBrk="0" hangingPunct="0">
+                        <a:lnSpc>
+                          <a:spcPct val="100000"/>
+                        </a:lnSpc>
+                        <a:spcBef>
+                          <a:spcPct val="0"/>
+                        </a:spcBef>
+                        <a:spcAft>
+                          <a:spcPct val="0"/>
+                        </a:spcAft>
+                        <a:buClr>
+                          <a:schemeClr val="tx1"/>
+                        </a:buClr>
+                        <a:buSzTx/>
+                        <a:buFont typeface="Arial" pitchFamily="34" charset="0"/>
+                        <a:buChar char="•"/>
+                        <a:tabLst/>
+                      </a:pPr>
+                      <a:r>
+                        <a:rPr kumimoji="0" lang="en-US" sz="1300" b="0" i="0" u="none" strike="noStrike" cap="none" normalizeH="0" baseline="0" noProof="0">
+                          <a:ln>
+                            <a:noFill/>
+                          </a:ln>
+                          <a:solidFill>
+                            <a:srgbClr val="000000"/>
+                          </a:solidFill>
+                          <a:effectLst/>
+                          <a:latin typeface="+mn-lt"/>
+                        </a:rPr>
+                        <a:t>Same product under two material numbers: double master data maintenance</a:t>
+                      </a:r>
+                    </a:p>
+                    <a:p>
+                      <a:pPr marL="171450" marR="0" lvl="0" indent="-171450" algn="l" defTabSz="839788" rtl="0" eaLnBrk="0" fontAlgn="base" latinLnBrk="0" hangingPunct="0">
+                        <a:lnSpc>
+                          <a:spcPct val="100000"/>
+                        </a:lnSpc>
+                        <a:spcBef>
+                          <a:spcPct val="0"/>
+                        </a:spcBef>
+                        <a:spcAft>
+                          <a:spcPct val="0"/>
+                        </a:spcAft>
+                        <a:buClr>
+                          <a:schemeClr val="tx1"/>
+                        </a:buClr>
+                        <a:buSzTx/>
+                        <a:buFont typeface="Arial" pitchFamily="34" charset="0"/>
+                        <a:buChar char="•"/>
+                        <a:tabLst/>
+                      </a:pPr>
+                      <a:r>
+                        <a:rPr kumimoji="0" lang="en-US" sz="1300" b="0" i="0" u="none" strike="noStrike" cap="none" normalizeH="0" baseline="0" noProof="0">
+                          <a:ln>
+                            <a:noFill/>
+                          </a:ln>
+                          <a:solidFill>
+                            <a:srgbClr val="000000"/>
+                          </a:solidFill>
+                          <a:effectLst/>
+                          <a:latin typeface="+mn-lt"/>
+                        </a:rPr>
+                        <a:t>Intercompany process (PO in FIN, SO in GER, delivery, billing) needs a mapping between the material numbers</a:t>
+                      </a:r>
+                    </a:p>
+                    <a:p>
+                      <a:pPr marL="171450" marR="0" lvl="0" indent="-171450" algn="l" defTabSz="839788" rtl="0" eaLnBrk="0" fontAlgn="base" latinLnBrk="0" hangingPunct="0">
+                        <a:lnSpc>
+                          <a:spcPct val="100000"/>
+                        </a:lnSpc>
+                        <a:spcBef>
+                          <a:spcPct val="0"/>
+                        </a:spcBef>
+                        <a:spcAft>
+                          <a:spcPct val="0"/>
+                        </a:spcAft>
+                        <a:buClr>
+                          <a:schemeClr val="tx1"/>
+                        </a:buClr>
+                        <a:buSzTx/>
+                        <a:buFont typeface="Arial" pitchFamily="34" charset="0"/>
+                        <a:buChar char="•"/>
+                        <a:tabLst/>
+                      </a:pPr>
+                      <a:r>
+                        <a:rPr kumimoji="0" lang="en-US" sz="1300" b="0" i="0" u="none" strike="noStrike" cap="none" normalizeH="0" baseline="0" noProof="0">
+                          <a:ln>
+                            <a:noFill/>
+                          </a:ln>
+                          <a:solidFill>
+                            <a:srgbClr val="000000"/>
+                          </a:solidFill>
+                          <a:effectLst/>
+                          <a:latin typeface="+mn-lt"/>
+                        </a:rPr>
+                        <a:t>No cross-plant stock overview, planning and reporting per material</a:t>
+                      </a:r>
+                    </a:p>
+                  </a:txBody>
+                  <a:tcPr marL="121916" marR="121916" marT="60979" marB="60979" horzOverflow="overflow">
+                    <a:lnL w="12700" cap="flat" cmpd="sng" algn="ctr">
+                      <a:solidFill>
+                        <a:schemeClr val="bg1"/>
+                      </a:solidFill>
+                      <a:prstDash val="solid"/>
+                      <a:round/>
+                      <a:headEnd type="none" w="med" len="med"/>
+                      <a:tailEnd type="none" w="med" len="med"/>
+                    </a:lnL>
+                    <a:lnR w="12700" cap="flat" cmpd="sng" algn="ctr">
+                      <a:solidFill>
+                        <a:schemeClr val="bg1"/>
+                      </a:solidFill>
+                      <a:prstDash val="solid"/>
+                      <a:round/>
+                      <a:headEnd type="none" w="med" len="med"/>
+                      <a:tailEnd type="none" w="med" len="med"/>
+                    </a:lnR>
+                    <a:lnT w="12700" cap="flat" cmpd="sng" algn="ctr">
+                      <a:solidFill>
+                        <a:schemeClr val="bg1"/>
+                      </a:solidFill>
+                      <a:prstDash val="solid"/>
+                      <a:round/>
+                      <a:headEnd type="none" w="med" len="med"/>
+                      <a:tailEnd type="none" w="med" len="med"/>
+                    </a:lnT>
+                    <a:lnB w="12700" cap="flat" cmpd="sng" algn="ctr">
+                      <a:solidFill>
+                        <a:schemeClr val="bg1"/>
+                      </a:solidFill>
+                      <a:prstDash val="solid"/>
+                      <a:round/>
+                      <a:headEnd type="none" w="med" len="med"/>
+                      <a:tailEnd type="none" w="med" len="med"/>
+                    </a:lnB>
+                    <a:lnTlToBr>
+                      <a:noFill/>
+                    </a:lnTlToBr>
+                    <a:lnBlToTr>
+                      <a:noFill/>
+                    </a:lnBlToTr>
+                    <a:solidFill>
+                      <a:srgbClr val="C7CFDC"/>
+                    </a:solidFill>
+                  </a:tcPr>
+                </a:tc>
+                <a:tc>
+                  <a:txBody>
+                    <a:bodyPr/>
+                    <a:lstStyle/>
+                    <a:p>
+                      <a:pPr marL="171450" marR="0" lvl="0" indent="-171450" algn="l" defTabSz="839788" rtl="0" eaLnBrk="0" fontAlgn="base" latinLnBrk="0" hangingPunct="0">
+                        <a:lnSpc>
+                          <a:spcPct val="100000"/>
+                        </a:lnSpc>
+                        <a:spcBef>
+                          <a:spcPct val="0"/>
+                        </a:spcBef>
+                        <a:spcAft>
+                          <a:spcPct val="0"/>
+                        </a:spcAft>
+                        <a:buClr>
+                          <a:schemeClr val="tx1"/>
+                        </a:buClr>
+                        <a:buSzTx/>
+                        <a:buFont typeface="Arial" pitchFamily="34" charset="0"/>
+                        <a:buChar char="•"/>
+                        <a:tabLst/>
+                      </a:pPr>
+                      <a:r>
+                        <a:rPr kumimoji="0" lang="en-US" sz="1300" b="0" i="0" u="none" strike="noStrike" cap="none" normalizeH="0" baseline="0" noProof="0">
+                          <a:ln>
+                            <a:noFill/>
+                          </a:ln>
+                          <a:solidFill>
+                            <a:srgbClr val="000000"/>
+                          </a:solidFill>
+                          <a:effectLst/>
+                          <a:latin typeface="+mn-lt"/>
+                        </a:rPr>
+                        <a:t>Plant FIN shows purchased goods as finished goods in balance sheet and P&amp;L</a:t>
+                      </a:r>
+                    </a:p>
+                    <a:p>
+                      <a:pPr marL="171450" marR="0" lvl="0" indent="-171450" algn="l" defTabSz="839788" rtl="0" eaLnBrk="0" fontAlgn="base" latinLnBrk="0" hangingPunct="0">
+                        <a:lnSpc>
+                          <a:spcPct val="100000"/>
+                        </a:lnSpc>
+                        <a:spcBef>
+                          <a:spcPct val="0"/>
+                        </a:spcBef>
+                        <a:spcAft>
+                          <a:spcPct val="0"/>
+                        </a:spcAft>
+                        <a:buClr>
+                          <a:schemeClr val="tx1"/>
+                        </a:buClr>
+                        <a:buSzTx/>
+                        <a:buFont typeface="Arial" pitchFamily="34" charset="0"/>
+                        <a:buChar char="•"/>
+                        <a:tabLst/>
+                      </a:pPr>
+                      <a:r>
+                        <a:rPr kumimoji="0" lang="en-US" sz="1300" b="0" i="0" u="none" strike="noStrike" cap="none" normalizeH="0" baseline="0" noProof="0">
+                          <a:ln>
+                            <a:noFill/>
+                          </a:ln>
+                          <a:solidFill>
+                            <a:srgbClr val="000000"/>
+                          </a:solidFill>
+                          <a:effectLst/>
+                          <a:latin typeface="+mn-lt"/>
+                        </a:rPr>
+                        <a:t>Requirement of plant-specific material valuation not met</a:t>
+                      </a:r>
+                    </a:p>
+                    <a:p>
+                      <a:pPr marL="171450" marR="0" lvl="0" indent="-171450" algn="l" defTabSz="839788" rtl="0" eaLnBrk="0" fontAlgn="base" latinLnBrk="0" hangingPunct="0">
+                        <a:lnSpc>
+                          <a:spcPct val="100000"/>
+                        </a:lnSpc>
+                        <a:spcBef>
+                          <a:spcPct val="0"/>
+                        </a:spcBef>
+                        <a:spcAft>
+                          <a:spcPct val="0"/>
+                        </a:spcAft>
+                        <a:buClr>
+                          <a:schemeClr val="tx1"/>
+                        </a:buClr>
+                        <a:buSzTx/>
+                        <a:buFont typeface="Arial" pitchFamily="34" charset="0"/>
+                        <a:buChar char="•"/>
+                        <a:tabLst/>
+                      </a:pPr>
+                      <a:r>
+                        <a:rPr kumimoji="0" lang="en-US" sz="1300" b="0" i="0" u="none" strike="noStrike" cap="none" normalizeH="0" baseline="0" noProof="0">
+                          <a:ln>
+                            <a:noFill/>
+                          </a:ln>
+                          <a:solidFill>
+                            <a:srgbClr val="000000"/>
+                          </a:solidFill>
+                          <a:effectLst/>
+                          <a:latin typeface="+mn-lt"/>
+                        </a:rPr>
+                        <a:t>Manual reclassification at period end: error-prone, not transparent</a:t>
+                      </a:r>
+                    </a:p>
+                  </a:txBody>
+                  <a:tcPr marL="121916" marR="121916" marT="60979" marB="60979" horzOverflow="overflow">
+                    <a:lnL w="12700" cap="flat" cmpd="sng" algn="ctr">
+                      <a:solidFill>
+                        <a:schemeClr val="bg1"/>
+                      </a:solidFill>
+                      <a:prstDash val="solid"/>
+                      <a:round/>
+                      <a:headEnd type="none" w="med" len="med"/>
+                      <a:tailEnd type="none" w="med" len="med"/>
+                    </a:lnL>
+                    <a:lnR w="12700" cap="flat" cmpd="sng" algn="ctr">
+                      <a:solidFill>
+                        <a:schemeClr val="bg1"/>
+                      </a:solidFill>
+                      <a:prstDash val="solid"/>
+                      <a:round/>
+                      <a:headEnd type="none" w="med" len="med"/>
+                      <a:tailEnd type="none" w="med" len="med"/>
+                    </a:lnR>
+                    <a:lnT w="12700" cap="flat" cmpd="sng" algn="ctr">
+                      <a:solidFill>
+                        <a:schemeClr val="bg1"/>
+                      </a:solidFill>
+                      <a:prstDash val="solid"/>
+                      <a:round/>
+                      <a:headEnd type="none" w="med" len="med"/>
+                      <a:tailEnd type="none" w="med" len="med"/>
+                    </a:lnT>
+                    <a:lnB w="12700" cap="flat" cmpd="sng" algn="ctr">
+                      <a:solidFill>
+                        <a:schemeClr val="bg1"/>
+                      </a:solidFill>
+                      <a:prstDash val="solid"/>
+                      <a:round/>
+                      <a:headEnd type="none" w="med" len="med"/>
+                      <a:tailEnd type="none" w="med" len="med"/>
+                    </a:lnB>
+                    <a:lnTlToBr>
+                      <a:noFill/>
+                    </a:lnTlToBr>
+                    <a:lnBlToTr>
+                      <a:noFill/>
+                    </a:lnBlToTr>
+                    <a:solidFill>
+                      <a:srgbClr val="C7CFDC"/>
+                    </a:solidFill>
+                  </a:tcPr>
+                </a:tc>
+                <a:tc>
+                  <a:txBody>
+                    <a:bodyPr/>
+                    <a:lstStyle/>
+                    <a:p>
+                      <a:pPr marL="171450" marR="0" lvl="0" indent="-171450" algn="l" defTabSz="839788" rtl="0" eaLnBrk="0" fontAlgn="base" latinLnBrk="0" hangingPunct="0">
+                        <a:lnSpc>
+                          <a:spcPct val="100000"/>
+                        </a:lnSpc>
+                        <a:spcBef>
+                          <a:spcPct val="0"/>
+                        </a:spcBef>
+                        <a:spcAft>
+                          <a:spcPct val="0"/>
+                        </a:spcAft>
+                        <a:buClr>
+                          <a:schemeClr val="tx1"/>
+                        </a:buClr>
+                        <a:buSzTx/>
+                        <a:buFont typeface="Arial" pitchFamily="34" charset="0"/>
+                        <a:buChar char="•"/>
+                        <a:tabLst/>
+                      </a:pPr>
+                      <a:r>
+                        <a:rPr kumimoji="0" lang="en-US" sz="1300" b="0" i="0" u="none" strike="noStrike" cap="none" normalizeH="0" baseline="0" noProof="0">
+                          <a:ln>
+                            <a:noFill/>
+                          </a:ln>
+                          <a:solidFill>
+                            <a:srgbClr val="000000"/>
+                          </a:solidFill>
+                          <a:effectLst/>
+                          <a:latin typeface="+mn-lt"/>
+                        </a:rPr>
+                        <a:t>One more valuation class and its account determination to maintain</a:t>
+                      </a:r>
+                    </a:p>
+                    <a:p>
+                      <a:pPr marL="171450" marR="0" lvl="0" indent="-171450" algn="l" defTabSz="839788" rtl="0" eaLnBrk="0" fontAlgn="base" latinLnBrk="0" hangingPunct="0">
+                        <a:lnSpc>
+                          <a:spcPct val="100000"/>
+                        </a:lnSpc>
+                        <a:spcBef>
+                          <a:spcPct val="0"/>
+                        </a:spcBef>
+                        <a:spcAft>
+                          <a:spcPct val="0"/>
+                        </a:spcAft>
+                        <a:buClr>
+                          <a:schemeClr val="tx1"/>
+                        </a:buClr>
+                        <a:buSzTx/>
+                        <a:buFont typeface="Arial" pitchFamily="34" charset="0"/>
+                        <a:buChar char="•"/>
+                        <a:tabLst/>
+                      </a:pPr>
+                      <a:r>
+                        <a:rPr kumimoji="0" lang="en-US" sz="1300" b="0" i="0" u="none" strike="noStrike" cap="none" normalizeH="0" baseline="0" noProof="0">
+                          <a:ln>
+                            <a:noFill/>
+                          </a:ln>
+                          <a:solidFill>
+                            <a:srgbClr val="000000"/>
+                          </a:solidFill>
+                          <a:effectLst/>
+                          <a:latin typeface="+mn-lt"/>
+                        </a:rPr>
+                        <a:t>Valuation class must be set correctly per plant in the material master</a:t>
+                      </a:r>
+                    </a:p>
+                    <a:p>
+                      <a:pPr marL="171450" marR="0" lvl="0" indent="-171450" algn="l" defTabSz="839788" rtl="0" eaLnBrk="0" fontAlgn="base" latinLnBrk="0" hangingPunct="0">
+                        <a:lnSpc>
+                          <a:spcPct val="100000"/>
+                        </a:lnSpc>
+                        <a:spcBef>
+                          <a:spcPct val="0"/>
+                        </a:spcBef>
+                        <a:spcAft>
+                          <a:spcPct val="0"/>
+                        </a:spcAft>
+                        <a:buClr>
+                          <a:schemeClr val="tx1"/>
+                        </a:buClr>
+                        <a:buSzTx/>
+                        <a:buFont typeface="Arial" pitchFamily="34" charset="0"/>
+                        <a:buChar char="•"/>
+                        <a:tabLst/>
+                      </a:pPr>
+                      <a:r>
+                        <a:rPr kumimoji="0" lang="en-US" sz="1300" b="0" i="0" u="none" strike="noStrike" cap="none" normalizeH="0" baseline="0" noProof="0">
+                          <a:ln>
+                            <a:noFill/>
+                          </a:ln>
+                          <a:solidFill>
+                            <a:srgbClr val="000000"/>
+                          </a:solidFill>
+                          <a:effectLst/>
+                          <a:latin typeface="+mn-lt"/>
+                        </a:rPr>
+                        <a:t>Only usable for FERT materials (one account category reference)</a:t>
+                      </a:r>
+                    </a:p>
+                  </a:txBody>
+                  <a:tcPr marL="121916" marR="121916" marT="60979" marB="60979" horzOverflow="overflow">
+                    <a:lnL w="12700" cap="flat" cmpd="sng" algn="ctr">
+                      <a:solidFill>
+                        <a:schemeClr val="bg1"/>
+                      </a:solidFill>
+                      <a:prstDash val="solid"/>
+                      <a:round/>
+                      <a:headEnd type="none" w="med" len="med"/>
+                      <a:tailEnd type="none" w="med" len="med"/>
+                    </a:lnL>
+                    <a:lnR w="12700" cap="flat" cmpd="sng" algn="ctr">
+                      <a:solidFill>
+                        <a:schemeClr val="bg1"/>
+                      </a:solidFill>
+                      <a:prstDash val="solid"/>
+                      <a:round/>
+                      <a:headEnd type="none" w="med" len="med"/>
+                      <a:tailEnd type="none" w="med" len="med"/>
+                    </a:lnR>
+                    <a:lnT w="12700" cap="flat" cmpd="sng" algn="ctr">
+                      <a:solidFill>
+                        <a:schemeClr val="bg1"/>
+                      </a:solidFill>
+                      <a:prstDash val="solid"/>
+                      <a:round/>
+                      <a:headEnd type="none" w="med" len="med"/>
+                      <a:tailEnd type="none" w="med" len="med"/>
+                    </a:lnT>
+                    <a:lnB w="12700" cap="flat" cmpd="sng" algn="ctr">
+                      <a:solidFill>
+                        <a:schemeClr val="bg1"/>
+                      </a:solidFill>
+                      <a:prstDash val="solid"/>
+                      <a:round/>
+                      <a:headEnd type="none" w="med" len="med"/>
+                      <a:tailEnd type="none" w="med" len="med"/>
+                    </a:lnB>
+                    <a:lnTlToBr>
+                      <a:noFill/>
+                    </a:lnTlToBr>
+                    <a:lnBlToTr>
+                      <a:noFill/>
+                    </a:lnBlToTr>
+                    <a:solidFill>
+                      <a:srgbClr val="C7CFDC"/>
+                    </a:solidFill>
+                  </a:tcPr>
+                </a:tc>
+                <a:extLst>
+                  <a:ext uri="{0D108BD9-81ED-4DB2-BD59-A6C34878D82A}">
+                    <a16:rowId xmlns:a16="http://schemas.microsoft.com/office/drawing/2014/main" val="10003"/>
+                  </a:ext>
+                </a:extLst>
+              </a:tr>
+              <a:tr h="500000">
+                <a:tc>
+                  <a:txBody>
+                    <a:bodyPr/>
+                    <a:lstStyle/>
+                    <a:p>
+                      <a:pPr marL="0" marR="0" lvl="0" indent="0" algn="ctr" defTabSz="839788" rtl="0" eaLnBrk="0" fontAlgn="base" latinLnBrk="0" hangingPunct="0">
+                        <a:lnSpc>
+                          <a:spcPct val="111000"/>
+                        </a:lnSpc>
+                        <a:spcBef>
+                          <a:spcPct val="0"/>
+                        </a:spcBef>
+                        <a:spcAft>
+                          <a:spcPct val="0"/>
+                        </a:spcAft>
+                        <a:buClr>
+                          <a:srgbClr val="5D7298"/>
+                        </a:buClr>
+                        <a:buSzPct val="65000"/>
+                        <a:buFont typeface="Wingdings" pitchFamily="2" charset="2"/>
+                        <a:buNone/>
+                        <a:tabLst/>
+                      </a:pPr>
+                      <a:r>
+                        <a:rPr kumimoji="0" lang="en-US" sz="1300" b="1" i="0" u="none" strike="noStrike" cap="none" normalizeH="0" baseline="0" noProof="0" dirty="0">
+                          <a:ln>
+                            <a:noFill/>
+                          </a:ln>
+                          <a:solidFill>
+                            <a:schemeClr val="bg1"/>
+                          </a:solidFill>
+                          <a:effectLst/>
+                          <a:latin typeface="+mn-lt"/>
+                        </a:rPr>
+                        <a:t>Impact</a:t>
+                      </a:r>
+                    </a:p>
+                  </a:txBody>
+                  <a:tcPr marL="119996" marR="119996" marT="62419" marB="62419" anchor="ctr" horzOverflow="overflow">
+                    <a:lnL w="12700" cap="flat" cmpd="sng" algn="ctr">
+                      <a:solidFill>
+                        <a:schemeClr val="bg1"/>
+                      </a:solidFill>
+                      <a:prstDash val="solid"/>
+                      <a:round/>
+                      <a:headEnd type="none" w="med" len="med"/>
+                      <a:tailEnd type="none" w="med" len="med"/>
+                    </a:lnL>
+                    <a:lnR w="12700" cap="flat" cmpd="sng" algn="ctr">
+                      <a:solidFill>
+                        <a:schemeClr val="bg1"/>
+                      </a:solidFill>
+                      <a:prstDash val="solid"/>
+                      <a:round/>
+                      <a:headEnd type="none" w="med" len="med"/>
+                      <a:tailEnd type="none" w="med" len="med"/>
+                    </a:lnR>
+                    <a:lnT w="12700" cap="flat" cmpd="sng" algn="ctr">
+                      <a:solidFill>
+                        <a:schemeClr val="bg1"/>
+                      </a:solidFill>
+                      <a:prstDash val="solid"/>
+                      <a:round/>
+                      <a:headEnd type="none" w="med" len="med"/>
+                      <a:tailEnd type="none" w="med" len="med"/>
+                    </a:lnT>
+                    <a:lnB w="12700" cap="flat" cmpd="sng" algn="ctr">
+                      <a:solidFill>
+                        <a:schemeClr val="bg1"/>
+                      </a:solidFill>
+                      <a:prstDash val="solid"/>
+                      <a:round/>
+                      <a:headEnd type="none" w="med" len="med"/>
+                      <a:tailEnd type="none" w="med" len="med"/>
+                    </a:lnB>
+                    <a:lnTlToBr>
+                      <a:noFill/>
+                    </a:lnTlToBr>
+                    <a:lnBlToTr>
+                      <a:noFill/>
+                    </a:lnBlToTr>
+                    <a:solidFill>
+                      <a:schemeClr val="accent1">
+                        <a:lumMod val="75000"/>
+                      </a:schemeClr>
+                    </a:solidFill>
+                  </a:tcPr>
+                </a:tc>
+                <a:tc>
+                  <a:txBody>
+                    <a:bodyPr/>
+                    <a:lstStyle/>
+                    <a:p>
+                      <a:pPr marL="171450" marR="0" lvl="0" indent="-171450" algn="l" defTabSz="839788" rtl="0" eaLnBrk="0" fontAlgn="base" latinLnBrk="0" hangingPunct="0">
+                        <a:lnSpc>
+                          <a:spcPct val="100000"/>
+                        </a:lnSpc>
+                        <a:spcBef>
+                          <a:spcPct val="0"/>
+                        </a:spcBef>
+                        <a:spcAft>
+                          <a:spcPct val="0"/>
+                        </a:spcAft>
+                        <a:buClr>
+                          <a:schemeClr val="tx1"/>
+                        </a:buClr>
+                        <a:buSzTx/>
+                        <a:buFont typeface="Arial" pitchFamily="34" charset="0"/>
+                        <a:buChar char="•"/>
+                        <a:tabLst/>
+                      </a:pPr>
+                      <a:r>
+                        <a:rPr kumimoji="0" lang="en-US" sz="1300" b="0" i="0" u="none" strike="noStrike" cap="none" normalizeH="0" baseline="0" noProof="0">
+                          <a:ln>
+                            <a:noFill/>
+                          </a:ln>
+                          <a:solidFill>
+                            <a:srgbClr val="000000"/>
+                          </a:solidFill>
+                          <a:effectLst/>
+                          <a:latin typeface="+mn-lt"/>
+                        </a:rPr>
+                        <a:t>high: duplicate master data, more complex intercompany process</a:t>
+                      </a:r>
+                    </a:p>
+                  </a:txBody>
+                  <a:tcPr marL="121916" marR="121916" marT="60979" marB="60979" horzOverflow="overflow">
+                    <a:lnL w="12700" cap="flat" cmpd="sng" algn="ctr">
+                      <a:solidFill>
+                        <a:schemeClr val="bg1"/>
+                      </a:solidFill>
+                      <a:prstDash val="solid"/>
+                      <a:round/>
+                      <a:headEnd type="none" w="med" len="med"/>
+                      <a:tailEnd type="none" w="med" len="med"/>
+                    </a:lnL>
+                    <a:lnR w="12700" cap="flat" cmpd="sng" algn="ctr">
+                      <a:solidFill>
+                        <a:schemeClr val="bg1"/>
+                      </a:solidFill>
+                      <a:prstDash val="solid"/>
+                      <a:round/>
+                      <a:headEnd type="none" w="med" len="med"/>
+                      <a:tailEnd type="none" w="med" len="med"/>
+                    </a:lnR>
+                    <a:lnT w="12700" cap="flat" cmpd="sng" algn="ctr">
+                      <a:solidFill>
+                        <a:schemeClr val="bg1"/>
+                      </a:solidFill>
+                      <a:prstDash val="solid"/>
+                      <a:round/>
+                      <a:headEnd type="none" w="med" len="med"/>
+                      <a:tailEnd type="none" w="med" len="med"/>
+                    </a:lnT>
+                    <a:lnB w="12700" cap="flat" cmpd="sng" algn="ctr">
+                      <a:solidFill>
+                        <a:schemeClr val="bg1"/>
+                      </a:solidFill>
+                      <a:prstDash val="solid"/>
+                      <a:round/>
+                      <a:headEnd type="none" w="med" len="med"/>
+                      <a:tailEnd type="none" w="med" len="med"/>
+                    </a:lnB>
+                    <a:lnTlToBr>
+                      <a:noFill/>
+                    </a:lnTlToBr>
+                    <a:lnBlToTr>
+                      <a:noFill/>
+                    </a:lnBlToTr>
+                    <a:solidFill>
+                      <a:srgbClr val="C7CFDC"/>
+                    </a:solidFill>
+                  </a:tcPr>
+                </a:tc>
+                <a:tc>
+                  <a:txBody>
+                    <a:bodyPr/>
+                    <a:lstStyle/>
+                    <a:p>
+                      <a:pPr marL="171450" marR="0" lvl="0" indent="-171450" algn="l" defTabSz="839788" rtl="0" eaLnBrk="0" fontAlgn="base" latinLnBrk="0" hangingPunct="0">
+                        <a:lnSpc>
+                          <a:spcPct val="100000"/>
+                        </a:lnSpc>
+                        <a:spcBef>
+                          <a:spcPct val="0"/>
+                        </a:spcBef>
+                        <a:spcAft>
+                          <a:spcPct val="0"/>
+                        </a:spcAft>
+                        <a:buClr>
+                          <a:schemeClr val="tx1"/>
+                        </a:buClr>
+                        <a:buSzTx/>
+                        <a:buFont typeface="Arial" pitchFamily="34" charset="0"/>
+                        <a:buChar char="•"/>
+                        <a:tabLst/>
+                      </a:pPr>
+                      <a:r>
+                        <a:rPr kumimoji="0" lang="en-US" sz="1300" b="0" i="0" u="none" strike="noStrike" cap="none" normalizeH="0" baseline="0" noProof="0">
+                          <a:ln>
+                            <a:noFill/>
+                          </a:ln>
+                          <a:solidFill>
+                            <a:srgbClr val="000000"/>
+                          </a:solidFill>
+                          <a:effectLst/>
+                          <a:latin typeface="+mn-lt"/>
+                        </a:rPr>
+                        <a:t>medium: low set-up effort, but ongoing manual work and reporting risk</a:t>
+                      </a:r>
+                    </a:p>
+                  </a:txBody>
+                  <a:tcPr marL="121916" marR="121916" marT="60979" marB="60979" horzOverflow="overflow">
+                    <a:lnL w="12700" cap="flat" cmpd="sng" algn="ctr">
+                      <a:solidFill>
+                        <a:schemeClr val="bg1"/>
+                      </a:solidFill>
+                      <a:prstDash val="solid"/>
+                      <a:round/>
+                      <a:headEnd type="none" w="med" len="med"/>
+                      <a:tailEnd type="none" w="med" len="med"/>
+                    </a:lnL>
+                    <a:lnR w="12700" cap="flat" cmpd="sng" algn="ctr">
+                      <a:solidFill>
+                        <a:schemeClr val="bg1"/>
+                      </a:solidFill>
+                      <a:prstDash val="solid"/>
+                      <a:round/>
+                      <a:headEnd type="none" w="med" len="med"/>
+                      <a:tailEnd type="none" w="med" len="med"/>
+                    </a:lnR>
+                    <a:lnT w="12700" cap="flat" cmpd="sng" algn="ctr">
+                      <a:solidFill>
+                        <a:schemeClr val="bg1"/>
+                      </a:solidFill>
+                      <a:prstDash val="solid"/>
+                      <a:round/>
+                      <a:headEnd type="none" w="med" len="med"/>
+                      <a:tailEnd type="none" w="med" len="med"/>
+                    </a:lnT>
+                    <a:lnB w="12700" cap="flat" cmpd="sng" algn="ctr">
+                      <a:solidFill>
+                        <a:schemeClr val="bg1"/>
+                      </a:solidFill>
+                      <a:prstDash val="solid"/>
+                      <a:round/>
+                      <a:headEnd type="none" w="med" len="med"/>
+                      <a:tailEnd type="none" w="med" len="med"/>
+                    </a:lnB>
+                    <a:lnTlToBr>
+                      <a:noFill/>
+                    </a:lnTlToBr>
+                    <a:lnBlToTr>
+                      <a:noFill/>
+                    </a:lnBlToTr>
+                    <a:solidFill>
+                      <a:srgbClr val="C7CFDC"/>
+                    </a:solidFill>
+                  </a:tcPr>
+                </a:tc>
+                <a:tc>
+                  <a:txBody>
+                    <a:bodyPr/>
+                    <a:lstStyle/>
+                    <a:p>
+                      <a:pPr marL="171450" marR="0" lvl="0" indent="-171450" algn="l" defTabSz="839788" rtl="0" eaLnBrk="0" fontAlgn="base" latinLnBrk="0" hangingPunct="0">
+                        <a:lnSpc>
+                          <a:spcPct val="100000"/>
+                        </a:lnSpc>
+                        <a:spcBef>
+                          <a:spcPct val="0"/>
+                        </a:spcBef>
+                        <a:spcAft>
+                          <a:spcPct val="0"/>
+                        </a:spcAft>
+                        <a:buClr>
+                          <a:schemeClr val="tx1"/>
+                        </a:buClr>
+                        <a:buSzTx/>
+                        <a:buFont typeface="Arial" pitchFamily="34" charset="0"/>
+                        <a:buChar char="•"/>
+                        <a:tabLst/>
+                      </a:pPr>
+                      <a:r>
+                        <a:rPr kumimoji="0" lang="en-US" sz="1300" b="0" i="0" u="none" strike="noStrike" cap="none" normalizeH="0" baseline="0" noProof="0">
+                          <a:ln>
+                            <a:noFill/>
+                          </a:ln>
+                          <a:solidFill>
+                            <a:srgbClr val="000000"/>
+                          </a:solidFill>
+                          <a:effectLst/>
+                          <a:latin typeface="+mn-lt"/>
+                        </a:rPr>
+                        <a:t>low: configuration of one valuation class, no additional master data</a:t>
+                      </a:r>
+                    </a:p>
+                  </a:txBody>
+                  <a:tcPr marL="121916" marR="121916" marT="60979" marB="60979" horzOverflow="overflow">
+                    <a:lnL w="12700" cap="flat" cmpd="sng" algn="ctr">
+                      <a:solidFill>
+                        <a:schemeClr val="bg1"/>
+                      </a:solidFill>
+                      <a:prstDash val="solid"/>
+                      <a:round/>
+                      <a:headEnd type="none" w="med" len="med"/>
+                      <a:tailEnd type="none" w="med" len="med"/>
+                    </a:lnL>
+                    <a:lnR w="12700" cap="flat" cmpd="sng" algn="ctr">
+                      <a:solidFill>
+                        <a:schemeClr val="bg1"/>
+                      </a:solidFill>
+                      <a:prstDash val="solid"/>
+                      <a:round/>
+                      <a:headEnd type="none" w="med" len="med"/>
+                      <a:tailEnd type="none" w="med" len="med"/>
+                    </a:lnR>
+                    <a:lnT w="12700" cap="flat" cmpd="sng" algn="ctr">
+                      <a:solidFill>
+                        <a:schemeClr val="bg1"/>
+                      </a:solidFill>
+                      <a:prstDash val="solid"/>
+                      <a:round/>
+                      <a:headEnd type="none" w="med" len="med"/>
+                      <a:tailEnd type="none" w="med" len="med"/>
+                    </a:lnT>
+                    <a:lnB w="12700" cap="flat" cmpd="sng" algn="ctr">
+                      <a:solidFill>
+                        <a:schemeClr val="bg1"/>
+                      </a:solidFill>
+                      <a:prstDash val="solid"/>
+                      <a:round/>
+                      <a:headEnd type="none" w="med" len="med"/>
+                      <a:tailEnd type="none" w="med" len="med"/>
+                    </a:lnB>
+                    <a:lnTlToBr>
+                      <a:noFill/>
+                    </a:lnTlToBr>
+                    <a:lnBlToTr>
+                      <a:noFill/>
+                    </a:lnBlToTr>
+                    <a:solidFill>
+                      <a:srgbClr val="C7CFDC"/>
+                    </a:solidFill>
+                  </a:tcPr>
+                </a:tc>
+                <a:extLst>
+                  <a:ext uri="{0D108BD9-81ED-4DB2-BD59-A6C34878D82A}">
+                    <a16:rowId xmlns:a16="http://schemas.microsoft.com/office/drawing/2014/main" val="10004"/>
+                  </a:ext>
+                </a:extLst>
+              </a:tr>
+            </a:tbl>
+          </a:graphicData>
+        </a:graphic>
+      </p:graphicFrame>
+      <p:sp>
+        <p:nvSpPr>
+          <p:cNvPr id="5" name="Fußzeilenplatzhalter 5">
+            <a:extLst>
+              <a:ext uri="{FF2B5EF4-FFF2-40B4-BE49-F238E27FC236}">
+                <a16:creationId xmlns:a16="http://schemas.microsoft.com/office/drawing/2014/main" id="{CEB28E6D-846F-FA16-4F39-E1E8D6F03EBA}"/>
+              </a:ext>
+            </a:extLst>
+          </p:cNvPr>
+          <p:cNvSpPr txBox="1">
+            <a:spLocks/>
+          </p:cNvSpPr>
+          <p:nvPr/>
+        </p:nvSpPr>
+        <p:spPr>
+          <a:xfrm>
+            <a:off x="0" y="6527297"/>
+            <a:ext cx="12192000" cy="230832"/>
+          </a:xfrm>
+          <a:prstGeom prst="rect">
+            <a:avLst/>
+          </a:prstGeom>
+          <a:ln/>
+        </p:spPr>
+        <p:txBody>
+          <a:bodyPr anchor="ctr"/>
+          <a:lstStyle>
+            <a:defPPr>
+              <a:defRPr lang="de-DE"/>
+            </a:defPPr>
+            <a:lvl1pPr algn="l" rtl="0" fontAlgn="base">
+              <a:spcBef>
+                <a:spcPct val="0"/>
+              </a:spcBef>
+              <a:spcAft>
+                <a:spcPct val="0"/>
+              </a:spcAft>
+              <a:defRPr sz="900" kern="1200">
+                <a:solidFill>
+                  <a:schemeClr val="tx1"/>
+                </a:solidFill>
+                <a:latin typeface="Arial" pitchFamily="34" charset="0"/>
+                <a:ea typeface="MS PGothic" pitchFamily="34" charset="-128"/>
+                <a:cs typeface="+mn-cs"/>
+              </a:defRPr>
+            </a:lvl1pPr>
+            <a:lvl2pPr marL="457200" algn="l" rtl="0" fontAlgn="base">
+              <a:spcBef>
+                <a:spcPct val="0"/>
+              </a:spcBef>
+              <a:spcAft>
+                <a:spcPct val="0"/>
+              </a:spcAft>
+              <a:defRPr sz="2400" kern="1200">
+                <a:solidFill>
+                  <a:schemeClr val="tx1"/>
+                </a:solidFill>
+                <a:latin typeface="Arial" pitchFamily="34" charset="0"/>
+                <a:ea typeface="MS PGothic" pitchFamily="34" charset="-128"/>
+                <a:cs typeface="+mn-cs"/>
+              </a:defRPr>
+            </a:lvl2pPr>
+            <a:lvl3pPr marL="914400" algn="l" rtl="0" fontAlgn="base">
+              <a:spcBef>
+                <a:spcPct val="0"/>
+              </a:spcBef>
+              <a:spcAft>
+                <a:spcPct val="0"/>
+              </a:spcAft>
+              <a:defRPr sz="2400" kern="1200">
+                <a:solidFill>
+                  <a:schemeClr val="tx1"/>
+                </a:solidFill>
+                <a:latin typeface="Arial" pitchFamily="34" charset="0"/>
+                <a:ea typeface="MS PGothic" pitchFamily="34" charset="-128"/>
+                <a:cs typeface="+mn-cs"/>
+              </a:defRPr>
+            </a:lvl3pPr>
+            <a:lvl4pPr marL="1371600" algn="l" rtl="0" fontAlgn="base">
+              <a:spcBef>
+                <a:spcPct val="0"/>
+              </a:spcBef>
+              <a:spcAft>
+                <a:spcPct val="0"/>
+              </a:spcAft>
+              <a:defRPr sz="2400" kern="1200">
+                <a:solidFill>
+                  <a:schemeClr val="tx1"/>
+                </a:solidFill>
+                <a:latin typeface="Arial" pitchFamily="34" charset="0"/>
+                <a:ea typeface="MS PGothic" pitchFamily="34" charset="-128"/>
+                <a:cs typeface="+mn-cs"/>
+              </a:defRPr>
+            </a:lvl4pPr>
+            <a:lvl5pPr marL="1828800" algn="l" rtl="0" fontAlgn="base">
+              <a:spcBef>
+                <a:spcPct val="0"/>
+              </a:spcBef>
+              <a:spcAft>
+                <a:spcPct val="0"/>
+              </a:spcAft>
+              <a:defRPr sz="2400" kern="1200">
+                <a:solidFill>
+                  <a:schemeClr val="tx1"/>
+                </a:solidFill>
+                <a:latin typeface="Arial" pitchFamily="34" charset="0"/>
+                <a:ea typeface="MS PGothic" pitchFamily="34" charset="-128"/>
+                <a:cs typeface="+mn-cs"/>
+              </a:defRPr>
+            </a:lvl5pPr>
+            <a:lvl6pPr marL="2286000" algn="l" defTabSz="914400" rtl="0" eaLnBrk="1" latinLnBrk="0" hangingPunct="1">
+              <a:defRPr sz="2400" kern="1200">
+                <a:solidFill>
+                  <a:schemeClr val="tx1"/>
+                </a:solidFill>
+                <a:latin typeface="Arial" pitchFamily="34" charset="0"/>
+                <a:ea typeface="MS PGothic" pitchFamily="34" charset="-128"/>
+                <a:cs typeface="+mn-cs"/>
+              </a:defRPr>
+            </a:lvl6pPr>
+            <a:lvl7pPr marL="2743200" algn="l" defTabSz="914400" rtl="0" eaLnBrk="1" latinLnBrk="0" hangingPunct="1">
+              <a:defRPr sz="2400" kern="1200">
+                <a:solidFill>
+                  <a:schemeClr val="tx1"/>
+                </a:solidFill>
+                <a:latin typeface="Arial" pitchFamily="34" charset="0"/>
+                <a:ea typeface="MS PGothic" pitchFamily="34" charset="-128"/>
+                <a:cs typeface="+mn-cs"/>
+              </a:defRPr>
+            </a:lvl7pPr>
+            <a:lvl8pPr marL="3200400" algn="l" defTabSz="914400" rtl="0" eaLnBrk="1" latinLnBrk="0" hangingPunct="1">
+              <a:defRPr sz="2400" kern="1200">
+                <a:solidFill>
+                  <a:schemeClr val="tx1"/>
+                </a:solidFill>
+                <a:latin typeface="Arial" pitchFamily="34" charset="0"/>
+                <a:ea typeface="MS PGothic" pitchFamily="34" charset="-128"/>
+                <a:cs typeface="+mn-cs"/>
+              </a:defRPr>
+            </a:lvl8pPr>
+            <a:lvl9pPr marL="3657600" algn="l" defTabSz="914400" rtl="0" eaLnBrk="1" latinLnBrk="0" hangingPunct="1">
+              <a:defRPr sz="2400" kern="1200">
+                <a:solidFill>
+                  <a:schemeClr val="tx1"/>
+                </a:solidFill>
+                <a:latin typeface="Arial" pitchFamily="34" charset="0"/>
+                <a:ea typeface="MS PGothic" pitchFamily="34" charset="-128"/>
+                <a:cs typeface="+mn-cs"/>
+              </a:defRPr>
+            </a:lvl9pPr>
+          </a:lstStyle>
+          <a:p>
+            <a:pPr algn="ctr">
+              <a:spcBef>
+                <a:spcPts val="600"/>
+              </a:spcBef>
+              <a:buSzPct val="100000"/>
+            </a:pPr>
+            <a:r>
+              <a:rPr lang="en-US" sz="800" noProof="0" dirty="0">
+                <a:solidFill>
+                  <a:srgbClr val="313131"/>
+                </a:solidFill>
+                <a:latin typeface="Arial"/>
+              </a:rPr>
+              <a:t>Armin Turken </a:t>
+            </a:r>
+            <a:r>
+              <a:rPr lang="en-US" sz="800" b="1" noProof="0" dirty="0">
+                <a:solidFill>
+                  <a:srgbClr val="313131"/>
+                </a:solidFill>
+                <a:latin typeface="Arial"/>
+              </a:rPr>
+              <a:t>| </a:t>
+            </a:r>
+            <a:r>
+              <a:rPr lang="en-US" sz="800" noProof="0" dirty="0">
+                <a:solidFill>
+                  <a:srgbClr val="313131"/>
+                </a:solidFill>
+                <a:latin typeface="Arial"/>
+              </a:rPr>
+              <a:t>Deloitte</a:t>
+            </a:r>
+            <a:r>
+              <a:rPr lang="en-US" sz="800" b="1" noProof="0" dirty="0">
+                <a:solidFill>
+                  <a:srgbClr val="313131"/>
+                </a:solidFill>
+                <a:latin typeface="Arial"/>
+              </a:rPr>
+              <a:t> | </a:t>
+            </a:r>
+            <a:r>
+              <a:rPr lang="en-US" sz="800" noProof="0" dirty="0">
+                <a:solidFill>
+                  <a:srgbClr val="313131"/>
+                </a:solidFill>
+              </a:rPr>
+              <a:t>Controlling</a:t>
+            </a:r>
+            <a:endParaRPr lang="en-US" sz="800" noProof="0" dirty="0">
+              <a:solidFill>
+                <a:srgbClr val="313131"/>
+              </a:solidFill>
+              <a:latin typeface="Arial"/>
+            </a:endParaRPr>
+          </a:p>
+        </p:txBody>
+      </p:sp>
+    </p:spTree>
+    <p:extLst>
+      <p:ext uri="{BB962C8B-B14F-4D97-AF65-F5344CB8AC3E}">
+        <p14:creationId xmlns:p14="http://schemas.microsoft.com/office/powerpoint/2010/main" val="3790920922"/>
+      </p:ext>
+    </p:extLst>
+  </p:cSld>
+  <p:clrMapOvr>
+    <a:masterClrMapping/>
+  </p:clrMapOvr>
+</p:sld>
+</file>
+
+<file path=ppt/slides/slide5.xml><?xml version="1.0" encoding="utf-8"?>
+<p:sld xmlns:a="http://schemas.openxmlformats.org/drawingml/2006/main" xmlns:r="http://schemas.openxmlformats.org/officeDocument/2006/relationships" xmlns:p="http://schemas.openxmlformats.org/presentationml/2006/main">
+  <p:cSld>
+    <p:spTree>
+      <p:nvGrpSpPr>
+        <p:cNvPr id="1" name=""/>
+        <p:cNvGrpSpPr/>
+        <p:nvPr/>
+      </p:nvGrpSpPr>
+      <p:grpSpPr>
+        <a:xfrm>
+          <a:off x="0" y="0"/>
+          <a:ext cx="0" cy="0"/>
+          <a:chOff x="0" y="0"/>
+          <a:chExt cx="0" cy="0"/>
+        </a:xfrm>
+      </p:grpSpPr>
+      <p:sp>
+        <p:nvSpPr>
+          <p:cNvPr id="5" name="Titel 4"/>
+          <p:cNvSpPr>
+            <a:spLocks noGrp="1"/>
+          </p:cNvSpPr>
+          <p:nvPr>
+            <p:ph type="title"/>
+          </p:nvPr>
+        </p:nvSpPr>
+        <p:spPr/>
+        <p:txBody>
+          <a:bodyPr/>
+          <a:lstStyle/>
+          <a:p>
+            <a:r>
+              <a:rPr lang="de-DE" dirty="0" err="1"/>
+              <a:t>Signature</a:t>
+            </a:r>
+            <a:r>
+              <a:rPr lang="de-DE" dirty="0"/>
+              <a:t> Sheet</a:t>
+            </a:r>
+          </a:p>
+        </p:txBody>
+      </p:sp>
+      <p:sp>
+        <p:nvSpPr>
+          <p:cNvPr id="2" name="Textplatzhalter 1">
+            <a:extLst>
+              <a:ext uri="{FF2B5EF4-FFF2-40B4-BE49-F238E27FC236}">
+                <a16:creationId xmlns:a16="http://schemas.microsoft.com/office/drawing/2014/main" id="{8EECAAA1-E867-A78C-CBAD-78694226BC6F}"/>
+              </a:ext>
+            </a:extLst>
+          </p:cNvPr>
+          <p:cNvSpPr>
+            <a:spLocks noGrp="1"/>
+          </p:cNvSpPr>
+          <p:nvPr>
+            <p:ph type="body" sz="quarter" idx="17"/>
+          </p:nvPr>
+        </p:nvSpPr>
+        <p:spPr/>
+        <p:txBody>
+          <a:bodyPr/>
+          <a:lstStyle/>
+          <a:p>
+            <a:endParaRPr lang="de-DE"/>
+          </a:p>
+        </p:txBody>
+      </p:sp>
+      <p:graphicFrame>
+        <p:nvGraphicFramePr>
+          <p:cNvPr id="7" name="Inhaltsplatzhalter 6"/>
+          <p:cNvGraphicFramePr>
+            <a:graphicFrameLocks noGrp="1"/>
+          </p:cNvGraphicFramePr>
+          <p:nvPr>
+            <p:ph sz="quarter" idx="4294967295"/>
+            <p:extLst>
+              <p:ext uri="{D42A27DB-BD31-4B8C-83A1-F6EECF244321}">
+                <p14:modId xmlns:p14="http://schemas.microsoft.com/office/powerpoint/2010/main" val="1603631019"/>
+              </p:ext>
+            </p:extLst>
+          </p:nvPr>
+        </p:nvGraphicFramePr>
+        <p:xfrm>
+          <a:off x="599852" y="3801143"/>
+          <a:ext cx="11258548" cy="1950554"/>
+        </p:xfrm>
+        <a:graphic>
+          <a:graphicData uri="http://schemas.openxmlformats.org/drawingml/2006/table">
+            <a:tbl>
+              <a:tblPr firstRow="1" bandRow="1">
+                <a:tableStyleId>{5C22544A-7EE6-4342-B048-85BDC9FD1C3A}</a:tableStyleId>
+              </a:tblPr>
+              <a:tblGrid>
+                <a:gridCol w="2814637">
+                  <a:extLst>
+                    <a:ext uri="{9D8B030D-6E8A-4147-A177-3AD203B41FA5}">
+                      <a16:colId xmlns:a16="http://schemas.microsoft.com/office/drawing/2014/main" val="20000"/>
+                    </a:ext>
+                  </a:extLst>
+                </a:gridCol>
+                <a:gridCol w="2814637">
+                  <a:extLst>
+                    <a:ext uri="{9D8B030D-6E8A-4147-A177-3AD203B41FA5}">
+                      <a16:colId xmlns:a16="http://schemas.microsoft.com/office/drawing/2014/main" val="20001"/>
+                    </a:ext>
+                  </a:extLst>
+                </a:gridCol>
+                <a:gridCol w="2814637">
+                  <a:extLst>
+                    <a:ext uri="{9D8B030D-6E8A-4147-A177-3AD203B41FA5}">
+                      <a16:colId xmlns:a16="http://schemas.microsoft.com/office/drawing/2014/main" val="20002"/>
+                    </a:ext>
+                  </a:extLst>
+                </a:gridCol>
+                <a:gridCol w="2814637">
+                  <a:extLst>
+                    <a:ext uri="{9D8B030D-6E8A-4147-A177-3AD203B41FA5}">
+                      <a16:colId xmlns:a16="http://schemas.microsoft.com/office/drawing/2014/main" val="20003"/>
+                    </a:ext>
+                  </a:extLst>
+                </a:gridCol>
+              </a:tblGrid>
+              <a:tr h="303973">
+                <a:tc>
+                  <a:txBody>
+                    <a:bodyPr/>
+                    <a:lstStyle/>
+                    <a:p>
+                      <a:pPr algn="l">
+                        <a:lnSpc>
+                          <a:spcPct val="115000"/>
+                        </a:lnSpc>
+                        <a:spcAft>
+                          <a:spcPts val="0"/>
+                        </a:spcAft>
+                      </a:pPr>
+                      <a:r>
+                        <a:rPr lang="en-GB" sz="1300" b="1" dirty="0">
+                          <a:latin typeface="Arial"/>
+                          <a:ea typeface="Times New Roman"/>
+                          <a:cs typeface="Times New Roman"/>
+                        </a:rPr>
+                        <a:t>Role</a:t>
+                      </a:r>
+                      <a:endParaRPr lang="de-DE" sz="1300" dirty="0">
+                        <a:latin typeface="Arial"/>
+                        <a:ea typeface="Times New Roman"/>
+                        <a:cs typeface="Times New Roman"/>
+                      </a:endParaRPr>
+                    </a:p>
+                  </a:txBody>
+                  <a:tcPr marT="0" marB="0" anchor="ctr"/>
+                </a:tc>
+                <a:tc>
+                  <a:txBody>
+                    <a:bodyPr/>
+                    <a:lstStyle/>
+                    <a:p>
+                      <a:pPr algn="l">
+                        <a:lnSpc>
+                          <a:spcPct val="115000"/>
+                        </a:lnSpc>
+                        <a:spcAft>
+                          <a:spcPts val="0"/>
+                        </a:spcAft>
+                      </a:pPr>
+                      <a:r>
+                        <a:rPr lang="en-GB" sz="1300" b="1">
+                          <a:latin typeface="Arial"/>
+                          <a:ea typeface="Times New Roman"/>
+                          <a:cs typeface="Times New Roman"/>
+                        </a:rPr>
+                        <a:t>Name, Org.-U.</a:t>
+                      </a:r>
+                      <a:endParaRPr lang="de-DE" sz="1300">
+                        <a:latin typeface="Arial"/>
+                        <a:ea typeface="Times New Roman"/>
+                        <a:cs typeface="Times New Roman"/>
+                      </a:endParaRPr>
+                    </a:p>
+                  </a:txBody>
+                  <a:tcPr marT="0" marB="0" anchor="ctr"/>
+                </a:tc>
+                <a:tc>
+                  <a:txBody>
+                    <a:bodyPr/>
+                    <a:lstStyle/>
+                    <a:p>
+                      <a:pPr algn="l">
+                        <a:lnSpc>
+                          <a:spcPct val="115000"/>
+                        </a:lnSpc>
+                        <a:spcAft>
+                          <a:spcPts val="0"/>
+                        </a:spcAft>
+                      </a:pPr>
+                      <a:r>
+                        <a:rPr lang="en-GB" sz="1300" b="1">
+                          <a:latin typeface="Arial"/>
+                          <a:ea typeface="Times New Roman"/>
+                          <a:cs typeface="Times New Roman"/>
+                        </a:rPr>
+                        <a:t>Date</a:t>
+                      </a:r>
+                      <a:endParaRPr lang="de-DE" sz="1300">
+                        <a:latin typeface="Arial"/>
+                        <a:ea typeface="Times New Roman"/>
+                        <a:cs typeface="Times New Roman"/>
+                      </a:endParaRPr>
+                    </a:p>
+                  </a:txBody>
+                  <a:tcPr marT="0" marB="0" anchor="ctr"/>
+                </a:tc>
+                <a:tc>
+                  <a:txBody>
+                    <a:bodyPr/>
+                    <a:lstStyle/>
+                    <a:p>
+                      <a:pPr algn="l">
+                        <a:lnSpc>
+                          <a:spcPct val="115000"/>
+                        </a:lnSpc>
+                        <a:spcAft>
+                          <a:spcPts val="0"/>
+                        </a:spcAft>
+                      </a:pPr>
+                      <a:r>
+                        <a:rPr lang="en-GB" sz="1300" b="1">
+                          <a:latin typeface="Arial"/>
+                          <a:ea typeface="Times New Roman"/>
+                          <a:cs typeface="Times New Roman"/>
+                        </a:rPr>
+                        <a:t>Signature</a:t>
+                      </a:r>
+                      <a:endParaRPr lang="de-DE" sz="1300">
+                        <a:latin typeface="Arial"/>
+                        <a:ea typeface="Times New Roman"/>
+                        <a:cs typeface="Times New Roman"/>
+                      </a:endParaRPr>
+                    </a:p>
+                  </a:txBody>
+                  <a:tcPr marT="0" marB="0" anchor="ctr"/>
+                </a:tc>
+                <a:extLst>
+                  <a:ext uri="{0D108BD9-81ED-4DB2-BD59-A6C34878D82A}">
+                    <a16:rowId xmlns:a16="http://schemas.microsoft.com/office/drawing/2014/main" val="10000"/>
+                  </a:ext>
+                </a:extLst>
+              </a:tr>
+              <a:tr h="384043">
+                <a:tc>
+                  <a:txBody>
+                    <a:bodyPr/>
+                    <a:lstStyle/>
+                    <a:p>
+                      <a:pPr algn="l">
+                        <a:lnSpc>
+                          <a:spcPct val="115000"/>
+                        </a:lnSpc>
+                        <a:spcAft>
+                          <a:spcPts val="0"/>
+                        </a:spcAft>
+                      </a:pPr>
+                      <a:r>
+                        <a:rPr lang="en-GB" sz="1300" b="1" dirty="0">
+                          <a:latin typeface="Arial"/>
+                          <a:ea typeface="Times New Roman"/>
+                          <a:cs typeface="Times New Roman"/>
+                        </a:rPr>
+                        <a:t>Project Manager</a:t>
+                      </a:r>
+                      <a:endParaRPr lang="de-DE" sz="1300" dirty="0">
+                        <a:latin typeface="Arial"/>
+                        <a:ea typeface="Times New Roman"/>
+                        <a:cs typeface="Times New Roman"/>
+                      </a:endParaRPr>
+                    </a:p>
+                  </a:txBody>
+                  <a:tcPr marT="0" marB="0" anchor="ctr"/>
+                </a:tc>
+                <a:tc>
+                  <a:txBody>
+                    <a:bodyPr/>
+                    <a:lstStyle/>
+                    <a:p>
+                      <a:pPr algn="l">
+                        <a:lnSpc>
+                          <a:spcPct val="115000"/>
+                        </a:lnSpc>
+                        <a:spcAft>
+                          <a:spcPts val="0"/>
+                        </a:spcAft>
+                      </a:pPr>
+                      <a:endParaRPr lang="en-GB" sz="1300" dirty="0">
+                        <a:latin typeface="Arial"/>
+                        <a:ea typeface="Times New Roman"/>
+                        <a:cs typeface="Times New Roman"/>
+                      </a:endParaRPr>
+                    </a:p>
+                  </a:txBody>
+                  <a:tcPr marT="0" marB="0" anchor="ctr"/>
+                </a:tc>
+                <a:tc>
+                  <a:txBody>
+                    <a:bodyPr/>
+                    <a:lstStyle/>
+                    <a:p>
+                      <a:pPr algn="l">
+                        <a:lnSpc>
+                          <a:spcPct val="115000"/>
+                        </a:lnSpc>
+                        <a:spcAft>
+                          <a:spcPts val="0"/>
+                        </a:spcAft>
+                      </a:pPr>
+                      <a:endParaRPr lang="en-GB" sz="1300">
+                        <a:latin typeface="Arial"/>
+                        <a:ea typeface="Times New Roman"/>
+                        <a:cs typeface="Times New Roman"/>
+                      </a:endParaRPr>
+                    </a:p>
+                  </a:txBody>
+                  <a:tcPr marT="0" marB="0" anchor="ctr"/>
+                </a:tc>
+                <a:tc>
+                  <a:txBody>
+                    <a:bodyPr/>
+                    <a:lstStyle/>
+                    <a:p>
+                      <a:pPr algn="l">
+                        <a:lnSpc>
+                          <a:spcPct val="115000"/>
+                        </a:lnSpc>
+                        <a:spcAft>
+                          <a:spcPts val="0"/>
+                        </a:spcAft>
+                      </a:pPr>
+                      <a:endParaRPr lang="en-GB" sz="1300">
+                        <a:latin typeface="Arial"/>
+                        <a:ea typeface="Times New Roman"/>
+                        <a:cs typeface="Times New Roman"/>
+                      </a:endParaRPr>
+                    </a:p>
+                  </a:txBody>
+                  <a:tcPr marT="0" marB="0" anchor="ctr"/>
+                </a:tc>
+                <a:extLst>
+                  <a:ext uri="{0D108BD9-81ED-4DB2-BD59-A6C34878D82A}">
+                    <a16:rowId xmlns:a16="http://schemas.microsoft.com/office/drawing/2014/main" val="10001"/>
+                  </a:ext>
+                </a:extLst>
+              </a:tr>
+              <a:tr h="288032">
+                <a:tc>
+                  <a:txBody>
+                    <a:bodyPr/>
+                    <a:lstStyle/>
+                    <a:p>
+                      <a:pPr algn="l">
+                        <a:lnSpc>
+                          <a:spcPct val="115000"/>
+                        </a:lnSpc>
+                        <a:spcAft>
+                          <a:spcPts val="0"/>
+                        </a:spcAft>
+                      </a:pPr>
+                      <a:r>
+                        <a:rPr lang="en-GB" sz="1300" b="1" dirty="0">
+                          <a:latin typeface="Arial"/>
+                          <a:ea typeface="Times New Roman"/>
+                          <a:cs typeface="Times New Roman"/>
+                        </a:rPr>
+                        <a:t>Ordering Person</a:t>
+                      </a:r>
+                      <a:endParaRPr lang="de-DE" sz="1300" dirty="0">
+                        <a:latin typeface="Arial"/>
+                        <a:ea typeface="Times New Roman"/>
+                        <a:cs typeface="Times New Roman"/>
+                      </a:endParaRPr>
+                    </a:p>
+                  </a:txBody>
+                  <a:tcPr marT="0" marB="0" anchor="ctr"/>
+                </a:tc>
+                <a:tc>
+                  <a:txBody>
+                    <a:bodyPr/>
+                    <a:lstStyle/>
+                    <a:p>
+                      <a:pPr algn="l">
+                        <a:lnSpc>
+                          <a:spcPct val="115000"/>
+                        </a:lnSpc>
+                        <a:spcAft>
+                          <a:spcPts val="0"/>
+                        </a:spcAft>
+                      </a:pPr>
+                      <a:endParaRPr lang="en-GB" sz="1300">
+                        <a:latin typeface="Arial"/>
+                        <a:ea typeface="Times New Roman"/>
+                        <a:cs typeface="Times New Roman"/>
+                      </a:endParaRPr>
+                    </a:p>
+                  </a:txBody>
+                  <a:tcPr marT="0" marB="0" anchor="ctr"/>
+                </a:tc>
+                <a:tc>
+                  <a:txBody>
+                    <a:bodyPr/>
+                    <a:lstStyle/>
+                    <a:p>
+                      <a:pPr algn="l">
+                        <a:lnSpc>
+                          <a:spcPct val="115000"/>
+                        </a:lnSpc>
+                        <a:spcAft>
+                          <a:spcPts val="0"/>
+                        </a:spcAft>
+                      </a:pPr>
+                      <a:endParaRPr lang="en-GB" sz="1300">
+                        <a:latin typeface="Arial"/>
+                        <a:ea typeface="Times New Roman"/>
+                        <a:cs typeface="Times New Roman"/>
+                      </a:endParaRPr>
+                    </a:p>
+                  </a:txBody>
+                  <a:tcPr marT="0" marB="0" anchor="ctr"/>
+                </a:tc>
+                <a:tc>
+                  <a:txBody>
+                    <a:bodyPr/>
+                    <a:lstStyle/>
+                    <a:p>
+                      <a:pPr algn="l">
+                        <a:lnSpc>
+                          <a:spcPct val="115000"/>
+                        </a:lnSpc>
+                        <a:spcAft>
+                          <a:spcPts val="0"/>
+                        </a:spcAft>
+                      </a:pPr>
+                      <a:endParaRPr lang="en-GB" sz="1300">
+                        <a:latin typeface="Arial"/>
+                        <a:ea typeface="Times New Roman"/>
+                        <a:cs typeface="Times New Roman"/>
+                      </a:endParaRPr>
+                    </a:p>
+                  </a:txBody>
+                  <a:tcPr marT="0" marB="0" anchor="ctr"/>
+                </a:tc>
+                <a:extLst>
+                  <a:ext uri="{0D108BD9-81ED-4DB2-BD59-A6C34878D82A}">
+                    <a16:rowId xmlns:a16="http://schemas.microsoft.com/office/drawing/2014/main" val="10002"/>
+                  </a:ext>
+                </a:extLst>
+              </a:tr>
+              <a:tr h="480053">
+                <a:tc>
+                  <a:txBody>
+                    <a:bodyPr/>
+                    <a:lstStyle/>
+                    <a:p>
+                      <a:pPr algn="l">
+                        <a:lnSpc>
+                          <a:spcPct val="115000"/>
+                        </a:lnSpc>
+                        <a:spcAft>
+                          <a:spcPts val="0"/>
+                        </a:spcAft>
+                      </a:pPr>
+                      <a:r>
+                        <a:rPr lang="en-GB" sz="1300" b="1" dirty="0">
+                          <a:latin typeface="Arial"/>
+                          <a:ea typeface="Times New Roman"/>
+                          <a:cs typeface="Times New Roman"/>
+                        </a:rPr>
+                        <a:t>IT(implementation) Responsible</a:t>
+                      </a:r>
+                      <a:endParaRPr lang="de-DE" sz="1300" dirty="0">
+                        <a:latin typeface="Arial"/>
+                        <a:ea typeface="Times New Roman"/>
+                        <a:cs typeface="Times New Roman"/>
+                      </a:endParaRPr>
+                    </a:p>
+                    <a:p>
+                      <a:pPr algn="l">
+                        <a:lnSpc>
+                          <a:spcPct val="115000"/>
+                        </a:lnSpc>
+                        <a:spcAft>
+                          <a:spcPts val="0"/>
+                        </a:spcAft>
+                      </a:pPr>
+                      <a:r>
+                        <a:rPr lang="en-GB" sz="1100" dirty="0">
+                          <a:latin typeface="Arial"/>
+                          <a:ea typeface="Times New Roman"/>
+                          <a:cs typeface="Times New Roman"/>
+                        </a:rPr>
+                        <a:t>(tech.)</a:t>
+                      </a:r>
+                      <a:endParaRPr lang="de-DE" sz="1300" dirty="0">
+                        <a:latin typeface="Arial"/>
+                        <a:ea typeface="Times New Roman"/>
+                        <a:cs typeface="Times New Roman"/>
+                      </a:endParaRPr>
+                    </a:p>
+                  </a:txBody>
+                  <a:tcPr marT="0" marB="0" anchor="ctr"/>
+                </a:tc>
+                <a:tc>
+                  <a:txBody>
+                    <a:bodyPr/>
+                    <a:lstStyle/>
+                    <a:p>
+                      <a:pPr algn="l">
+                        <a:lnSpc>
+                          <a:spcPct val="115000"/>
+                        </a:lnSpc>
+                        <a:spcAft>
+                          <a:spcPts val="0"/>
+                        </a:spcAft>
+                      </a:pPr>
+                      <a:endParaRPr lang="en-GB" sz="1300">
+                        <a:latin typeface="Arial"/>
+                        <a:ea typeface="Times New Roman"/>
+                        <a:cs typeface="Times New Roman"/>
+                      </a:endParaRPr>
+                    </a:p>
+                  </a:txBody>
+                  <a:tcPr marT="0" marB="0" anchor="ctr"/>
+                </a:tc>
+                <a:tc>
+                  <a:txBody>
+                    <a:bodyPr/>
+                    <a:lstStyle/>
+                    <a:p>
+                      <a:pPr algn="l">
+                        <a:lnSpc>
+                          <a:spcPct val="115000"/>
+                        </a:lnSpc>
+                        <a:spcAft>
+                          <a:spcPts val="0"/>
+                        </a:spcAft>
+                      </a:pPr>
+                      <a:endParaRPr lang="en-GB" sz="1300">
+                        <a:latin typeface="Arial"/>
+                        <a:ea typeface="Times New Roman"/>
+                        <a:cs typeface="Times New Roman"/>
+                      </a:endParaRPr>
+                    </a:p>
+                  </a:txBody>
+                  <a:tcPr marT="0" marB="0" anchor="ctr"/>
+                </a:tc>
+                <a:tc>
+                  <a:txBody>
+                    <a:bodyPr/>
+                    <a:lstStyle/>
+                    <a:p>
+                      <a:pPr algn="l">
+                        <a:lnSpc>
+                          <a:spcPct val="115000"/>
+                        </a:lnSpc>
+                        <a:spcAft>
+                          <a:spcPts val="0"/>
+                        </a:spcAft>
+                      </a:pPr>
+                      <a:endParaRPr lang="en-GB" sz="1300">
+                        <a:latin typeface="Arial"/>
+                        <a:ea typeface="Times New Roman"/>
+                        <a:cs typeface="Times New Roman"/>
+                      </a:endParaRPr>
+                    </a:p>
+                  </a:txBody>
+                  <a:tcPr marT="0" marB="0" anchor="ctr"/>
+                </a:tc>
+                <a:extLst>
+                  <a:ext uri="{0D108BD9-81ED-4DB2-BD59-A6C34878D82A}">
+                    <a16:rowId xmlns:a16="http://schemas.microsoft.com/office/drawing/2014/main" val="10003"/>
+                  </a:ext>
+                </a:extLst>
+              </a:tr>
+              <a:tr h="494453">
+                <a:tc>
+                  <a:txBody>
+                    <a:bodyPr/>
+                    <a:lstStyle/>
+                    <a:p>
+                      <a:pPr algn="l">
+                        <a:lnSpc>
+                          <a:spcPct val="115000"/>
+                        </a:lnSpc>
+                        <a:spcAft>
+                          <a:spcPts val="0"/>
+                        </a:spcAft>
+                      </a:pPr>
+                      <a:r>
+                        <a:rPr lang="en-GB" sz="1300" b="1" dirty="0">
+                          <a:latin typeface="Arial"/>
+                          <a:ea typeface="Times New Roman"/>
+                          <a:cs typeface="Times New Roman"/>
+                        </a:rPr>
+                        <a:t>Process Consultant</a:t>
+                      </a:r>
+                      <a:endParaRPr lang="de-DE" sz="1300" dirty="0">
+                        <a:latin typeface="Arial"/>
+                        <a:ea typeface="Times New Roman"/>
+                        <a:cs typeface="Times New Roman"/>
+                      </a:endParaRPr>
+                    </a:p>
+                    <a:p>
+                      <a:pPr algn="l">
+                        <a:lnSpc>
+                          <a:spcPct val="115000"/>
+                        </a:lnSpc>
+                        <a:spcAft>
+                          <a:spcPts val="0"/>
+                        </a:spcAft>
+                      </a:pPr>
+                      <a:r>
+                        <a:rPr lang="en-GB" sz="1100" dirty="0">
+                          <a:latin typeface="Arial"/>
+                          <a:ea typeface="Times New Roman"/>
+                          <a:cs typeface="Times New Roman"/>
+                        </a:rPr>
+                        <a:t>(if available)</a:t>
+                      </a:r>
+                      <a:endParaRPr lang="de-DE" sz="1300" dirty="0">
+                        <a:latin typeface="Arial"/>
+                        <a:ea typeface="Times New Roman"/>
+                        <a:cs typeface="Times New Roman"/>
+                      </a:endParaRPr>
+                    </a:p>
+                  </a:txBody>
+                  <a:tcPr marT="0" marB="0" anchor="ctr"/>
+                </a:tc>
+                <a:tc>
+                  <a:txBody>
+                    <a:bodyPr/>
+                    <a:lstStyle/>
+                    <a:p>
+                      <a:pPr algn="l">
+                        <a:lnSpc>
+                          <a:spcPct val="115000"/>
+                        </a:lnSpc>
+                        <a:spcAft>
+                          <a:spcPts val="0"/>
+                        </a:spcAft>
+                      </a:pPr>
+                      <a:endParaRPr lang="en-GB" sz="1300" dirty="0">
+                        <a:latin typeface="Arial"/>
+                        <a:ea typeface="Times New Roman"/>
+                        <a:cs typeface="Times New Roman"/>
+                      </a:endParaRPr>
+                    </a:p>
+                  </a:txBody>
+                  <a:tcPr marT="0" marB="0" anchor="ctr"/>
+                </a:tc>
+                <a:tc>
+                  <a:txBody>
+                    <a:bodyPr/>
+                    <a:lstStyle/>
+                    <a:p>
+                      <a:pPr algn="l">
+                        <a:lnSpc>
+                          <a:spcPct val="115000"/>
+                        </a:lnSpc>
+                        <a:spcAft>
+                          <a:spcPts val="0"/>
+                        </a:spcAft>
+                      </a:pPr>
+                      <a:endParaRPr lang="en-GB" sz="1300" dirty="0">
+                        <a:latin typeface="Arial"/>
+                        <a:ea typeface="Times New Roman"/>
+                        <a:cs typeface="Times New Roman"/>
+                      </a:endParaRPr>
+                    </a:p>
+                  </a:txBody>
+                  <a:tcPr marT="0" marB="0" anchor="ctr"/>
+                </a:tc>
+                <a:tc>
+                  <a:txBody>
+                    <a:bodyPr/>
+                    <a:lstStyle/>
+                    <a:p>
+                      <a:pPr algn="l">
+                        <a:lnSpc>
+                          <a:spcPct val="115000"/>
+                        </a:lnSpc>
+                        <a:spcAft>
+                          <a:spcPts val="0"/>
+                        </a:spcAft>
+                      </a:pPr>
+                      <a:endParaRPr lang="en-GB" sz="1300" dirty="0">
+                        <a:latin typeface="Arial"/>
+                        <a:ea typeface="Times New Roman"/>
+                        <a:cs typeface="Times New Roman"/>
+                      </a:endParaRPr>
+                    </a:p>
+                  </a:txBody>
+                  <a:tcPr marT="0" marB="0" anchor="ctr"/>
+                </a:tc>
+                <a:extLst>
+                  <a:ext uri="{0D108BD9-81ED-4DB2-BD59-A6C34878D82A}">
+                    <a16:rowId xmlns:a16="http://schemas.microsoft.com/office/drawing/2014/main" val="10004"/>
+                  </a:ext>
+                </a:extLst>
+              </a:tr>
+            </a:tbl>
+          </a:graphicData>
+        </a:graphic>
+      </p:graphicFrame>
+      <p:sp>
+        <p:nvSpPr>
+          <p:cNvPr id="8" name="Inhaltsplatzhalter 1"/>
+          <p:cNvSpPr txBox="1">
+            <a:spLocks/>
+          </p:cNvSpPr>
+          <p:nvPr/>
+        </p:nvSpPr>
+        <p:spPr>
+          <a:xfrm>
+            <a:off x="490847" y="1684868"/>
+            <a:ext cx="11257808" cy="2608229"/>
+          </a:xfrm>
+          <a:prstGeom prst="rect">
+            <a:avLst/>
+          </a:prstGeom>
+        </p:spPr>
+        <p:txBody>
+          <a:bodyPr vert="horz" lIns="0" tIns="0" rIns="0" bIns="0" rtlCol="0">
+            <a:normAutofit/>
+          </a:bodyPr>
+          <a:lstStyle/>
+          <a:p>
+            <a:pPr marL="234945" indent="-234945" defTabSz="1219170" fontAlgn="auto">
+              <a:spcBef>
+                <a:spcPts val="800"/>
+              </a:spcBef>
+              <a:spcAft>
+                <a:spcPts val="0"/>
+              </a:spcAft>
+              <a:buClr>
+                <a:schemeClr val="accent1"/>
+              </a:buClr>
+              <a:buSzPct val="100000"/>
+              <a:buFont typeface="Arial" pitchFamily="34" charset="0"/>
+              <a:buChar char="•"/>
+              <a:tabLst>
+                <a:tab pos="234945" algn="l"/>
+              </a:tabLst>
+              <a:defRPr/>
+            </a:pPr>
+            <a:r>
+              <a:rPr lang="en-GB" sz="1400" dirty="0">
+                <a:solidFill>
+                  <a:srgbClr val="020B13"/>
+                </a:solidFill>
+                <a:latin typeface="+mn-lt"/>
+                <a:ea typeface="+mn-ea"/>
+              </a:rPr>
+              <a:t>The ordering person and the person responsible for technical implementation accept with their legally binding signatures below the complete contents of this functional specification. They will oblige to comply and to consider the contents of the functional specification in the implementation of the project.</a:t>
+            </a:r>
+            <a:endParaRPr lang="de-DE" sz="1400" dirty="0">
+              <a:solidFill>
+                <a:srgbClr val="020B13"/>
+              </a:solidFill>
+              <a:latin typeface="+mn-lt"/>
+              <a:ea typeface="+mn-ea"/>
+            </a:endParaRPr>
+          </a:p>
+          <a:p>
+            <a:pPr marL="234945" indent="-234945" defTabSz="1219170" fontAlgn="auto">
+              <a:spcBef>
+                <a:spcPts val="800"/>
+              </a:spcBef>
+              <a:spcAft>
+                <a:spcPts val="0"/>
+              </a:spcAft>
+              <a:buClr>
+                <a:schemeClr val="accent1"/>
+              </a:buClr>
+              <a:buSzPct val="100000"/>
+              <a:buFont typeface="Arial" pitchFamily="34" charset="0"/>
+              <a:buChar char="•"/>
+              <a:tabLst>
+                <a:tab pos="234945" algn="l"/>
+              </a:tabLst>
+              <a:defRPr/>
+            </a:pPr>
+            <a:r>
+              <a:rPr lang="en-GB" sz="1400" dirty="0">
+                <a:solidFill>
+                  <a:srgbClr val="020B13"/>
+                </a:solidFill>
+                <a:latin typeface="+mn-lt"/>
+                <a:ea typeface="+mn-ea"/>
+              </a:rPr>
+              <a:t>If the ordering person and the person responsible for technical implementation should have change requests in several topics, they have to communicate it detailed in written form. The document for the change request has to refer to the according topic in the requirement or functional specification. The project manager has to decide in coordination with the ordering person, if the change request will be accepted.</a:t>
+            </a:r>
+            <a:endParaRPr lang="de-DE" sz="1400" dirty="0">
+              <a:solidFill>
+                <a:srgbClr val="020B13"/>
+              </a:solidFill>
+              <a:latin typeface="+mn-lt"/>
+              <a:ea typeface="+mn-ea"/>
+            </a:endParaRPr>
+          </a:p>
+          <a:p>
+            <a:pPr marL="234945" indent="-234945" defTabSz="1219170" fontAlgn="auto">
+              <a:spcBef>
+                <a:spcPts val="800"/>
+              </a:spcBef>
+              <a:spcAft>
+                <a:spcPts val="0"/>
+              </a:spcAft>
+              <a:buClr>
+                <a:schemeClr val="accent1"/>
+              </a:buClr>
+              <a:buSzPct val="100000"/>
+              <a:buFont typeface="Arial" pitchFamily="34" charset="0"/>
+              <a:buChar char="•"/>
+              <a:tabLst>
+                <a:tab pos="234945" algn="l"/>
+              </a:tabLst>
+              <a:defRPr/>
+            </a:pPr>
+            <a:r>
+              <a:rPr lang="en-GB" sz="1400" dirty="0">
+                <a:solidFill>
+                  <a:srgbClr val="020B13"/>
+                </a:solidFill>
+                <a:latin typeface="+mn-lt"/>
+                <a:ea typeface="+mn-ea"/>
+              </a:rPr>
+              <a:t>Each accepted change request has to be documented as attachment of the functional specification. The change request must refer to the according section the requirements and functional specification.</a:t>
+            </a:r>
+            <a:endParaRPr lang="de-DE" sz="1400" dirty="0">
+              <a:solidFill>
+                <a:srgbClr val="020B13"/>
+              </a:solidFill>
+              <a:latin typeface="+mn-lt"/>
+              <a:ea typeface="+mn-ea"/>
+            </a:endParaRPr>
+          </a:p>
+          <a:p>
+            <a:pPr marL="234945" indent="-234945" defTabSz="1219170" fontAlgn="auto">
+              <a:spcBef>
+                <a:spcPts val="800"/>
+              </a:spcBef>
+              <a:spcAft>
+                <a:spcPts val="0"/>
+              </a:spcAft>
+              <a:buClr>
+                <a:schemeClr val="accent1"/>
+              </a:buClr>
+              <a:buSzPct val="100000"/>
+              <a:tabLst>
+                <a:tab pos="234945" algn="l"/>
+              </a:tabLst>
+              <a:defRPr/>
+            </a:pPr>
+            <a:endParaRPr lang="de-DE" sz="1400" dirty="0">
+              <a:solidFill>
+                <a:srgbClr val="020B13"/>
+              </a:solidFill>
+              <a:latin typeface="+mn-lt"/>
+              <a:ea typeface="+mn-ea"/>
+            </a:endParaRPr>
+          </a:p>
+        </p:txBody>
+      </p:sp>
+      <p:sp>
+        <p:nvSpPr>
+          <p:cNvPr id="4" name="Fußzeilenplatzhalter 5">
+            <a:extLst>
+              <a:ext uri="{FF2B5EF4-FFF2-40B4-BE49-F238E27FC236}">
+                <a16:creationId xmlns:a16="http://schemas.microsoft.com/office/drawing/2014/main" id="{4C026334-DC06-4F46-F6E3-3F6E25303A0C}"/>
+              </a:ext>
+            </a:extLst>
+          </p:cNvPr>
+          <p:cNvSpPr txBox="1">
+            <a:spLocks/>
+          </p:cNvSpPr>
+          <p:nvPr/>
+        </p:nvSpPr>
+        <p:spPr>
+          <a:xfrm>
+            <a:off x="0" y="6527297"/>
+            <a:ext cx="12192000" cy="230832"/>
+          </a:xfrm>
+          <a:prstGeom prst="rect">
+            <a:avLst/>
+          </a:prstGeom>
+          <a:ln/>
+        </p:spPr>
+        <p:txBody>
+          <a:bodyPr anchor="ctr"/>
+          <a:lstStyle>
+            <a:defPPr>
+              <a:defRPr lang="de-DE"/>
+            </a:defPPr>
+            <a:lvl1pPr algn="l" rtl="0" fontAlgn="base">
+              <a:spcBef>
+                <a:spcPct val="0"/>
+              </a:spcBef>
+              <a:spcAft>
+                <a:spcPct val="0"/>
+              </a:spcAft>
+              <a:defRPr sz="900" kern="1200">
+                <a:solidFill>
+                  <a:schemeClr val="tx1"/>
+                </a:solidFill>
+                <a:latin typeface="Arial" pitchFamily="34" charset="0"/>
+                <a:ea typeface="MS PGothic" pitchFamily="34" charset="-128"/>
+                <a:cs typeface="+mn-cs"/>
+              </a:defRPr>
+            </a:lvl1pPr>
+            <a:lvl2pPr marL="457200" algn="l" rtl="0" fontAlgn="base">
+              <a:spcBef>
+                <a:spcPct val="0"/>
+              </a:spcBef>
+              <a:spcAft>
+                <a:spcPct val="0"/>
+              </a:spcAft>
+              <a:defRPr sz="2400" kern="1200">
+                <a:solidFill>
+                  <a:schemeClr val="tx1"/>
+                </a:solidFill>
+                <a:latin typeface="Arial" pitchFamily="34" charset="0"/>
+                <a:ea typeface="MS PGothic" pitchFamily="34" charset="-128"/>
+                <a:cs typeface="+mn-cs"/>
+              </a:defRPr>
+            </a:lvl2pPr>
+            <a:lvl3pPr marL="914400" algn="l" rtl="0" fontAlgn="base">
+              <a:spcBef>
+                <a:spcPct val="0"/>
+              </a:spcBef>
+              <a:spcAft>
+                <a:spcPct val="0"/>
+              </a:spcAft>
+              <a:defRPr sz="2400" kern="1200">
+                <a:solidFill>
+                  <a:schemeClr val="tx1"/>
+                </a:solidFill>
+                <a:latin typeface="Arial" pitchFamily="34" charset="0"/>
+                <a:ea typeface="MS PGothic" pitchFamily="34" charset="-128"/>
+                <a:cs typeface="+mn-cs"/>
+              </a:defRPr>
+            </a:lvl3pPr>
+            <a:lvl4pPr marL="1371600" algn="l" rtl="0" fontAlgn="base">
+              <a:spcBef>
+                <a:spcPct val="0"/>
+              </a:spcBef>
+              <a:spcAft>
+                <a:spcPct val="0"/>
+              </a:spcAft>
+              <a:defRPr sz="2400" kern="1200">
+                <a:solidFill>
+                  <a:schemeClr val="tx1"/>
+                </a:solidFill>
+                <a:latin typeface="Arial" pitchFamily="34" charset="0"/>
+                <a:ea typeface="MS PGothic" pitchFamily="34" charset="-128"/>
+                <a:cs typeface="+mn-cs"/>
+              </a:defRPr>
+            </a:lvl4pPr>
+            <a:lvl5pPr marL="1828800" algn="l" rtl="0" fontAlgn="base">
+              <a:spcBef>
+                <a:spcPct val="0"/>
+              </a:spcBef>
+              <a:spcAft>
+                <a:spcPct val="0"/>
+              </a:spcAft>
+              <a:defRPr sz="2400" kern="1200">
+                <a:solidFill>
+                  <a:schemeClr val="tx1"/>
+                </a:solidFill>
+                <a:latin typeface="Arial" pitchFamily="34" charset="0"/>
+                <a:ea typeface="MS PGothic" pitchFamily="34" charset="-128"/>
+                <a:cs typeface="+mn-cs"/>
+              </a:defRPr>
+            </a:lvl5pPr>
+            <a:lvl6pPr marL="2286000" algn="l" defTabSz="914400" rtl="0" eaLnBrk="1" latinLnBrk="0" hangingPunct="1">
+              <a:defRPr sz="2400" kern="1200">
+                <a:solidFill>
+                  <a:schemeClr val="tx1"/>
+                </a:solidFill>
+                <a:latin typeface="Arial" pitchFamily="34" charset="0"/>
+                <a:ea typeface="MS PGothic" pitchFamily="34" charset="-128"/>
+                <a:cs typeface="+mn-cs"/>
+              </a:defRPr>
+            </a:lvl6pPr>
+            <a:lvl7pPr marL="2743200" algn="l" defTabSz="914400" rtl="0" eaLnBrk="1" latinLnBrk="0" hangingPunct="1">
+              <a:defRPr sz="2400" kern="1200">
+                <a:solidFill>
+                  <a:schemeClr val="tx1"/>
+                </a:solidFill>
+                <a:latin typeface="Arial" pitchFamily="34" charset="0"/>
+                <a:ea typeface="MS PGothic" pitchFamily="34" charset="-128"/>
+                <a:cs typeface="+mn-cs"/>
+              </a:defRPr>
+            </a:lvl7pPr>
+            <a:lvl8pPr marL="3200400" algn="l" defTabSz="914400" rtl="0" eaLnBrk="1" latinLnBrk="0" hangingPunct="1">
+              <a:defRPr sz="2400" kern="1200">
+                <a:solidFill>
+                  <a:schemeClr val="tx1"/>
+                </a:solidFill>
+                <a:latin typeface="Arial" pitchFamily="34" charset="0"/>
+                <a:ea typeface="MS PGothic" pitchFamily="34" charset="-128"/>
+                <a:cs typeface="+mn-cs"/>
+              </a:defRPr>
+            </a:lvl8pPr>
+            <a:lvl9pPr marL="3657600" algn="l" defTabSz="914400" rtl="0" eaLnBrk="1" latinLnBrk="0" hangingPunct="1">
+              <a:defRPr sz="2400" kern="1200">
+                <a:solidFill>
+                  <a:schemeClr val="tx1"/>
+                </a:solidFill>
+                <a:latin typeface="Arial" pitchFamily="34" charset="0"/>
+                <a:ea typeface="MS PGothic" pitchFamily="34" charset="-128"/>
+                <a:cs typeface="+mn-cs"/>
+              </a:defRPr>
+            </a:lvl9pPr>
+          </a:lstStyle>
+          <a:p>
+            <a:pPr algn="ctr">
+              <a:spcBef>
+                <a:spcPts val="600"/>
+              </a:spcBef>
+              <a:buSzPct val="100000"/>
+            </a:pPr>
+            <a:r>
+              <a:rPr lang="en-US" sz="800" noProof="0" dirty="0">
+                <a:solidFill>
+                  <a:srgbClr val="313131"/>
+                </a:solidFill>
+                <a:latin typeface="Arial"/>
+              </a:rPr>
+              <a:t>Armin Turken </a:t>
+            </a:r>
+            <a:r>
+              <a:rPr lang="en-US" sz="800" b="1" noProof="0" dirty="0">
+                <a:solidFill>
+                  <a:srgbClr val="313131"/>
+                </a:solidFill>
+                <a:latin typeface="Arial"/>
+              </a:rPr>
+              <a:t>| </a:t>
+            </a:r>
+            <a:r>
+              <a:rPr lang="en-US" sz="800" noProof="0" dirty="0">
+                <a:solidFill>
+                  <a:srgbClr val="313131"/>
+                </a:solidFill>
+                <a:latin typeface="Arial"/>
+              </a:rPr>
+              <a:t>Deloitte</a:t>
+            </a:r>
+            <a:r>
+              <a:rPr lang="en-US" sz="800" b="1" noProof="0" dirty="0">
+                <a:solidFill>
+                  <a:srgbClr val="313131"/>
+                </a:solidFill>
+                <a:latin typeface="Arial"/>
+              </a:rPr>
+              <a:t> | </a:t>
+            </a:r>
+            <a:r>
+              <a:rPr lang="en-US" sz="800" noProof="0" dirty="0">
+                <a:solidFill>
+                  <a:srgbClr val="313131"/>
+                </a:solidFill>
+              </a:rPr>
+              <a:t>Controlling</a:t>
+            </a:r>
+            <a:endParaRPr lang="en-US" sz="800" noProof="0" dirty="0">
+              <a:solidFill>
+                <a:srgbClr val="313131"/>
+              </a:solidFill>
+              <a:latin typeface="Arial"/>
+            </a:endParaRPr>
+          </a:p>
+        </p:txBody>
+      </p:sp>
+    </p:spTree>
+    <p:extLst>
+      <p:ext uri="{BB962C8B-B14F-4D97-AF65-F5344CB8AC3E}">
+        <p14:creationId xmlns:p14="http://schemas.microsoft.com/office/powerpoint/2010/main" val="2874569361"/>
+      </p:ext>
+    </p:extLst>
+  </p:cSld>
+  <p:clrMapOvr>
+    <a:masterClrMapping/>
+  </p:clrMapOvr>
+</p:sld>
+</file>
+
+<file path=ppt/slides/slide6.xml><?xml version="1.0" encoding="utf-8"?>
 <p:sld xmlns:a="http://schemas.openxmlformats.org/drawingml/2006/main" xmlns:r="http://schemas.openxmlformats.org/officeDocument/2006/relationships" xmlns:p="http://schemas.openxmlformats.org/presentationml/2006/main" show="0">
   <p:cSld>
     <p:spTree>
@@ -8370,7 +15021,7 @@
                 </a:solidFill>
                 <a:latin typeface="Arial"/>
               </a:rPr>
-              <a:t>Armin Turken</a:t>
+              <a:t>Armin Turken </a:t>
             </a:r>
             <a:r>
               <a:rPr lang="en-US" sz="800" b="1" noProof="0" dirty="0">
@@ -11224,11 +17875,120 @@
 
 <file path=ppt/tags/tag56.xml><?xml version="1.0" encoding="utf-8"?>
 <p:tagLst xmlns:a="http://schemas.openxmlformats.org/drawingml/2006/main" xmlns:r="http://schemas.openxmlformats.org/officeDocument/2006/relationships" xmlns:p="http://schemas.openxmlformats.org/presentationml/2006/main">
+  <p:tag name="THINKCELLSHAPEDONOTDELETE" val="thinkcellActiveDocDoNotDelete"/>
+</p:tagLst>
+</file>
+
+<file path=ppt/tags/tag57.xml><?xml version="1.0" encoding="utf-8"?>
+<p:tagLst xmlns:a="http://schemas.openxmlformats.org/drawingml/2006/main" xmlns:r="http://schemas.openxmlformats.org/officeDocument/2006/relationships" xmlns:p="http://schemas.openxmlformats.org/presentationml/2006/main">
+  <p:tag name="COLORSETCLASSNAME" val="ColorSet1"/>
+  <p:tag name="MLI" val="1"/>
+  <p:tag name="SHAPESETGROUPCLASSNAME" val="ShapeSetGroup1"/>
+  <p:tag name="SHAPESETCLASSNAME" val="TitleText"/>
+  <p:tag name="COLORSETGROUPCLASSNAME" val="ColorSetGroup1"/>
+  <p:tag name="FONTSETGROUPCLASSNAME" val="FontSetGroup1"/>
+  <p:tag name="SHAPECLASSNAME" val="TextBox"/>
+  <p:tag name="SHAPECLASSPROTECTIONTYPE" val="0"/>
+  <p:tag name="COLORS" val="-2;-2;-2;-2;-1;-2"/>
+</p:tagLst>
+</file>
+
+<file path=ppt/tags/tag58.xml><?xml version="1.0" encoding="utf-8"?>
+<p:tagLst xmlns:a="http://schemas.openxmlformats.org/drawingml/2006/main" xmlns:r="http://schemas.openxmlformats.org/officeDocument/2006/relationships" xmlns:p="http://schemas.openxmlformats.org/presentationml/2006/main">
+  <p:tag name="COLORSETCLASSNAME" val="ColorSet1"/>
+  <p:tag name="COLORS" val="Blue1;White;-2;-2;White;-2"/>
+</p:tagLst>
+</file>
+
+<file path=ppt/tags/tag59.xml><?xml version="1.0" encoding="utf-8"?>
+<p:tagLst xmlns:a="http://schemas.openxmlformats.org/drawingml/2006/main" xmlns:r="http://schemas.openxmlformats.org/officeDocument/2006/relationships" xmlns:p="http://schemas.openxmlformats.org/presentationml/2006/main">
+  <p:tag name="COLORSETCLASSNAME" val="ColorSet1"/>
+  <p:tag name="MLI" val="1"/>
+  <p:tag name="SHAPESETGROUPCLASSNAME" val="ShapeSetGroup1"/>
+  <p:tag name="SHAPESETCLASSNAME" val="TitleText"/>
+  <p:tag name="COLORSETGROUPCLASSNAME" val="ColorSetGroup1"/>
+  <p:tag name="FONTSETGROUPCLASSNAME" val="FontSetGroup1"/>
+  <p:tag name="SHAPECLASSNAME" val="TextBox"/>
+  <p:tag name="SHAPECLASSPROTECTIONTYPE" val="0"/>
+  <p:tag name="COLORS" val="-2;-2;-2;-2;-1;-2"/>
+</p:tagLst>
+</file>
+
+<file path=ppt/tags/tag6.xml><?xml version="1.0" encoding="utf-8"?>
+<p:tagLst xmlns:a="http://schemas.openxmlformats.org/drawingml/2006/main" xmlns:r="http://schemas.openxmlformats.org/officeDocument/2006/relationships" xmlns:p="http://schemas.openxmlformats.org/presentationml/2006/main">
+  <p:tag name="MIO_CD_LAYOUT_VALID_AREA" val="true"/>
+</p:tagLst>
+</file>
+
+<file path=ppt/tags/tag60.xml><?xml version="1.0" encoding="utf-8"?>
+<p:tagLst xmlns:a="http://schemas.openxmlformats.org/drawingml/2006/main" xmlns:r="http://schemas.openxmlformats.org/officeDocument/2006/relationships" xmlns:p="http://schemas.openxmlformats.org/presentationml/2006/main">
+  <p:tag name="COLORSETCLASSNAME" val="ColorSet1"/>
+  <p:tag name="MLI" val="1"/>
+  <p:tag name="SHAPESETGROUPCLASSNAME" val="ShapeSetGroup1"/>
+  <p:tag name="SHAPESETCLASSNAME" val="TitleText"/>
+  <p:tag name="COLORSETGROUPCLASSNAME" val="ColorSetGroup1"/>
+  <p:tag name="FONTSETGROUPCLASSNAME" val="FontSetGroup1"/>
+  <p:tag name="SHAPECLASSNAME" val="TextBox"/>
+  <p:tag name="SHAPECLASSPROTECTIONTYPE" val="0"/>
+  <p:tag name="COLORS" val="-2;-2;-2;-2;-1;-2"/>
+</p:tagLst>
+</file>
+
+<file path=ppt/tags/tag61.xml><?xml version="1.0" encoding="utf-8"?>
+<p:tagLst xmlns:a="http://schemas.openxmlformats.org/drawingml/2006/main" xmlns:r="http://schemas.openxmlformats.org/officeDocument/2006/relationships" xmlns:p="http://schemas.openxmlformats.org/presentationml/2006/main">
+  <p:tag name="COLORSETCLASSNAME" val="ColorSet1"/>
+  <p:tag name="MLI" val="1"/>
+  <p:tag name="SHAPESETGROUPCLASSNAME" val="ShapeSetGroup1"/>
+  <p:tag name="SHAPESETCLASSNAME" val="TitleText"/>
+  <p:tag name="COLORSETGROUPCLASSNAME" val="ColorSetGroup1"/>
+  <p:tag name="FONTSETGROUPCLASSNAME" val="FontSetGroup1"/>
+  <p:tag name="SHAPECLASSNAME" val="TextBox"/>
+  <p:tag name="SHAPECLASSPROTECTIONTYPE" val="0"/>
+  <p:tag name="COLORS" val="-2;-2;-2;-2;-1;-2"/>
+</p:tagLst>
+</file>
+
+<file path=ppt/tags/tag62.xml><?xml version="1.0" encoding="utf-8"?>
+<p:tagLst xmlns:a="http://schemas.openxmlformats.org/drawingml/2006/main" xmlns:r="http://schemas.openxmlformats.org/officeDocument/2006/relationships" xmlns:p="http://schemas.openxmlformats.org/presentationml/2006/main">
+  <p:tag name="COLORSETCLASSNAME" val="ColorSet1"/>
+  <p:tag name="COLORS" val="Blue1;White;-2;-2;White;-2"/>
+</p:tagLst>
+</file>
+
+<file path=ppt/tags/tag63.xml><?xml version="1.0" encoding="utf-8"?>
+<p:tagLst xmlns:a="http://schemas.openxmlformats.org/drawingml/2006/main" xmlns:r="http://schemas.openxmlformats.org/officeDocument/2006/relationships" xmlns:p="http://schemas.openxmlformats.org/presentationml/2006/main">
+  <p:tag name="COLORSETCLASSNAME" val="ColorSet1"/>
+  <p:tag name="COLORS" val="Blue1;White;-2;-2;White;-2"/>
+</p:tagLst>
+</file>
+
+<file path=ppt/tags/tag64.xml><?xml version="1.0" encoding="utf-8"?>
+<p:tagLst xmlns:a="http://schemas.openxmlformats.org/drawingml/2006/main" xmlns:r="http://schemas.openxmlformats.org/officeDocument/2006/relationships" xmlns:p="http://schemas.openxmlformats.org/presentationml/2006/main">
+  <p:tag name="COLORSETCLASSNAME" val="ColorSet1"/>
+  <p:tag name="COLORS" val="Blue1;White;-2;-2;White;-2"/>
+</p:tagLst>
+</file>
+
+<file path=ppt/tags/tag65.xml><?xml version="1.0" encoding="utf-8"?>
+<p:tagLst xmlns:a="http://schemas.openxmlformats.org/drawingml/2006/main" xmlns:r="http://schemas.openxmlformats.org/officeDocument/2006/relationships" xmlns:p="http://schemas.openxmlformats.org/presentationml/2006/main">
+  <p:tag name="THINKCELLSHAPEDONOTDELETE" val="thinkcellActiveDocDoNotDelete"/>
+</p:tagLst>
+</file>
+
+<file path=ppt/tags/tag66.xml><?xml version="1.0" encoding="utf-8"?>
+<p:tagLst xmlns:a="http://schemas.openxmlformats.org/drawingml/2006/main" xmlns:r="http://schemas.openxmlformats.org/officeDocument/2006/relationships" xmlns:p="http://schemas.openxmlformats.org/presentationml/2006/main">
+  <p:tag name="COLORSETCLASSNAME" val="ColorSet1"/>
+  <p:tag name="COLORS" val="-1;-1;-1;White;-1;-2"/>
+</p:tagLst>
+</file>
+
+<file path=ppt/tags/tag67.xml><?xml version="1.0" encoding="utf-8"?>
+<p:tagLst xmlns:a="http://schemas.openxmlformats.org/drawingml/2006/main" xmlns:r="http://schemas.openxmlformats.org/officeDocument/2006/relationships" xmlns:p="http://schemas.openxmlformats.org/presentationml/2006/main">
   <p:tag name="MIO_GUID" val="b17027d4-9ac8-4d2a-b0b5-6644075b4274"/>
 </p:tagLst>
 </file>
 
-<file path=ppt/tags/tag57.xml><?xml version="1.0" encoding="utf-8"?>
+<file path=ppt/tags/tag68.xml><?xml version="1.0" encoding="utf-8"?>
 <p:tagLst xmlns:a="http://schemas.openxmlformats.org/drawingml/2006/main" xmlns:r="http://schemas.openxmlformats.org/officeDocument/2006/relationships" xmlns:p="http://schemas.openxmlformats.org/presentationml/2006/main">
   <p:tag name="MIO_GUID" val="4406832c-4ef4-4ed0-a016-d6120a1e16e3"/>
   <p:tag name="MIO_EKGUID" val="82c860b0-6ed9-4712-9a00-033079c7b26d"/>
@@ -11241,39 +18001,7 @@
 </p:tagLst>
 </file>
 
-<file path=ppt/tags/tag58.xml><?xml version="1.0" encoding="utf-8"?>
-<p:tagLst xmlns:a="http://schemas.openxmlformats.org/drawingml/2006/main" xmlns:r="http://schemas.openxmlformats.org/officeDocument/2006/relationships" xmlns:p="http://schemas.openxmlformats.org/presentationml/2006/main">
-  <p:tag name="MIO_GUID" val="583e0925-b020-4894-ab53-fea5fa8225ce"/>
-  <p:tag name="MIO_EKGUID" val="3789350f-d353-43b8-ac57-f3b8befb3ab2"/>
-  <p:tag name="MIO_UPDATE" val="True"/>
-  <p:tag name="MIO_VERSION" val="13.04.2022 13:12:48"/>
-  <p:tag name="MIO_DBID" val="fede6900-895c-4459-b97c-72b2b9dac459"/>
-  <p:tag name="MIO_LASTDOWNLOADED" val="15.10.2026 16:09:18.705"/>
-  <p:tag name="MIO_OBJECTNAME" val="Finland"/>
-  <p:tag name="MIO_LASTEDITORNAME" val="Steffi Rauh"/>
-</p:tagLst>
-</file>
-
-<file path=ppt/tags/tag59.xml><?xml version="1.0" encoding="utf-8"?>
-<p:tagLst xmlns:a="http://schemas.openxmlformats.org/drawingml/2006/main" xmlns:r="http://schemas.openxmlformats.org/officeDocument/2006/relationships" xmlns:p="http://schemas.openxmlformats.org/presentationml/2006/main">
-  <p:tag name="MIO_GUID" val="4406832c-4ef4-4ed0-a016-d6120a1e16e3"/>
-  <p:tag name="MIO_EKGUID" val="82c860b0-6ed9-4712-9a00-033079c7b26d"/>
-  <p:tag name="MIO_UPDATE" val="True"/>
-  <p:tag name="MIO_VERSION" val="13.04.2022 13:12:49"/>
-  <p:tag name="MIO_DBID" val="fede6900-895c-4459-b97c-72b2b9dac459"/>
-  <p:tag name="MIO_LASTDOWNLOADED" val="15.10.2026 16:08:55.563"/>
-  <p:tag name="MIO_OBJECTNAME" val="Germany"/>
-  <p:tag name="MIO_LASTEDITORNAME" val="Steffi Rauh"/>
-</p:tagLst>
-</file>
-
-<file path=ppt/tags/tag6.xml><?xml version="1.0" encoding="utf-8"?>
-<p:tagLst xmlns:a="http://schemas.openxmlformats.org/drawingml/2006/main" xmlns:r="http://schemas.openxmlformats.org/officeDocument/2006/relationships" xmlns:p="http://schemas.openxmlformats.org/presentationml/2006/main">
-  <p:tag name="MIO_CD_LAYOUT_VALID_AREA" val="true"/>
-</p:tagLst>
-</file>
-
-<file path=ppt/tags/tag60.xml><?xml version="1.0" encoding="utf-8"?>
+<file path=ppt/tags/tag69.xml><?xml version="1.0" encoding="utf-8"?>
 <p:tagLst xmlns:a="http://schemas.openxmlformats.org/drawingml/2006/main" xmlns:r="http://schemas.openxmlformats.org/officeDocument/2006/relationships" xmlns:p="http://schemas.openxmlformats.org/presentationml/2006/main">
   <p:tag name="MIO_GUID" val="583e0925-b020-4894-ab53-fea5fa8225ce"/>
   <p:tag name="MIO_EKGUID" val="3789350f-d353-43b8-ac57-f3b8befb3ab2"/>
@@ -11289,6 +18017,32 @@
 <file path=ppt/tags/tag7.xml><?xml version="1.0" encoding="utf-8"?>
 <p:tagLst xmlns:a="http://schemas.openxmlformats.org/drawingml/2006/main" xmlns:r="http://schemas.openxmlformats.org/officeDocument/2006/relationships" xmlns:p="http://schemas.openxmlformats.org/presentationml/2006/main">
   <p:tag name="MIO_CD_LAYOUT_VALID_AREA" val="true"/>
+</p:tagLst>
+</file>
+
+<file path=ppt/tags/tag70.xml><?xml version="1.0" encoding="utf-8"?>
+<p:tagLst xmlns:a="http://schemas.openxmlformats.org/drawingml/2006/main" xmlns:r="http://schemas.openxmlformats.org/officeDocument/2006/relationships" xmlns:p="http://schemas.openxmlformats.org/presentationml/2006/main">
+  <p:tag name="MIO_GUID" val="4406832c-4ef4-4ed0-a016-d6120a1e16e3"/>
+  <p:tag name="MIO_EKGUID" val="82c860b0-6ed9-4712-9a00-033079c7b26d"/>
+  <p:tag name="MIO_UPDATE" val="True"/>
+  <p:tag name="MIO_VERSION" val="13.04.2022 13:12:49"/>
+  <p:tag name="MIO_DBID" val="fede6900-895c-4459-b97c-72b2b9dac459"/>
+  <p:tag name="MIO_LASTDOWNLOADED" val="15.10.2026 16:08:55.563"/>
+  <p:tag name="MIO_OBJECTNAME" val="Germany"/>
+  <p:tag name="MIO_LASTEDITORNAME" val="Steffi Rauh"/>
+</p:tagLst>
+</file>
+
+<file path=ppt/tags/tag71.xml><?xml version="1.0" encoding="utf-8"?>
+<p:tagLst xmlns:a="http://schemas.openxmlformats.org/drawingml/2006/main" xmlns:r="http://schemas.openxmlformats.org/officeDocument/2006/relationships" xmlns:p="http://schemas.openxmlformats.org/presentationml/2006/main">
+  <p:tag name="MIO_GUID" val="583e0925-b020-4894-ab53-fea5fa8225ce"/>
+  <p:tag name="MIO_EKGUID" val="3789350f-d353-43b8-ac57-f3b8befb3ab2"/>
+  <p:tag name="MIO_UPDATE" val="True"/>
+  <p:tag name="MIO_VERSION" val="13.04.2022 13:12:48"/>
+  <p:tag name="MIO_DBID" val="fede6900-895c-4459-b97c-72b2b9dac459"/>
+  <p:tag name="MIO_LASTDOWNLOADED" val="15.10.2026 16:09:18.705"/>
+  <p:tag name="MIO_OBJECTNAME" val="Finland"/>
+  <p:tag name="MIO_LASTEDITORNAME" val="Steffi Rauh"/>
 </p:tagLst>
 </file>
 
@@ -12279,21 +19033,6 @@
 </file>
 
 <file path=customXml/item1.xml><?xml version="1.0" encoding="utf-8"?>
-<p:properties xmlns:p="http://schemas.microsoft.com/office/2006/metadata/properties" xmlns:xsi="http://www.w3.org/2001/XMLSchema-instance" xmlns:pc="http://schemas.microsoft.com/office/infopath/2007/PartnerControls">
-  <documentManagement/>
-</p:properties>
-</file>
-
-<file path=customXml/item2.xml><?xml version="1.0" encoding="utf-8"?>
-<?mso-contentType ?>
-<FormTemplates xmlns="http://schemas.microsoft.com/sharepoint/v3/contenttype/forms">
-  <Display>DocumentLibraryForm</Display>
-  <Edit>DocumentLibraryForm</Edit>
-  <New>DocumentLibraryForm</New>
-</FormTemplates>
-</file>
-
-<file path=customXml/item3.xml><?xml version="1.0" encoding="utf-8"?>
 <ct:contentTypeSchema xmlns:ct="http://schemas.microsoft.com/office/2006/metadata/contentType" xmlns:ma="http://schemas.microsoft.com/office/2006/metadata/properties/metaAttributes" ct:_="" ma:_="" ma:contentTypeName="Document" ma:contentTypeID="0x01010054E79D0333608F479BF27F25B640F11A" ma:contentTypeVersion="6" ma:contentTypeDescription="Create a new document." ma:contentTypeScope="" ma:versionID="5a2c94424de62b72b226c0da23bd05a0">
   <xsd:schema xmlns:xsd="http://www.w3.org/2001/XMLSchema" xmlns:xs="http://www.w3.org/2001/XMLSchema" xmlns:p="http://schemas.microsoft.com/office/2006/metadata/properties" xmlns:ns2="c4416e52-f767-4207-bb1b-8a837b1f2956" targetNamespace="http://schemas.microsoft.com/office/2006/metadata/properties" ma:root="true" ma:fieldsID="fb9d153feca8a8ee1b87e649dcddc906" ns2:_="">
     <xsd:import namespace="c4416e52-f767-4207-bb1b-8a837b1f2956"/>
@@ -12449,31 +19188,22 @@
 </ct:contentTypeSchema>
 </file>
 
-<file path=customXml/itemProps1.xml><?xml version="1.0" encoding="utf-8"?>
-<ds:datastoreItem xmlns:ds="http://schemas.openxmlformats.org/officeDocument/2006/customXml" ds:itemID="{D12DAB22-EDE2-40D3-98E2-D6440FC8595C}">
-  <ds:schemaRefs>
-    <ds:schemaRef ds:uri="http://schemas.microsoft.com/office/2006/documentManagement/types"/>
-    <ds:schemaRef ds:uri="http://purl.org/dc/elements/1.1/"/>
-    <ds:schemaRef ds:uri="http://purl.org/dc/dcmitype/"/>
-    <ds:schemaRef ds:uri="c4416e52-f767-4207-bb1b-8a837b1f2956"/>
-    <ds:schemaRef ds:uri="http://www.w3.org/XML/1998/namespace"/>
-    <ds:schemaRef ds:uri="http://schemas.microsoft.com/office/infopath/2007/PartnerControls"/>
-    <ds:schemaRef ds:uri="http://schemas.openxmlformats.org/package/2006/metadata/core-properties"/>
-    <ds:schemaRef ds:uri="http://schemas.microsoft.com/office/2006/metadata/properties"/>
-    <ds:schemaRef ds:uri="http://purl.org/dc/terms/"/>
-  </ds:schemaRefs>
-</ds:datastoreItem>
+<file path=customXml/item2.xml><?xml version="1.0" encoding="utf-8"?>
+<p:properties xmlns:p="http://schemas.microsoft.com/office/2006/metadata/properties" xmlns:xsi="http://www.w3.org/2001/XMLSchema-instance" xmlns:pc="http://schemas.microsoft.com/office/infopath/2007/PartnerControls">
+  <documentManagement/>
+</p:properties>
 </file>
 
-<file path=customXml/itemProps2.xml><?xml version="1.0" encoding="utf-8"?>
-<ds:datastoreItem xmlns:ds="http://schemas.openxmlformats.org/officeDocument/2006/customXml" ds:itemID="{BDBCE10D-CCA8-4582-B291-30C576BB99DF}">
-  <ds:schemaRefs>
-    <ds:schemaRef ds:uri="http://schemas.microsoft.com/sharepoint/v3/contenttype/forms"/>
-  </ds:schemaRefs>
-</ds:datastoreItem>
+<file path=customXml/item3.xml><?xml version="1.0" encoding="utf-8"?>
+<?mso-contentType ?>
+<FormTemplates xmlns="http://schemas.microsoft.com/sharepoint/v3/contenttype/forms">
+  <Display>DocumentLibraryForm</Display>
+  <Edit>DocumentLibraryForm</Edit>
+  <New>DocumentLibraryForm</New>
+</FormTemplates>
 </file>
 
-<file path=customXml/itemProps3.xml><?xml version="1.0" encoding="utf-8"?>
+<file path=customXml/itemProps1.xml><?xml version="1.0" encoding="utf-8"?>
 <ds:datastoreItem xmlns:ds="http://schemas.openxmlformats.org/officeDocument/2006/customXml" ds:itemID="{DB4646FF-750C-4F4D-9A06-FDA7D68E207D}">
   <ds:schemaRefs>
     <ds:schemaRef ds:uri="c4416e52-f767-4207-bb1b-8a837b1f2956"/>
@@ -12491,6 +19221,30 @@
 </ds:datastoreItem>
 </file>
 
+<file path=customXml/itemProps2.xml><?xml version="1.0" encoding="utf-8"?>
+<ds:datastoreItem xmlns:ds="http://schemas.openxmlformats.org/officeDocument/2006/customXml" ds:itemID="{D12DAB22-EDE2-40D3-98E2-D6440FC8595C}">
+  <ds:schemaRefs>
+    <ds:schemaRef ds:uri="http://schemas.microsoft.com/office/2006/documentManagement/types"/>
+    <ds:schemaRef ds:uri="http://purl.org/dc/elements/1.1/"/>
+    <ds:schemaRef ds:uri="http://purl.org/dc/dcmitype/"/>
+    <ds:schemaRef ds:uri="c4416e52-f767-4207-bb1b-8a837b1f2956"/>
+    <ds:schemaRef ds:uri="http://www.w3.org/XML/1998/namespace"/>
+    <ds:schemaRef ds:uri="http://schemas.microsoft.com/office/infopath/2007/PartnerControls"/>
+    <ds:schemaRef ds:uri="http://schemas.openxmlformats.org/package/2006/metadata/core-properties"/>
+    <ds:schemaRef ds:uri="http://schemas.microsoft.com/office/2006/metadata/properties"/>
+    <ds:schemaRef ds:uri="http://purl.org/dc/terms/"/>
+  </ds:schemaRefs>
+</ds:datastoreItem>
+</file>
+
+<file path=customXml/itemProps3.xml><?xml version="1.0" encoding="utf-8"?>
+<ds:datastoreItem xmlns:ds="http://schemas.openxmlformats.org/officeDocument/2006/customXml" ds:itemID="{BDBCE10D-CCA8-4582-B291-30C576BB99DF}">
+  <ds:schemaRefs>
+    <ds:schemaRef ds:uri="http://schemas.microsoft.com/sharepoint/v3/contenttype/forms"/>
+  </ds:schemaRefs>
+</ds:datastoreItem>
+</file>
+
 <file path=docMetadata/LabelInfo.xml><?xml version="1.0" encoding="utf-8"?>
 <clbl:labelList xmlns:clbl="http://schemas.microsoft.com/office/2020/mipLabelMetadata">
   <clbl:label id="{a8218bc3-7d4c-4a61-b912-a6ca487118dd}" enabled="0" method="" siteId="{a8218bc3-7d4c-4a61-b912-a6ca487118dd}" removed="1"/>
